--- a/prezentacie/AI_projekty_Forbes_SK_diskusia.pptx
+++ b/prezentacie/AI_projekty_Forbes_SK_diskusia.pptx
@@ -15,9 +15,12 @@
     <p:sldId id="263" r:id="rId9"/>
     <p:sldId id="264" r:id="rId10"/>
     <p:sldId id="265" r:id="rId11"/>
+    <p:sldId id="266" r:id="rId12"/>
+    <p:sldId id="267" r:id="rId13"/>
+    <p:sldId id="268" r:id="rId14"/>
   </p:sldIdLst>
   <p:notesMasterIdLst>
-    <p:notesMasterId r:id="rId12"/>
+    <p:notesMasterId r:id="rId15"/>
   </p:notesMasterIdLst>
   <p:sldSz cx="12192000" cy="6858000"/>
   <p:notesSz cx="6858000" cy="12192000"/>
@@ -623,6 +626,270 @@
             <a:fld id="{F7021451-1387-4CA6-816F-3879F97B5CBC}" type="slidenum">
               <a:rPr lang="en-US"/>
               <a:t>10</a:t>
+            </a:fld>
+            <a:endParaRPr lang="en-US"/>
+          </a:p>
+        </p:txBody>
+      </p:sp>
+    </p:spTree>
+    <p:extLst>
+      <p:ext uri="{BB962C8B-B14F-4D97-AF65-F5344CB8AC3E}">
+        <p14:creationId xmlns:p14="http://schemas.microsoft.com/office/powerpoint/2010/main" val="1024086991"/>
+      </p:ext>
+    </p:extLst>
+  </p:cSld>
+  <p:clrMapOvr>
+    <a:masterClrMapping/>
+  </p:clrMapOvr>
+</p:notes>
+</file>
+
+<file path=ppt/notesSlides/notesSlide11.xml><?xml version="1.0" encoding="utf-8"?>
+<p:notes xmlns:a="http://schemas.openxmlformats.org/drawingml/2006/main" xmlns:r="http://schemas.openxmlformats.org/officeDocument/2006/relationships" xmlns:p="http://schemas.openxmlformats.org/presentationml/2006/main">
+  <p:cSld>
+    <p:spTree>
+      <p:nvGrpSpPr>
+        <p:cNvPr id="1" name=""/>
+        <p:cNvGrpSpPr/>
+        <p:nvPr/>
+      </p:nvGrpSpPr>
+      <p:grpSpPr>
+        <a:xfrm>
+          <a:off x="0" y="0"/>
+          <a:ext cx="0" cy="0"/>
+          <a:chOff x="0" y="0"/>
+          <a:chExt cx="0" cy="0"/>
+        </a:xfrm>
+      </p:grpSpPr>
+      <p:sp>
+        <p:nvSpPr>
+          <p:cNvPr id="2" name="Slide Image Placeholder 1"/>
+          <p:cNvSpPr>
+            <a:spLocks noGrp="1" noRot="1" noChangeAspect="1"/>
+          </p:cNvSpPr>
+          <p:nvPr>
+            <p:ph type="sldImg"/>
+          </p:nvPr>
+        </p:nvSpPr>
+        <p:spPr/>
+      </p:sp>
+      <p:sp>
+        <p:nvSpPr>
+          <p:cNvPr id="3" name="Notes Placeholder 2"/>
+          <p:cNvSpPr>
+            <a:spLocks noGrp="1"/>
+          </p:cNvSpPr>
+          <p:nvPr>
+            <p:ph type="body" idx="1"/>
+          </p:nvPr>
+        </p:nvSpPr>
+        <p:spPr/>
+        <p:txBody>
+          <a:bodyPr/>
+          <a:lstStyle/>
+          <a:p>
+            <a:r>
+              <a:rPr lang="en-US" dirty="0"/>
+              <a:t/>
+            </a:r>
+            <a:endParaRPr lang="en-US" dirty="0"/>
+          </a:p>
+        </p:txBody>
+      </p:sp>
+      <p:sp>
+        <p:nvSpPr>
+          <p:cNvPr id="4" name="Slide Number Placeholder 3"/>
+          <p:cNvSpPr>
+            <a:spLocks noGrp="1"/>
+          </p:cNvSpPr>
+          <p:nvPr>
+            <p:ph type="sldNum" sz="quarter" idx="10"/>
+          </p:nvPr>
+        </p:nvSpPr>
+        <p:spPr/>
+        <p:txBody>
+          <a:bodyPr/>
+          <a:lstStyle/>
+          <a:p>
+            <a:fld id="{F7021451-1387-4CA6-816F-3879F97B5CBC}" type="slidenum">
+              <a:rPr lang="en-US"/>
+              <a:t>11</a:t>
+            </a:fld>
+            <a:endParaRPr lang="en-US"/>
+          </a:p>
+        </p:txBody>
+      </p:sp>
+    </p:spTree>
+    <p:extLst>
+      <p:ext uri="{BB962C8B-B14F-4D97-AF65-F5344CB8AC3E}">
+        <p14:creationId xmlns:p14="http://schemas.microsoft.com/office/powerpoint/2010/main" val="1024086991"/>
+      </p:ext>
+    </p:extLst>
+  </p:cSld>
+  <p:clrMapOvr>
+    <a:masterClrMapping/>
+  </p:clrMapOvr>
+</p:notes>
+</file>
+
+<file path=ppt/notesSlides/notesSlide12.xml><?xml version="1.0" encoding="utf-8"?>
+<p:notes xmlns:a="http://schemas.openxmlformats.org/drawingml/2006/main" xmlns:r="http://schemas.openxmlformats.org/officeDocument/2006/relationships" xmlns:p="http://schemas.openxmlformats.org/presentationml/2006/main">
+  <p:cSld>
+    <p:spTree>
+      <p:nvGrpSpPr>
+        <p:cNvPr id="1" name=""/>
+        <p:cNvGrpSpPr/>
+        <p:nvPr/>
+      </p:nvGrpSpPr>
+      <p:grpSpPr>
+        <a:xfrm>
+          <a:off x="0" y="0"/>
+          <a:ext cx="0" cy="0"/>
+          <a:chOff x="0" y="0"/>
+          <a:chExt cx="0" cy="0"/>
+        </a:xfrm>
+      </p:grpSpPr>
+      <p:sp>
+        <p:nvSpPr>
+          <p:cNvPr id="2" name="Slide Image Placeholder 1"/>
+          <p:cNvSpPr>
+            <a:spLocks noGrp="1" noRot="1" noChangeAspect="1"/>
+          </p:cNvSpPr>
+          <p:nvPr>
+            <p:ph type="sldImg"/>
+          </p:nvPr>
+        </p:nvSpPr>
+        <p:spPr/>
+      </p:sp>
+      <p:sp>
+        <p:nvSpPr>
+          <p:cNvPr id="3" name="Notes Placeholder 2"/>
+          <p:cNvSpPr>
+            <a:spLocks noGrp="1"/>
+          </p:cNvSpPr>
+          <p:nvPr>
+            <p:ph type="body" idx="1"/>
+          </p:nvPr>
+        </p:nvSpPr>
+        <p:spPr/>
+        <p:txBody>
+          <a:bodyPr/>
+          <a:lstStyle/>
+          <a:p>
+            <a:r>
+              <a:rPr lang="en-US" dirty="0"/>
+              <a:t/>
+            </a:r>
+            <a:endParaRPr lang="en-US" dirty="0"/>
+          </a:p>
+        </p:txBody>
+      </p:sp>
+      <p:sp>
+        <p:nvSpPr>
+          <p:cNvPr id="4" name="Slide Number Placeholder 3"/>
+          <p:cNvSpPr>
+            <a:spLocks noGrp="1"/>
+          </p:cNvSpPr>
+          <p:nvPr>
+            <p:ph type="sldNum" sz="quarter" idx="10"/>
+          </p:nvPr>
+        </p:nvSpPr>
+        <p:spPr/>
+        <p:txBody>
+          <a:bodyPr/>
+          <a:lstStyle/>
+          <a:p>
+            <a:fld id="{F7021451-1387-4CA6-816F-3879F97B5CBC}" type="slidenum">
+              <a:rPr lang="en-US"/>
+              <a:t>12</a:t>
+            </a:fld>
+            <a:endParaRPr lang="en-US"/>
+          </a:p>
+        </p:txBody>
+      </p:sp>
+    </p:spTree>
+    <p:extLst>
+      <p:ext uri="{BB962C8B-B14F-4D97-AF65-F5344CB8AC3E}">
+        <p14:creationId xmlns:p14="http://schemas.microsoft.com/office/powerpoint/2010/main" val="1024086991"/>
+      </p:ext>
+    </p:extLst>
+  </p:cSld>
+  <p:clrMapOvr>
+    <a:masterClrMapping/>
+  </p:clrMapOvr>
+</p:notes>
+</file>
+
+<file path=ppt/notesSlides/notesSlide13.xml><?xml version="1.0" encoding="utf-8"?>
+<p:notes xmlns:a="http://schemas.openxmlformats.org/drawingml/2006/main" xmlns:r="http://schemas.openxmlformats.org/officeDocument/2006/relationships" xmlns:p="http://schemas.openxmlformats.org/presentationml/2006/main">
+  <p:cSld>
+    <p:spTree>
+      <p:nvGrpSpPr>
+        <p:cNvPr id="1" name=""/>
+        <p:cNvGrpSpPr/>
+        <p:nvPr/>
+      </p:nvGrpSpPr>
+      <p:grpSpPr>
+        <a:xfrm>
+          <a:off x="0" y="0"/>
+          <a:ext cx="0" cy="0"/>
+          <a:chOff x="0" y="0"/>
+          <a:chExt cx="0" cy="0"/>
+        </a:xfrm>
+      </p:grpSpPr>
+      <p:sp>
+        <p:nvSpPr>
+          <p:cNvPr id="2" name="Slide Image Placeholder 1"/>
+          <p:cNvSpPr>
+            <a:spLocks noGrp="1" noRot="1" noChangeAspect="1"/>
+          </p:cNvSpPr>
+          <p:nvPr>
+            <p:ph type="sldImg"/>
+          </p:nvPr>
+        </p:nvSpPr>
+        <p:spPr/>
+      </p:sp>
+      <p:sp>
+        <p:nvSpPr>
+          <p:cNvPr id="3" name="Notes Placeholder 2"/>
+          <p:cNvSpPr>
+            <a:spLocks noGrp="1"/>
+          </p:cNvSpPr>
+          <p:nvPr>
+            <p:ph type="body" idx="1"/>
+          </p:nvPr>
+        </p:nvSpPr>
+        <p:spPr/>
+        <p:txBody>
+          <a:bodyPr/>
+          <a:lstStyle/>
+          <a:p>
+            <a:r>
+              <a:rPr lang="en-US" dirty="0"/>
+              <a:t/>
+            </a:r>
+            <a:endParaRPr lang="en-US" dirty="0"/>
+          </a:p>
+        </p:txBody>
+      </p:sp>
+      <p:sp>
+        <p:nvSpPr>
+          <p:cNvPr id="4" name="Slide Number Placeholder 3"/>
+          <p:cNvSpPr>
+            <a:spLocks noGrp="1"/>
+          </p:cNvSpPr>
+          <p:nvPr>
+            <p:ph type="sldNum" sz="quarter" idx="10"/>
+          </p:nvPr>
+        </p:nvSpPr>
+        <p:spPr/>
+        <p:txBody>
+          <a:bodyPr/>
+          <a:lstStyle/>
+          <a:p>
+            <a:fld id="{F7021451-1387-4CA6-816F-3879F97B5CBC}" type="slidenum">
+              <a:rPr lang="en-US"/>
+              <a:t>13</a:t>
             </a:fld>
             <a:endParaRPr lang="en-US"/>
           </a:p>
@@ -2286,7 +2553,7 @@
                 <a:ea typeface="Calibri" pitchFamily="34" charset="-122"/>
                 <a:cs typeface="Calibri" pitchFamily="34" charset="-120"/>
               </a:rPr>
-              <a:t>Peritora IQ ako príklad</a:t>
+              <a:t>Plány projektov</a:t>
             </a:r>
             <a:pPr algn="l" indent="0" marL="0">
               <a:lnSpc>
@@ -2312,7 +2579,7 @@
                 <a:ea typeface="Calibri" pitchFamily="34" charset="-122"/>
                 <a:cs typeface="Calibri" pitchFamily="34" charset="-120"/>
               </a:rPr>
-              <a:t>scenáre, lievik, dátový gate</a:t>
+              <a:t>Peritora · Blinks · Splato · Channel mgmt</a:t>
             </a:r>
             <a:endParaRPr lang="en-US" sz="1250" dirty="0"/>
           </a:p>
@@ -2650,6 +2917,3095 @@
 <file path=ppt/slides/slide10.xml><?xml version="1.0" encoding="utf-8"?>
 <p:sld xmlns:a="http://schemas.openxmlformats.org/drawingml/2006/main" xmlns:r="http://schemas.openxmlformats.org/officeDocument/2006/relationships" xmlns:p="http://schemas.openxmlformats.org/presentationml/2006/main">
   <p:cSld name="Slide 10">
+    <p:bg>
+      <p:bgPr>
+        <a:solidFill>
+          <a:srgbClr val="0B0F14"/>
+        </a:solidFill>
+      </p:bgPr>
+    </p:bg>
+    <p:spTree>
+      <p:nvGrpSpPr>
+        <p:cNvPr id="1" name=""/>
+        <p:cNvGrpSpPr/>
+        <p:nvPr/>
+      </p:nvGrpSpPr>
+      <p:grpSpPr>
+        <a:xfrm>
+          <a:off x="0" y="0"/>
+          <a:ext cx="0" cy="0"/>
+          <a:chOff x="0" y="0"/>
+          <a:chExt cx="0" cy="0"/>
+        </a:xfrm>
+      </p:grpSpPr>
+      <p:sp>
+        <p:nvSpPr>
+          <p:cNvPr id="2" name="Text 0"/>
+          <p:cNvSpPr txBox="1"/>
+          <p:nvPr/>
+        </p:nvSpPr>
+        <p:spPr>
+          <a:xfrm>
+            <a:off x="566928" y="292608"/>
+            <a:ext cx="2743200" cy="365760"/>
+          </a:xfrm>
+          <a:prstGeom prst="rect">
+            <a:avLst/>
+          </a:prstGeom>
+          <a:noFill/>
+          <a:ln/>
+        </p:spPr>
+        <p:txBody>
+          <a:bodyPr wrap="square" lIns="0" tIns="0" rIns="0" bIns="0" rtlCol="0" anchor="ctr"/>
+          <a:lstStyle/>
+          <a:p>
+            <a:pPr algn="l" indent="0" marL="0">
+              <a:buNone/>
+            </a:pPr>
+            <a:r>
+              <a:rPr lang="en-US" sz="1300" b="1" dirty="0">
+                <a:solidFill>
+                  <a:srgbClr val="F2F6F8"/>
+                </a:solidFill>
+                <a:latin typeface="Calibri" pitchFamily="34" charset="0"/>
+                <a:ea typeface="Calibri" pitchFamily="34" charset="-122"/>
+                <a:cs typeface="Calibri" pitchFamily="34" charset="-120"/>
+              </a:rPr>
+              <a:t>Monetize</a:t>
+            </a:r>
+            <a:pPr algn="l" indent="0" marL="0">
+              <a:buNone/>
+            </a:pPr>
+            <a:r>
+              <a:rPr lang="en-US" sz="1300" b="1" dirty="0">
+                <a:solidFill>
+                  <a:srgbClr val="3FB6E8"/>
+                </a:solidFill>
+                <a:latin typeface="Calibri" pitchFamily="34" charset="0"/>
+                <a:ea typeface="Calibri" pitchFamily="34" charset="-122"/>
+                <a:cs typeface="Calibri" pitchFamily="34" charset="-120"/>
+              </a:rPr>
+              <a:t>.CX</a:t>
+            </a:r>
+            <a:endParaRPr lang="en-US" sz="1300" dirty="0"/>
+          </a:p>
+        </p:txBody>
+      </p:sp>
+      <p:sp>
+        <p:nvSpPr>
+          <p:cNvPr id="3" name="Text 1"/>
+          <p:cNvSpPr txBox="1"/>
+          <p:nvPr/>
+        </p:nvSpPr>
+        <p:spPr>
+          <a:xfrm>
+            <a:off x="585216" y="868680"/>
+            <a:ext cx="10972800" cy="292608"/>
+          </a:xfrm>
+          <a:prstGeom prst="rect">
+            <a:avLst/>
+          </a:prstGeom>
+          <a:noFill/>
+          <a:ln/>
+        </p:spPr>
+        <p:txBody>
+          <a:bodyPr wrap="square" lIns="0" tIns="0" rIns="0" bIns="0" rtlCol="0" anchor="ctr"/>
+          <a:lstStyle/>
+          <a:p>
+            <a:pPr algn="l" indent="0" marL="0">
+              <a:buNone/>
+            </a:pPr>
+            <a:r>
+              <a:rPr lang="en-US" sz="1050" b="1" spc="300" kern="0" dirty="0">
+                <a:solidFill>
+                  <a:srgbClr val="3FB6E8"/>
+                </a:solidFill>
+                <a:latin typeface="Calibri" pitchFamily="34" charset="0"/>
+                <a:ea typeface="Calibri" pitchFamily="34" charset="-122"/>
+                <a:cs typeface="Calibri" pitchFamily="34" charset="-120"/>
+              </a:rPr>
+              <a:t>PLÁN PROJEKTU 4 / 4  ·  EFEKTIVITA DOVNÚTRA</a:t>
+            </a:r>
+            <a:endParaRPr lang="en-US" sz="1050" dirty="0"/>
+          </a:p>
+        </p:txBody>
+      </p:sp>
+      <p:sp>
+        <p:nvSpPr>
+          <p:cNvPr id="4" name="Text 2"/>
+          <p:cNvSpPr txBox="1"/>
+          <p:nvPr/>
+        </p:nvSpPr>
+        <p:spPr>
+          <a:xfrm>
+            <a:off x="566928" y="1207008"/>
+            <a:ext cx="11064240" cy="685800"/>
+          </a:xfrm>
+          <a:prstGeom prst="rect">
+            <a:avLst/>
+          </a:prstGeom>
+          <a:noFill/>
+          <a:ln/>
+        </p:spPr>
+        <p:txBody>
+          <a:bodyPr wrap="square" lIns="0" tIns="0" rIns="0" bIns="0" rtlCol="0" anchor="ctr"/>
+          <a:lstStyle/>
+          <a:p>
+            <a:pPr algn="l" indent="0" marL="0">
+              <a:buNone/>
+            </a:pPr>
+            <a:r>
+              <a:rPr lang="en-US" sz="2600" b="1" dirty="0">
+                <a:solidFill>
+                  <a:srgbClr val="F2F6F8"/>
+                </a:solidFill>
+                <a:latin typeface="Cambria" pitchFamily="34" charset="0"/>
+                <a:ea typeface="Cambria" pitchFamily="34" charset="-122"/>
+                <a:cs typeface="Cambria" pitchFamily="34" charset="-120"/>
+              </a:rPr>
+              <a:t>Channel management — plán a rozhodovacie body</a:t>
+            </a:r>
+            <a:endParaRPr lang="en-US" sz="2600" dirty="0"/>
+          </a:p>
+        </p:txBody>
+      </p:sp>
+      <p:sp>
+        <p:nvSpPr>
+          <p:cNvPr id="5" name="Text 3"/>
+          <p:cNvSpPr txBox="1"/>
+          <p:nvPr/>
+        </p:nvSpPr>
+        <p:spPr>
+          <a:xfrm>
+            <a:off x="566928" y="1810512"/>
+            <a:ext cx="11064240" cy="548640"/>
+          </a:xfrm>
+          <a:prstGeom prst="rect">
+            <a:avLst/>
+          </a:prstGeom>
+          <a:noFill/>
+          <a:ln/>
+        </p:spPr>
+        <p:txBody>
+          <a:bodyPr wrap="square" lIns="0" tIns="0" rIns="0" bIns="0" rtlCol="0" anchor="ctr"/>
+          <a:lstStyle/>
+          <a:p>
+            <a:pPr indent="0" marL="0">
+              <a:lnSpc>
+                <a:spcPct val="105000"/>
+              </a:lnSpc>
+              <a:buNone/>
+            </a:pPr>
+            <a:r>
+              <a:rPr lang="en-US" sz="1200" b="1" dirty="0">
+                <a:solidFill>
+                  <a:srgbClr val="F2F6F8"/>
+                </a:solidFill>
+                <a:latin typeface="Calibri" pitchFamily="34" charset="0"/>
+                <a:ea typeface="Calibri" pitchFamily="34" charset="-122"/>
+                <a:cs typeface="Calibri" pitchFamily="34" charset="-120"/>
+              </a:rPr>
+              <a:t>Východisko: </a:t>
+            </a:r>
+            <a:pPr indent="0" marL="0">
+              <a:lnSpc>
+                <a:spcPct val="105000"/>
+              </a:lnSpc>
+              <a:buNone/>
+            </a:pPr>
+            <a:r>
+              <a:rPr lang="en-US" sz="1200" dirty="0">
+                <a:solidFill>
+                  <a:srgbClr val="8DA2B2"/>
+                </a:solidFill>
+                <a:latin typeface="Calibri" pitchFamily="34" charset="0"/>
+                <a:ea typeface="Calibri" pitchFamily="34" charset="-122"/>
+                <a:cs typeface="Calibri" pitchFamily="34" charset="-120"/>
+              </a:rPr>
+              <a:t>manažment skladá podklady na porady ručne a pohľad na výkonnosť a profitabilitu kanálov nie je jednotný. Nástroj je podkladová vrstva pre management meetingy.</a:t>
+            </a:r>
+            <a:endParaRPr lang="en-US" sz="1200" dirty="0"/>
+          </a:p>
+        </p:txBody>
+      </p:sp>
+      <p:graphicFrame>
+        <p:nvGraphicFramePr>
+          <p:cNvPr id="11" name="Table 0"/>
+          <p:cNvGraphicFramePr>
+            <a:graphicFrameLocks noGrp="1"/>
+          </p:cNvGraphicFramePr>
+          <p:nvPr>
+            <p:extLst>
+              <p:ext uri="{D42A27DB-BD31-4B8C-83A1-F6EECF244321}">
+                <p14:modId xmlns:p14="http://schemas.microsoft.com/office/powerpoint/2010/main" val="1579011935"/>
+              </p:ext>
+            </p:extLst>
+          </p:nvPr>
+        </p:nvGraphicFramePr>
+        <p:xfrm>
+          <a:off x="566928" y="2487168"/>
+          <a:ext cx="11064240" cy="914400"/>
+        </p:xfrm>
+        <a:graphic>
+          <a:graphicData uri="http://schemas.openxmlformats.org/drawingml/2006/table">
+            <a:tbl>
+              <a:tblPr/>
+              <a:tblGrid>
+                <a:gridCol w="1371600"/>
+                <a:gridCol w="3200400"/>
+                <a:gridCol w="3200400"/>
+                <a:gridCol w="3291840"/>
+              </a:tblGrid>
+              <a:tr h="411480">
+                <a:tc>
+                  <a:txBody>
+                    <a:bodyPr/>
+                    <a:lstStyle/>
+                    <a:p>
+                      <a:pPr indent="0" marL="0">
+                        <a:buNone/>
+                      </a:pPr>
+                      <a:endParaRPr lang="en-US" sz="1000" dirty="0">
+                        <a:latin typeface="Calibri" charset="0"/>
+                        <a:ea typeface="Calibri" charset="0"/>
+                        <a:cs typeface="Calibri" charset="0"/>
+                      </a:endParaRPr>
+                    </a:p>
+                  </a:txBody>
+                  <a:tcPr marL="73152" marR="73152" marT="73152" marB="73152" anchor="ctr">
+                    <a:lnL w="9525" cap="flat" cmpd="sng" algn="ctr">
+                      <a:solidFill>
+                        <a:srgbClr val="22303C"/>
+                      </a:solidFill>
+                      <a:prstDash val="solid"/>
+                      <a:round/>
+                      <a:headEnd type="none" w="med" len="med"/>
+                      <a:tailEnd type="none" w="med" len="med"/>
+                    </a:lnL>
+                    <a:lnR w="9525" cap="flat" cmpd="sng" algn="ctr">
+                      <a:solidFill>
+                        <a:srgbClr val="22303C"/>
+                      </a:solidFill>
+                      <a:prstDash val="solid"/>
+                      <a:round/>
+                      <a:headEnd type="none" w="med" len="med"/>
+                      <a:tailEnd type="none" w="med" len="med"/>
+                    </a:lnR>
+                    <a:lnT w="9525" cap="flat" cmpd="sng" algn="ctr">
+                      <a:solidFill>
+                        <a:srgbClr val="22303C"/>
+                      </a:solidFill>
+                      <a:prstDash val="solid"/>
+                      <a:round/>
+                      <a:headEnd type="none" w="med" len="med"/>
+                      <a:tailEnd type="none" w="med" len="med"/>
+                    </a:lnT>
+                    <a:lnB w="9525" cap="flat" cmpd="sng" algn="ctr">
+                      <a:solidFill>
+                        <a:srgbClr val="22303C"/>
+                      </a:solidFill>
+                      <a:prstDash val="solid"/>
+                      <a:round/>
+                      <a:headEnd type="none" w="med" len="med"/>
+                      <a:tailEnd type="none" w="med" len="med"/>
+                    </a:lnB>
+                    <a:solidFill>
+                      <a:srgbClr val="16242F"/>
+                    </a:solidFill>
+                  </a:tcPr>
+                </a:tc>
+                <a:tc>
+                  <a:txBody>
+                    <a:bodyPr/>
+                    <a:lstStyle/>
+                    <a:p>
+                      <a:pPr indent="0" marL="0">
+                        <a:buNone/>
+                      </a:pPr>
+                      <a:r>
+                        <a:rPr lang="en-US" sz="1000" b="1" spc="150" kern="0" dirty="0">
+                          <a:solidFill>
+                            <a:srgbClr val="3FB6E8"/>
+                          </a:solidFill>
+                          <a:latin typeface="Calibri" pitchFamily="34" charset="0"/>
+                          <a:ea typeface="Calibri" pitchFamily="34" charset="-122"/>
+                          <a:cs typeface="Calibri" pitchFamily="34" charset="-120"/>
+                        </a:rPr>
+                        <a:t>TERAZ (0–8 TÝŽDŇOV)</a:t>
+                      </a:r>
+                      <a:endParaRPr lang="en-US" sz="1000" dirty="0">
+                        <a:latin typeface="Calibri" charset="0"/>
+                        <a:ea typeface="Calibri" charset="0"/>
+                        <a:cs typeface="Calibri" charset="0"/>
+                      </a:endParaRPr>
+                    </a:p>
+                  </a:txBody>
+                  <a:tcPr marL="73152" marR="73152" marT="73152" marB="73152" anchor="ctr">
+                    <a:lnL w="9525" cap="flat" cmpd="sng" algn="ctr">
+                      <a:solidFill>
+                        <a:srgbClr val="22303C"/>
+                      </a:solidFill>
+                      <a:prstDash val="solid"/>
+                      <a:round/>
+                      <a:headEnd type="none" w="med" len="med"/>
+                      <a:tailEnd type="none" w="med" len="med"/>
+                    </a:lnL>
+                    <a:lnR w="9525" cap="flat" cmpd="sng" algn="ctr">
+                      <a:solidFill>
+                        <a:srgbClr val="22303C"/>
+                      </a:solidFill>
+                      <a:prstDash val="solid"/>
+                      <a:round/>
+                      <a:headEnd type="none" w="med" len="med"/>
+                      <a:tailEnd type="none" w="med" len="med"/>
+                    </a:lnR>
+                    <a:lnT w="9525" cap="flat" cmpd="sng" algn="ctr">
+                      <a:solidFill>
+                        <a:srgbClr val="22303C"/>
+                      </a:solidFill>
+                      <a:prstDash val="solid"/>
+                      <a:round/>
+                      <a:headEnd type="none" w="med" len="med"/>
+                      <a:tailEnd type="none" w="med" len="med"/>
+                    </a:lnT>
+                    <a:lnB w="9525" cap="flat" cmpd="sng" algn="ctr">
+                      <a:solidFill>
+                        <a:srgbClr val="22303C"/>
+                      </a:solidFill>
+                      <a:prstDash val="solid"/>
+                      <a:round/>
+                      <a:headEnd type="none" w="med" len="med"/>
+                      <a:tailEnd type="none" w="med" len="med"/>
+                    </a:lnB>
+                    <a:solidFill>
+                      <a:srgbClr val="16242F"/>
+                    </a:solidFill>
+                  </a:tcPr>
+                </a:tc>
+                <a:tc>
+                  <a:txBody>
+                    <a:bodyPr/>
+                    <a:lstStyle/>
+                    <a:p>
+                      <a:pPr indent="0" marL="0">
+                        <a:buNone/>
+                      </a:pPr>
+                      <a:r>
+                        <a:rPr lang="en-US" sz="1000" b="1" spc="150" kern="0" dirty="0">
+                          <a:solidFill>
+                            <a:srgbClr val="3FB6E8"/>
+                          </a:solidFill>
+                          <a:latin typeface="Calibri" pitchFamily="34" charset="0"/>
+                          <a:ea typeface="Calibri" pitchFamily="34" charset="-122"/>
+                          <a:cs typeface="Calibri" pitchFamily="34" charset="-120"/>
+                        </a:rPr>
+                        <a:t>6 MESIACOV</a:t>
+                      </a:r>
+                      <a:endParaRPr lang="en-US" sz="1000" dirty="0">
+                        <a:latin typeface="Calibri" charset="0"/>
+                        <a:ea typeface="Calibri" charset="0"/>
+                        <a:cs typeface="Calibri" charset="0"/>
+                      </a:endParaRPr>
+                    </a:p>
+                  </a:txBody>
+                  <a:tcPr marL="73152" marR="73152" marT="73152" marB="73152" anchor="ctr">
+                    <a:lnL w="9525" cap="flat" cmpd="sng" algn="ctr">
+                      <a:solidFill>
+                        <a:srgbClr val="22303C"/>
+                      </a:solidFill>
+                      <a:prstDash val="solid"/>
+                      <a:round/>
+                      <a:headEnd type="none" w="med" len="med"/>
+                      <a:tailEnd type="none" w="med" len="med"/>
+                    </a:lnL>
+                    <a:lnR w="9525" cap="flat" cmpd="sng" algn="ctr">
+                      <a:solidFill>
+                        <a:srgbClr val="22303C"/>
+                      </a:solidFill>
+                      <a:prstDash val="solid"/>
+                      <a:round/>
+                      <a:headEnd type="none" w="med" len="med"/>
+                      <a:tailEnd type="none" w="med" len="med"/>
+                    </a:lnR>
+                    <a:lnT w="9525" cap="flat" cmpd="sng" algn="ctr">
+                      <a:solidFill>
+                        <a:srgbClr val="22303C"/>
+                      </a:solidFill>
+                      <a:prstDash val="solid"/>
+                      <a:round/>
+                      <a:headEnd type="none" w="med" len="med"/>
+                      <a:tailEnd type="none" w="med" len="med"/>
+                    </a:lnT>
+                    <a:lnB w="9525" cap="flat" cmpd="sng" algn="ctr">
+                      <a:solidFill>
+                        <a:srgbClr val="22303C"/>
+                      </a:solidFill>
+                      <a:prstDash val="solid"/>
+                      <a:round/>
+                      <a:headEnd type="none" w="med" len="med"/>
+                      <a:tailEnd type="none" w="med" len="med"/>
+                    </a:lnB>
+                    <a:solidFill>
+                      <a:srgbClr val="16242F"/>
+                    </a:solidFill>
+                  </a:tcPr>
+                </a:tc>
+                <a:tc>
+                  <a:txBody>
+                    <a:bodyPr/>
+                    <a:lstStyle/>
+                    <a:p>
+                      <a:pPr indent="0" marL="0">
+                        <a:buNone/>
+                      </a:pPr>
+                      <a:r>
+                        <a:rPr lang="en-US" sz="1000" b="1" spc="150" kern="0" dirty="0">
+                          <a:solidFill>
+                            <a:srgbClr val="3FB6E8"/>
+                          </a:solidFill>
+                          <a:latin typeface="Calibri" pitchFamily="34" charset="0"/>
+                          <a:ea typeface="Calibri" pitchFamily="34" charset="-122"/>
+                          <a:cs typeface="Calibri" pitchFamily="34" charset="-120"/>
+                        </a:rPr>
+                        <a:t>12 MESIACOV</a:t>
+                      </a:r>
+                      <a:endParaRPr lang="en-US" sz="1000" dirty="0">
+                        <a:latin typeface="Calibri" charset="0"/>
+                        <a:ea typeface="Calibri" charset="0"/>
+                        <a:cs typeface="Calibri" charset="0"/>
+                      </a:endParaRPr>
+                    </a:p>
+                  </a:txBody>
+                  <a:tcPr marL="73152" marR="73152" marT="73152" marB="73152" anchor="ctr">
+                    <a:lnL w="9525" cap="flat" cmpd="sng" algn="ctr">
+                      <a:solidFill>
+                        <a:srgbClr val="22303C"/>
+                      </a:solidFill>
+                      <a:prstDash val="solid"/>
+                      <a:round/>
+                      <a:headEnd type="none" w="med" len="med"/>
+                      <a:tailEnd type="none" w="med" len="med"/>
+                    </a:lnL>
+                    <a:lnR w="9525" cap="flat" cmpd="sng" algn="ctr">
+                      <a:solidFill>
+                        <a:srgbClr val="22303C"/>
+                      </a:solidFill>
+                      <a:prstDash val="solid"/>
+                      <a:round/>
+                      <a:headEnd type="none" w="med" len="med"/>
+                      <a:tailEnd type="none" w="med" len="med"/>
+                    </a:lnR>
+                    <a:lnT w="9525" cap="flat" cmpd="sng" algn="ctr">
+                      <a:solidFill>
+                        <a:srgbClr val="22303C"/>
+                      </a:solidFill>
+                      <a:prstDash val="solid"/>
+                      <a:round/>
+                      <a:headEnd type="none" w="med" len="med"/>
+                      <a:tailEnd type="none" w="med" len="med"/>
+                    </a:lnT>
+                    <a:lnB w="9525" cap="flat" cmpd="sng" algn="ctr">
+                      <a:solidFill>
+                        <a:srgbClr val="22303C"/>
+                      </a:solidFill>
+                      <a:prstDash val="solid"/>
+                      <a:round/>
+                      <a:headEnd type="none" w="med" len="med"/>
+                      <a:tailEnd type="none" w="med" len="med"/>
+                    </a:lnB>
+                    <a:solidFill>
+                      <a:srgbClr val="16242F"/>
+                    </a:solidFill>
+                  </a:tcPr>
+                </a:tc>
+              </a:tr>
+              <a:tr h="868680">
+                <a:tc>
+                  <a:txBody>
+                    <a:bodyPr/>
+                    <a:lstStyle/>
+                    <a:p>
+                      <a:pPr indent="0" marL="0">
+                        <a:buNone/>
+                      </a:pPr>
+                      <a:r>
+                        <a:rPr lang="en-US" sz="1050" b="1" dirty="0">
+                          <a:solidFill>
+                            <a:srgbClr val="F2F6F8"/>
+                          </a:solidFill>
+                          <a:latin typeface="Calibri" pitchFamily="34" charset="0"/>
+                          <a:ea typeface="Calibri" pitchFamily="34" charset="-122"/>
+                          <a:cs typeface="Calibri" pitchFamily="34" charset="-120"/>
+                        </a:rPr>
+                        <a:t>Finančný prínos</a:t>
+                      </a:r>
+                      <a:endParaRPr lang="en-US" sz="1050" dirty="0">
+                        <a:latin typeface="Calibri" charset="0"/>
+                        <a:ea typeface="Calibri" charset="0"/>
+                        <a:cs typeface="Calibri" charset="0"/>
+                      </a:endParaRPr>
+                    </a:p>
+                  </a:txBody>
+                  <a:tcPr marL="73152" marR="73152" marT="73152" marB="73152" anchor="ctr">
+                    <a:lnL w="9525" cap="flat" cmpd="sng" algn="ctr">
+                      <a:solidFill>
+                        <a:srgbClr val="22303C"/>
+                      </a:solidFill>
+                      <a:prstDash val="solid"/>
+                      <a:round/>
+                      <a:headEnd type="none" w="med" len="med"/>
+                      <a:tailEnd type="none" w="med" len="med"/>
+                    </a:lnL>
+                    <a:lnR w="9525" cap="flat" cmpd="sng" algn="ctr">
+                      <a:solidFill>
+                        <a:srgbClr val="22303C"/>
+                      </a:solidFill>
+                      <a:prstDash val="solid"/>
+                      <a:round/>
+                      <a:headEnd type="none" w="med" len="med"/>
+                      <a:tailEnd type="none" w="med" len="med"/>
+                    </a:lnR>
+                    <a:lnT w="9525" cap="flat" cmpd="sng" algn="ctr">
+                      <a:solidFill>
+                        <a:srgbClr val="22303C"/>
+                      </a:solidFill>
+                      <a:prstDash val="solid"/>
+                      <a:round/>
+                      <a:headEnd type="none" w="med" len="med"/>
+                      <a:tailEnd type="none" w="med" len="med"/>
+                    </a:lnT>
+                    <a:lnB w="9525" cap="flat" cmpd="sng" algn="ctr">
+                      <a:solidFill>
+                        <a:srgbClr val="22303C"/>
+                      </a:solidFill>
+                      <a:prstDash val="solid"/>
+                      <a:round/>
+                      <a:headEnd type="none" w="med" len="med"/>
+                      <a:tailEnd type="none" w="med" len="med"/>
+                    </a:lnB>
+                    <a:solidFill>
+                      <a:srgbClr val="0F1822"/>
+                    </a:solidFill>
+                  </a:tcPr>
+                </a:tc>
+                <a:tc>
+                  <a:txBody>
+                    <a:bodyPr/>
+                    <a:lstStyle/>
+                    <a:p>
+                      <a:pPr indent="0" marL="0">
+                        <a:buNone/>
+                      </a:pPr>
+                      <a:r>
+                        <a:rPr lang="en-US" sz="1000" dirty="0">
+                          <a:solidFill>
+                            <a:srgbClr val="F2F6F8"/>
+                          </a:solidFill>
+                          <a:latin typeface="Calibri" pitchFamily="34" charset="0"/>
+                          <a:ea typeface="Calibri" pitchFamily="34" charset="-122"/>
+                          <a:cs typeface="Calibri" pitchFamily="34" charset="-120"/>
+                        </a:rPr>
+                        <a:t>0 € tržieb — interný nástroj; prínos je čas a kvalita rozhodnutí</a:t>
+                      </a:r>
+                      <a:endParaRPr lang="en-US" sz="1000" dirty="0">
+                        <a:latin typeface="Calibri" charset="0"/>
+                        <a:ea typeface="Calibri" charset="0"/>
+                        <a:cs typeface="Calibri" charset="0"/>
+                      </a:endParaRPr>
+                    </a:p>
+                  </a:txBody>
+                  <a:tcPr marL="73152" marR="73152" marT="73152" marB="73152" anchor="ctr">
+                    <a:lnL w="9525" cap="flat" cmpd="sng" algn="ctr">
+                      <a:solidFill>
+                        <a:srgbClr val="22303C"/>
+                      </a:solidFill>
+                      <a:prstDash val="solid"/>
+                      <a:round/>
+                      <a:headEnd type="none" w="med" len="med"/>
+                      <a:tailEnd type="none" w="med" len="med"/>
+                    </a:lnL>
+                    <a:lnR w="9525" cap="flat" cmpd="sng" algn="ctr">
+                      <a:solidFill>
+                        <a:srgbClr val="22303C"/>
+                      </a:solidFill>
+                      <a:prstDash val="solid"/>
+                      <a:round/>
+                      <a:headEnd type="none" w="med" len="med"/>
+                      <a:tailEnd type="none" w="med" len="med"/>
+                    </a:lnR>
+                    <a:lnT w="9525" cap="flat" cmpd="sng" algn="ctr">
+                      <a:solidFill>
+                        <a:srgbClr val="22303C"/>
+                      </a:solidFill>
+                      <a:prstDash val="solid"/>
+                      <a:round/>
+                      <a:headEnd type="none" w="med" len="med"/>
+                      <a:tailEnd type="none" w="med" len="med"/>
+                    </a:lnT>
+                    <a:lnB w="9525" cap="flat" cmpd="sng" algn="ctr">
+                      <a:solidFill>
+                        <a:srgbClr val="22303C"/>
+                      </a:solidFill>
+                      <a:prstDash val="solid"/>
+                      <a:round/>
+                      <a:headEnd type="none" w="med" len="med"/>
+                      <a:tailEnd type="none" w="med" len="med"/>
+                    </a:lnB>
+                    <a:solidFill>
+                      <a:srgbClr val="0F1822"/>
+                    </a:solidFill>
+                  </a:tcPr>
+                </a:tc>
+                <a:tc>
+                  <a:txBody>
+                    <a:bodyPr/>
+                    <a:lstStyle/>
+                    <a:p>
+                      <a:pPr indent="0" marL="0">
+                        <a:buNone/>
+                      </a:pPr>
+                      <a:r>
+                        <a:rPr lang="en-US" sz="1000" dirty="0">
+                          <a:solidFill>
+                            <a:srgbClr val="F2F6F8"/>
+                          </a:solidFill>
+                          <a:latin typeface="Calibri" pitchFamily="34" charset="0"/>
+                          <a:ea typeface="Calibri" pitchFamily="34" charset="-122"/>
+                          <a:cs typeface="Calibri" pitchFamily="34" charset="-120"/>
+                        </a:rPr>
+                        <a:t>úspora času na prípravu porád + skoršie korekcie stratových oblastí — merateľné na dnešných číslach</a:t>
+                      </a:r>
+                      <a:endParaRPr lang="en-US" sz="1000" dirty="0">
+                        <a:latin typeface="Calibri" charset="0"/>
+                        <a:ea typeface="Calibri" charset="0"/>
+                        <a:cs typeface="Calibri" charset="0"/>
+                      </a:endParaRPr>
+                    </a:p>
+                  </a:txBody>
+                  <a:tcPr marL="73152" marR="73152" marT="73152" marB="73152" anchor="ctr">
+                    <a:lnL w="9525" cap="flat" cmpd="sng" algn="ctr">
+                      <a:solidFill>
+                        <a:srgbClr val="22303C"/>
+                      </a:solidFill>
+                      <a:prstDash val="solid"/>
+                      <a:round/>
+                      <a:headEnd type="none" w="med" len="med"/>
+                      <a:tailEnd type="none" w="med" len="med"/>
+                    </a:lnL>
+                    <a:lnR w="9525" cap="flat" cmpd="sng" algn="ctr">
+                      <a:solidFill>
+                        <a:srgbClr val="22303C"/>
+                      </a:solidFill>
+                      <a:prstDash val="solid"/>
+                      <a:round/>
+                      <a:headEnd type="none" w="med" len="med"/>
+                      <a:tailEnd type="none" w="med" len="med"/>
+                    </a:lnR>
+                    <a:lnT w="9525" cap="flat" cmpd="sng" algn="ctr">
+                      <a:solidFill>
+                        <a:srgbClr val="22303C"/>
+                      </a:solidFill>
+                      <a:prstDash val="solid"/>
+                      <a:round/>
+                      <a:headEnd type="none" w="med" len="med"/>
+                      <a:tailEnd type="none" w="med" len="med"/>
+                    </a:lnT>
+                    <a:lnB w="9525" cap="flat" cmpd="sng" algn="ctr">
+                      <a:solidFill>
+                        <a:srgbClr val="22303C"/>
+                      </a:solidFill>
+                      <a:prstDash val="solid"/>
+                      <a:round/>
+                      <a:headEnd type="none" w="med" len="med"/>
+                      <a:tailEnd type="none" w="med" len="med"/>
+                    </a:lnB>
+                    <a:solidFill>
+                      <a:srgbClr val="0F1822"/>
+                    </a:solidFill>
+                  </a:tcPr>
+                </a:tc>
+                <a:tc>
+                  <a:txBody>
+                    <a:bodyPr/>
+                    <a:lstStyle/>
+                    <a:p>
+                      <a:pPr indent="0" marL="0">
+                        <a:buNone/>
+                      </a:pPr>
+                      <a:r>
+                        <a:rPr lang="en-US" sz="1000" dirty="0">
+                          <a:solidFill>
+                            <a:srgbClr val="F2F6F8"/>
+                          </a:solidFill>
+                          <a:latin typeface="Calibri" pitchFamily="34" charset="0"/>
+                          <a:ea typeface="Calibri" pitchFamily="34" charset="-122"/>
+                          <a:cs typeface="Calibri" pitchFamily="34" charset="-120"/>
+                        </a:rPr>
+                        <a:t>jednotná metodika naprieč CZ / SK / HU — porovnateľnosť trhov na jednom mieste</a:t>
+                      </a:r>
+                      <a:endParaRPr lang="en-US" sz="1000" dirty="0">
+                        <a:latin typeface="Calibri" charset="0"/>
+                        <a:ea typeface="Calibri" charset="0"/>
+                        <a:cs typeface="Calibri" charset="0"/>
+                      </a:endParaRPr>
+                    </a:p>
+                  </a:txBody>
+                  <a:tcPr marL="73152" marR="73152" marT="73152" marB="73152" anchor="ctr">
+                    <a:lnL w="9525" cap="flat" cmpd="sng" algn="ctr">
+                      <a:solidFill>
+                        <a:srgbClr val="22303C"/>
+                      </a:solidFill>
+                      <a:prstDash val="solid"/>
+                      <a:round/>
+                      <a:headEnd type="none" w="med" len="med"/>
+                      <a:tailEnd type="none" w="med" len="med"/>
+                    </a:lnL>
+                    <a:lnR w="9525" cap="flat" cmpd="sng" algn="ctr">
+                      <a:solidFill>
+                        <a:srgbClr val="22303C"/>
+                      </a:solidFill>
+                      <a:prstDash val="solid"/>
+                      <a:round/>
+                      <a:headEnd type="none" w="med" len="med"/>
+                      <a:tailEnd type="none" w="med" len="med"/>
+                    </a:lnR>
+                    <a:lnT w="9525" cap="flat" cmpd="sng" algn="ctr">
+                      <a:solidFill>
+                        <a:srgbClr val="22303C"/>
+                      </a:solidFill>
+                      <a:prstDash val="solid"/>
+                      <a:round/>
+                      <a:headEnd type="none" w="med" len="med"/>
+                      <a:tailEnd type="none" w="med" len="med"/>
+                    </a:lnT>
+                    <a:lnB w="9525" cap="flat" cmpd="sng" algn="ctr">
+                      <a:solidFill>
+                        <a:srgbClr val="22303C"/>
+                      </a:solidFill>
+                      <a:prstDash val="solid"/>
+                      <a:round/>
+                      <a:headEnd type="none" w="med" len="med"/>
+                      <a:tailEnd type="none" w="med" len="med"/>
+                    </a:lnB>
+                    <a:solidFill>
+                      <a:srgbClr val="0F1822"/>
+                    </a:solidFill>
+                  </a:tcPr>
+                </a:tc>
+              </a:tr>
+              <a:tr h="822960">
+                <a:tc>
+                  <a:txBody>
+                    <a:bodyPr/>
+                    <a:lstStyle/>
+                    <a:p>
+                      <a:pPr indent="0" marL="0">
+                        <a:buNone/>
+                      </a:pPr>
+                      <a:r>
+                        <a:rPr lang="en-US" sz="1050" b="1" dirty="0">
+                          <a:solidFill>
+                            <a:srgbClr val="F2F6F8"/>
+                          </a:solidFill>
+                          <a:latin typeface="Calibri" pitchFamily="34" charset="0"/>
+                          <a:ea typeface="Calibri" pitchFamily="34" charset="-122"/>
+                          <a:cs typeface="Calibri" pitchFamily="34" charset="-120"/>
+                        </a:rPr>
+                        <a:t>Náklad</a:t>
+                      </a:r>
+                      <a:endParaRPr lang="en-US" sz="1050" dirty="0">
+                        <a:latin typeface="Calibri" charset="0"/>
+                        <a:ea typeface="Calibri" charset="0"/>
+                        <a:cs typeface="Calibri" charset="0"/>
+                      </a:endParaRPr>
+                    </a:p>
+                  </a:txBody>
+                  <a:tcPr marL="73152" marR="73152" marT="73152" marB="73152" anchor="ctr">
+                    <a:lnL w="9525" cap="flat" cmpd="sng" algn="ctr">
+                      <a:solidFill>
+                        <a:srgbClr val="22303C"/>
+                      </a:solidFill>
+                      <a:prstDash val="solid"/>
+                      <a:round/>
+                      <a:headEnd type="none" w="med" len="med"/>
+                      <a:tailEnd type="none" w="med" len="med"/>
+                    </a:lnL>
+                    <a:lnR w="9525" cap="flat" cmpd="sng" algn="ctr">
+                      <a:solidFill>
+                        <a:srgbClr val="22303C"/>
+                      </a:solidFill>
+                      <a:prstDash val="solid"/>
+                      <a:round/>
+                      <a:headEnd type="none" w="med" len="med"/>
+                      <a:tailEnd type="none" w="med" len="med"/>
+                    </a:lnR>
+                    <a:lnT w="9525" cap="flat" cmpd="sng" algn="ctr">
+                      <a:solidFill>
+                        <a:srgbClr val="22303C"/>
+                      </a:solidFill>
+                      <a:prstDash val="solid"/>
+                      <a:round/>
+                      <a:headEnd type="none" w="med" len="med"/>
+                      <a:tailEnd type="none" w="med" len="med"/>
+                    </a:lnT>
+                    <a:lnB w="9525" cap="flat" cmpd="sng" algn="ctr">
+                      <a:solidFill>
+                        <a:srgbClr val="22303C"/>
+                      </a:solidFill>
+                      <a:prstDash val="solid"/>
+                      <a:round/>
+                      <a:headEnd type="none" w="med" len="med"/>
+                      <a:tailEnd type="none" w="med" len="med"/>
+                    </a:lnB>
+                    <a:solidFill>
+                      <a:srgbClr val="0F1822"/>
+                    </a:solidFill>
+                  </a:tcPr>
+                </a:tc>
+                <a:tc>
+                  <a:txBody>
+                    <a:bodyPr/>
+                    <a:lstStyle/>
+                    <a:p>
+                      <a:pPr indent="0" marL="0">
+                        <a:buNone/>
+                      </a:pPr>
+                      <a:r>
+                        <a:rPr lang="en-US" sz="1000" dirty="0">
+                          <a:solidFill>
+                            <a:srgbClr val="F2F6F8"/>
+                          </a:solidFill>
+                          <a:latin typeface="Calibri" pitchFamily="34" charset="0"/>
+                          <a:ea typeface="Calibri" pitchFamily="34" charset="-122"/>
+                          <a:cs typeface="Calibri" pitchFamily="34" charset="-120"/>
+                        </a:rPr>
+                        <a:t>môj čas + Stevo F. (CZ) · low-code, infra rádovo desiatky €/mes.</a:t>
+                      </a:r>
+                      <a:endParaRPr lang="en-US" sz="1000" dirty="0">
+                        <a:latin typeface="Calibri" charset="0"/>
+                        <a:ea typeface="Calibri" charset="0"/>
+                        <a:cs typeface="Calibri" charset="0"/>
+                      </a:endParaRPr>
+                    </a:p>
+                  </a:txBody>
+                  <a:tcPr marL="73152" marR="73152" marT="73152" marB="73152" anchor="ctr">
+                    <a:lnL w="9525" cap="flat" cmpd="sng" algn="ctr">
+                      <a:solidFill>
+                        <a:srgbClr val="22303C"/>
+                      </a:solidFill>
+                      <a:prstDash val="solid"/>
+                      <a:round/>
+                      <a:headEnd type="none" w="med" len="med"/>
+                      <a:tailEnd type="none" w="med" len="med"/>
+                    </a:lnL>
+                    <a:lnR w="9525" cap="flat" cmpd="sng" algn="ctr">
+                      <a:solidFill>
+                        <a:srgbClr val="22303C"/>
+                      </a:solidFill>
+                      <a:prstDash val="solid"/>
+                      <a:round/>
+                      <a:headEnd type="none" w="med" len="med"/>
+                      <a:tailEnd type="none" w="med" len="med"/>
+                    </a:lnR>
+                    <a:lnT w="9525" cap="flat" cmpd="sng" algn="ctr">
+                      <a:solidFill>
+                        <a:srgbClr val="22303C"/>
+                      </a:solidFill>
+                      <a:prstDash val="solid"/>
+                      <a:round/>
+                      <a:headEnd type="none" w="med" len="med"/>
+                      <a:tailEnd type="none" w="med" len="med"/>
+                    </a:lnT>
+                    <a:lnB w="9525" cap="flat" cmpd="sng" algn="ctr">
+                      <a:solidFill>
+                        <a:srgbClr val="22303C"/>
+                      </a:solidFill>
+                      <a:prstDash val="solid"/>
+                      <a:round/>
+                      <a:headEnd type="none" w="med" len="med"/>
+                      <a:tailEnd type="none" w="med" len="med"/>
+                    </a:lnB>
+                    <a:solidFill>
+                      <a:srgbClr val="0F1822"/>
+                    </a:solidFill>
+                  </a:tcPr>
+                </a:tc>
+                <a:tc>
+                  <a:txBody>
+                    <a:bodyPr/>
+                    <a:lstStyle/>
+                    <a:p>
+                      <a:pPr indent="0" marL="0">
+                        <a:buNone/>
+                      </a:pPr>
+                      <a:r>
+                        <a:rPr lang="en-US" sz="1000" dirty="0">
+                          <a:solidFill>
+                            <a:srgbClr val="F2F6F8"/>
+                          </a:solidFill>
+                          <a:latin typeface="Calibri" pitchFamily="34" charset="0"/>
+                          <a:ea typeface="Calibri" pitchFamily="34" charset="-122"/>
+                          <a:cs typeface="Calibri" pitchFamily="34" charset="-120"/>
+                        </a:rPr>
+                        <a:t>údržba + rozšírenia podľa spätnej väzby manažmentu</a:t>
+                      </a:r>
+                      <a:endParaRPr lang="en-US" sz="1000" dirty="0">
+                        <a:latin typeface="Calibri" charset="0"/>
+                        <a:ea typeface="Calibri" charset="0"/>
+                        <a:cs typeface="Calibri" charset="0"/>
+                      </a:endParaRPr>
+                    </a:p>
+                  </a:txBody>
+                  <a:tcPr marL="73152" marR="73152" marT="73152" marB="73152" anchor="ctr">
+                    <a:lnL w="9525" cap="flat" cmpd="sng" algn="ctr">
+                      <a:solidFill>
+                        <a:srgbClr val="22303C"/>
+                      </a:solidFill>
+                      <a:prstDash val="solid"/>
+                      <a:round/>
+                      <a:headEnd type="none" w="med" len="med"/>
+                      <a:tailEnd type="none" w="med" len="med"/>
+                    </a:lnL>
+                    <a:lnR w="9525" cap="flat" cmpd="sng" algn="ctr">
+                      <a:solidFill>
+                        <a:srgbClr val="22303C"/>
+                      </a:solidFill>
+                      <a:prstDash val="solid"/>
+                      <a:round/>
+                      <a:headEnd type="none" w="med" len="med"/>
+                      <a:tailEnd type="none" w="med" len="med"/>
+                    </a:lnR>
+                    <a:lnT w="9525" cap="flat" cmpd="sng" algn="ctr">
+                      <a:solidFill>
+                        <a:srgbClr val="22303C"/>
+                      </a:solidFill>
+                      <a:prstDash val="solid"/>
+                      <a:round/>
+                      <a:headEnd type="none" w="med" len="med"/>
+                      <a:tailEnd type="none" w="med" len="med"/>
+                    </a:lnT>
+                    <a:lnB w="9525" cap="flat" cmpd="sng" algn="ctr">
+                      <a:solidFill>
+                        <a:srgbClr val="22303C"/>
+                      </a:solidFill>
+                      <a:prstDash val="solid"/>
+                      <a:round/>
+                      <a:headEnd type="none" w="med" len="med"/>
+                      <a:tailEnd type="none" w="med" len="med"/>
+                    </a:lnB>
+                    <a:solidFill>
+                      <a:srgbClr val="0F1822"/>
+                    </a:solidFill>
+                  </a:tcPr>
+                </a:tc>
+                <a:tc>
+                  <a:txBody>
+                    <a:bodyPr/>
+                    <a:lstStyle/>
+                    <a:p>
+                      <a:pPr indent="0" marL="0">
+                        <a:buNone/>
+                      </a:pPr>
+                      <a:r>
+                        <a:rPr lang="en-US" sz="1000" dirty="0">
+                          <a:solidFill>
+                            <a:srgbClr val="F2F6F8"/>
+                          </a:solidFill>
+                          <a:latin typeface="Calibri" pitchFamily="34" charset="0"/>
+                          <a:ea typeface="Calibri" pitchFamily="34" charset="-122"/>
+                          <a:cs typeface="Calibri" pitchFamily="34" charset="-120"/>
+                        </a:rPr>
+                        <a:t>replikácia pre SK a HU (2027) — konfigurácia, nie nový vývoj</a:t>
+                      </a:r>
+                      <a:endParaRPr lang="en-US" sz="1000" dirty="0">
+                        <a:latin typeface="Calibri" charset="0"/>
+                        <a:ea typeface="Calibri" charset="0"/>
+                        <a:cs typeface="Calibri" charset="0"/>
+                      </a:endParaRPr>
+                    </a:p>
+                  </a:txBody>
+                  <a:tcPr marL="73152" marR="73152" marT="73152" marB="73152" anchor="ctr">
+                    <a:lnL w="9525" cap="flat" cmpd="sng" algn="ctr">
+                      <a:solidFill>
+                        <a:srgbClr val="22303C"/>
+                      </a:solidFill>
+                      <a:prstDash val="solid"/>
+                      <a:round/>
+                      <a:headEnd type="none" w="med" len="med"/>
+                      <a:tailEnd type="none" w="med" len="med"/>
+                    </a:lnL>
+                    <a:lnR w="9525" cap="flat" cmpd="sng" algn="ctr">
+                      <a:solidFill>
+                        <a:srgbClr val="22303C"/>
+                      </a:solidFill>
+                      <a:prstDash val="solid"/>
+                      <a:round/>
+                      <a:headEnd type="none" w="med" len="med"/>
+                      <a:tailEnd type="none" w="med" len="med"/>
+                    </a:lnR>
+                    <a:lnT w="9525" cap="flat" cmpd="sng" algn="ctr">
+                      <a:solidFill>
+                        <a:srgbClr val="22303C"/>
+                      </a:solidFill>
+                      <a:prstDash val="solid"/>
+                      <a:round/>
+                      <a:headEnd type="none" w="med" len="med"/>
+                      <a:tailEnd type="none" w="med" len="med"/>
+                    </a:lnT>
+                    <a:lnB w="9525" cap="flat" cmpd="sng" algn="ctr">
+                      <a:solidFill>
+                        <a:srgbClr val="22303C"/>
+                      </a:solidFill>
+                      <a:prstDash val="solid"/>
+                      <a:round/>
+                      <a:headEnd type="none" w="med" len="med"/>
+                      <a:tailEnd type="none" w="med" len="med"/>
+                    </a:lnB>
+                    <a:solidFill>
+                      <a:srgbClr val="0F1822"/>
+                    </a:solidFill>
+                  </a:tcPr>
+                </a:tc>
+              </a:tr>
+              <a:tr h="822960">
+                <a:tc>
+                  <a:txBody>
+                    <a:bodyPr/>
+                    <a:lstStyle/>
+                    <a:p>
+                      <a:pPr indent="0" marL="0">
+                        <a:buNone/>
+                      </a:pPr>
+                      <a:r>
+                        <a:rPr lang="en-US" sz="1050" b="1" dirty="0">
+                          <a:solidFill>
+                            <a:srgbClr val="F2F6F8"/>
+                          </a:solidFill>
+                          <a:latin typeface="Calibri" pitchFamily="34" charset="0"/>
+                          <a:ea typeface="Calibri" pitchFamily="34" charset="-122"/>
+                          <a:cs typeface="Calibri" pitchFamily="34" charset="-120"/>
+                        </a:rPr>
+                        <a:t>Nefinančný prínos</a:t>
+                      </a:r>
+                      <a:endParaRPr lang="en-US" sz="1050" dirty="0">
+                        <a:latin typeface="Calibri" charset="0"/>
+                        <a:ea typeface="Calibri" charset="0"/>
+                        <a:cs typeface="Calibri" charset="0"/>
+                      </a:endParaRPr>
+                    </a:p>
+                  </a:txBody>
+                  <a:tcPr marL="73152" marR="73152" marT="73152" marB="73152" anchor="ctr">
+                    <a:lnL w="9525" cap="flat" cmpd="sng" algn="ctr">
+                      <a:solidFill>
+                        <a:srgbClr val="22303C"/>
+                      </a:solidFill>
+                      <a:prstDash val="solid"/>
+                      <a:round/>
+                      <a:headEnd type="none" w="med" len="med"/>
+                      <a:tailEnd type="none" w="med" len="med"/>
+                    </a:lnL>
+                    <a:lnR w="9525" cap="flat" cmpd="sng" algn="ctr">
+                      <a:solidFill>
+                        <a:srgbClr val="22303C"/>
+                      </a:solidFill>
+                      <a:prstDash val="solid"/>
+                      <a:round/>
+                      <a:headEnd type="none" w="med" len="med"/>
+                      <a:tailEnd type="none" w="med" len="med"/>
+                    </a:lnR>
+                    <a:lnT w="9525" cap="flat" cmpd="sng" algn="ctr">
+                      <a:solidFill>
+                        <a:srgbClr val="22303C"/>
+                      </a:solidFill>
+                      <a:prstDash val="solid"/>
+                      <a:round/>
+                      <a:headEnd type="none" w="med" len="med"/>
+                      <a:tailEnd type="none" w="med" len="med"/>
+                    </a:lnT>
+                    <a:lnB w="9525" cap="flat" cmpd="sng" algn="ctr">
+                      <a:solidFill>
+                        <a:srgbClr val="22303C"/>
+                      </a:solidFill>
+                      <a:prstDash val="solid"/>
+                      <a:round/>
+                      <a:headEnd type="none" w="med" len="med"/>
+                      <a:tailEnd type="none" w="med" len="med"/>
+                    </a:lnB>
+                    <a:solidFill>
+                      <a:srgbClr val="0F1822"/>
+                    </a:solidFill>
+                  </a:tcPr>
+                </a:tc>
+                <a:tc>
+                  <a:txBody>
+                    <a:bodyPr/>
+                    <a:lstStyle/>
+                    <a:p>
+                      <a:pPr indent="0" marL="0">
+                        <a:buNone/>
+                      </a:pPr>
+                      <a:r>
+                        <a:rPr lang="en-US" sz="1000" dirty="0">
+                          <a:solidFill>
+                            <a:srgbClr val="F2F6F8"/>
+                          </a:solidFill>
+                          <a:latin typeface="Calibri" pitchFamily="34" charset="0"/>
+                          <a:ea typeface="Calibri" pitchFamily="34" charset="-122"/>
+                          <a:cs typeface="Calibri" pitchFamily="34" charset="-120"/>
+                        </a:rPr>
+                        <a:t>stav na jeden pohľad: A ide dobre · B treba korekciu · C treba podporu manažmentu</a:t>
+                      </a:r>
+                      <a:endParaRPr lang="en-US" sz="1000" dirty="0">
+                        <a:latin typeface="Calibri" charset="0"/>
+                        <a:ea typeface="Calibri" charset="0"/>
+                        <a:cs typeface="Calibri" charset="0"/>
+                      </a:endParaRPr>
+                    </a:p>
+                  </a:txBody>
+                  <a:tcPr marL="73152" marR="73152" marT="73152" marB="73152" anchor="ctr">
+                    <a:lnL w="9525" cap="flat" cmpd="sng" algn="ctr">
+                      <a:solidFill>
+                        <a:srgbClr val="22303C"/>
+                      </a:solidFill>
+                      <a:prstDash val="solid"/>
+                      <a:round/>
+                      <a:headEnd type="none" w="med" len="med"/>
+                      <a:tailEnd type="none" w="med" len="med"/>
+                    </a:lnL>
+                    <a:lnR w="9525" cap="flat" cmpd="sng" algn="ctr">
+                      <a:solidFill>
+                        <a:srgbClr val="22303C"/>
+                      </a:solidFill>
+                      <a:prstDash val="solid"/>
+                      <a:round/>
+                      <a:headEnd type="none" w="med" len="med"/>
+                      <a:tailEnd type="none" w="med" len="med"/>
+                    </a:lnR>
+                    <a:lnT w="9525" cap="flat" cmpd="sng" algn="ctr">
+                      <a:solidFill>
+                        <a:srgbClr val="22303C"/>
+                      </a:solidFill>
+                      <a:prstDash val="solid"/>
+                      <a:round/>
+                      <a:headEnd type="none" w="med" len="med"/>
+                      <a:tailEnd type="none" w="med" len="med"/>
+                    </a:lnT>
+                    <a:lnB w="9525" cap="flat" cmpd="sng" algn="ctr">
+                      <a:solidFill>
+                        <a:srgbClr val="22303C"/>
+                      </a:solidFill>
+                      <a:prstDash val="solid"/>
+                      <a:round/>
+                      <a:headEnd type="none" w="med" len="med"/>
+                      <a:tailEnd type="none" w="med" len="med"/>
+                    </a:lnB>
+                    <a:solidFill>
+                      <a:srgbClr val="0F1822"/>
+                    </a:solidFill>
+                  </a:tcPr>
+                </a:tc>
+                <a:tc>
+                  <a:txBody>
+                    <a:bodyPr/>
+                    <a:lstStyle/>
+                    <a:p>
+                      <a:pPr indent="0" marL="0">
+                        <a:buNone/>
+                      </a:pPr>
+                      <a:r>
+                        <a:rPr lang="en-US" sz="1000" dirty="0">
+                          <a:solidFill>
+                            <a:srgbClr val="F2F6F8"/>
+                          </a:solidFill>
+                          <a:latin typeface="Calibri" pitchFamily="34" charset="0"/>
+                          <a:ea typeface="Calibri" pitchFamily="34" charset="-122"/>
+                          <a:cs typeface="Calibri" pitchFamily="34" charset="-120"/>
+                        </a:rPr>
+                        <a:t>porady nad rovnakými číslami, nie nad rôznymi exportmi</a:t>
+                      </a:r>
+                      <a:endParaRPr lang="en-US" sz="1000" dirty="0">
+                        <a:latin typeface="Calibri" charset="0"/>
+                        <a:ea typeface="Calibri" charset="0"/>
+                        <a:cs typeface="Calibri" charset="0"/>
+                      </a:endParaRPr>
+                    </a:p>
+                  </a:txBody>
+                  <a:tcPr marL="73152" marR="73152" marT="73152" marB="73152" anchor="ctr">
+                    <a:lnL w="9525" cap="flat" cmpd="sng" algn="ctr">
+                      <a:solidFill>
+                        <a:srgbClr val="22303C"/>
+                      </a:solidFill>
+                      <a:prstDash val="solid"/>
+                      <a:round/>
+                      <a:headEnd type="none" w="med" len="med"/>
+                      <a:tailEnd type="none" w="med" len="med"/>
+                    </a:lnL>
+                    <a:lnR w="9525" cap="flat" cmpd="sng" algn="ctr">
+                      <a:solidFill>
+                        <a:srgbClr val="22303C"/>
+                      </a:solidFill>
+                      <a:prstDash val="solid"/>
+                      <a:round/>
+                      <a:headEnd type="none" w="med" len="med"/>
+                      <a:tailEnd type="none" w="med" len="med"/>
+                    </a:lnR>
+                    <a:lnT w="9525" cap="flat" cmpd="sng" algn="ctr">
+                      <a:solidFill>
+                        <a:srgbClr val="22303C"/>
+                      </a:solidFill>
+                      <a:prstDash val="solid"/>
+                      <a:round/>
+                      <a:headEnd type="none" w="med" len="med"/>
+                      <a:tailEnd type="none" w="med" len="med"/>
+                    </a:lnT>
+                    <a:lnB w="9525" cap="flat" cmpd="sng" algn="ctr">
+                      <a:solidFill>
+                        <a:srgbClr val="22303C"/>
+                      </a:solidFill>
+                      <a:prstDash val="solid"/>
+                      <a:round/>
+                      <a:headEnd type="none" w="med" len="med"/>
+                      <a:tailEnd type="none" w="med" len="med"/>
+                    </a:lnB>
+                    <a:solidFill>
+                      <a:srgbClr val="0F1822"/>
+                    </a:solidFill>
+                  </a:tcPr>
+                </a:tc>
+                <a:tc>
+                  <a:txBody>
+                    <a:bodyPr/>
+                    <a:lstStyle/>
+                    <a:p>
+                      <a:pPr indent="0" marL="0">
+                        <a:buNone/>
+                      </a:pPr>
+                      <a:r>
+                        <a:rPr lang="en-US" sz="1000" dirty="0">
+                          <a:solidFill>
+                            <a:srgbClr val="F2F6F8"/>
+                          </a:solidFill>
+                          <a:latin typeface="Calibri" pitchFamily="34" charset="0"/>
+                          <a:ea typeface="Calibri" pitchFamily="34" charset="-122"/>
+                          <a:cs typeface="Calibri" pitchFamily="34" charset="-120"/>
+                        </a:rPr>
+                        <a:t>skoršia identifikácia problémov naprieč entitami skupiny</a:t>
+                      </a:r>
+                      <a:endParaRPr lang="en-US" sz="1000" dirty="0">
+                        <a:latin typeface="Calibri" charset="0"/>
+                        <a:ea typeface="Calibri" charset="0"/>
+                        <a:cs typeface="Calibri" charset="0"/>
+                      </a:endParaRPr>
+                    </a:p>
+                  </a:txBody>
+                  <a:tcPr marL="73152" marR="73152" marT="73152" marB="73152" anchor="ctr">
+                    <a:lnL w="9525" cap="flat" cmpd="sng" algn="ctr">
+                      <a:solidFill>
+                        <a:srgbClr val="22303C"/>
+                      </a:solidFill>
+                      <a:prstDash val="solid"/>
+                      <a:round/>
+                      <a:headEnd type="none" w="med" len="med"/>
+                      <a:tailEnd type="none" w="med" len="med"/>
+                    </a:lnL>
+                    <a:lnR w="9525" cap="flat" cmpd="sng" algn="ctr">
+                      <a:solidFill>
+                        <a:srgbClr val="22303C"/>
+                      </a:solidFill>
+                      <a:prstDash val="solid"/>
+                      <a:round/>
+                      <a:headEnd type="none" w="med" len="med"/>
+                      <a:tailEnd type="none" w="med" len="med"/>
+                    </a:lnR>
+                    <a:lnT w="9525" cap="flat" cmpd="sng" algn="ctr">
+                      <a:solidFill>
+                        <a:srgbClr val="22303C"/>
+                      </a:solidFill>
+                      <a:prstDash val="solid"/>
+                      <a:round/>
+                      <a:headEnd type="none" w="med" len="med"/>
+                      <a:tailEnd type="none" w="med" len="med"/>
+                    </a:lnT>
+                    <a:lnB w="9525" cap="flat" cmpd="sng" algn="ctr">
+                      <a:solidFill>
+                        <a:srgbClr val="22303C"/>
+                      </a:solidFill>
+                      <a:prstDash val="solid"/>
+                      <a:round/>
+                      <a:headEnd type="none" w="med" len="med"/>
+                      <a:tailEnd type="none" w="med" len="med"/>
+                    </a:lnB>
+                    <a:solidFill>
+                      <a:srgbClr val="0F1822"/>
+                    </a:solidFill>
+                  </a:tcPr>
+                </a:tc>
+              </a:tr>
+              <a:tr h="822960">
+                <a:tc>
+                  <a:txBody>
+                    <a:bodyPr/>
+                    <a:lstStyle/>
+                    <a:p>
+                      <a:pPr indent="0" marL="0">
+                        <a:buNone/>
+                      </a:pPr>
+                      <a:r>
+                        <a:rPr lang="en-US" sz="1050" b="1" dirty="0">
+                          <a:solidFill>
+                            <a:srgbClr val="F2F6F8"/>
+                          </a:solidFill>
+                          <a:latin typeface="Calibri" pitchFamily="34" charset="0"/>
+                          <a:ea typeface="Calibri" pitchFamily="34" charset="-122"/>
+                          <a:cs typeface="Calibri" pitchFamily="34" charset="-120"/>
+                        </a:rPr>
+                        <a:t>Rozhodovací bod</a:t>
+                      </a:r>
+                      <a:endParaRPr lang="en-US" sz="1050" dirty="0">
+                        <a:latin typeface="Calibri" charset="0"/>
+                        <a:ea typeface="Calibri" charset="0"/>
+                        <a:cs typeface="Calibri" charset="0"/>
+                      </a:endParaRPr>
+                    </a:p>
+                  </a:txBody>
+                  <a:tcPr marL="73152" marR="73152" marT="73152" marB="73152" anchor="ctr">
+                    <a:lnL w="9525" cap="flat" cmpd="sng" algn="ctr">
+                      <a:solidFill>
+                        <a:srgbClr val="22303C"/>
+                      </a:solidFill>
+                      <a:prstDash val="solid"/>
+                      <a:round/>
+                      <a:headEnd type="none" w="med" len="med"/>
+                      <a:tailEnd type="none" w="med" len="med"/>
+                    </a:lnL>
+                    <a:lnR w="9525" cap="flat" cmpd="sng" algn="ctr">
+                      <a:solidFill>
+                        <a:srgbClr val="22303C"/>
+                      </a:solidFill>
+                      <a:prstDash val="solid"/>
+                      <a:round/>
+                      <a:headEnd type="none" w="med" len="med"/>
+                      <a:tailEnd type="none" w="med" len="med"/>
+                    </a:lnR>
+                    <a:lnT w="9525" cap="flat" cmpd="sng" algn="ctr">
+                      <a:solidFill>
+                        <a:srgbClr val="22303C"/>
+                      </a:solidFill>
+                      <a:prstDash val="solid"/>
+                      <a:round/>
+                      <a:headEnd type="none" w="med" len="med"/>
+                      <a:tailEnd type="none" w="med" len="med"/>
+                    </a:lnT>
+                    <a:lnB w="9525" cap="flat" cmpd="sng" algn="ctr">
+                      <a:solidFill>
+                        <a:srgbClr val="22303C"/>
+                      </a:solidFill>
+                      <a:prstDash val="solid"/>
+                      <a:round/>
+                      <a:headEnd type="none" w="med" len="med"/>
+                      <a:tailEnd type="none" w="med" len="med"/>
+                    </a:lnB>
+                    <a:solidFill>
+                      <a:srgbClr val="0F1822"/>
+                    </a:solidFill>
+                  </a:tcPr>
+                </a:tc>
+                <a:tc>
+                  <a:txBody>
+                    <a:bodyPr/>
+                    <a:lstStyle/>
+                    <a:p>
+                      <a:pPr indent="0" marL="0">
+                        <a:buNone/>
+                      </a:pPr>
+                      <a:r>
+                        <a:rPr lang="en-US" sz="1000" dirty="0">
+                          <a:solidFill>
+                            <a:srgbClr val="39D98A"/>
+                          </a:solidFill>
+                          <a:latin typeface="Calibri" pitchFamily="34" charset="0"/>
+                          <a:ea typeface="Calibri" pitchFamily="34" charset="-122"/>
+                          <a:cs typeface="Calibri" pitchFamily="34" charset="-120"/>
+                        </a:rPr>
+                        <a:t>používa CZ manažment nástroj na poradách?</a:t>
+                      </a:r>
+                      <a:endParaRPr lang="en-US" sz="1000" dirty="0">
+                        <a:latin typeface="Calibri" charset="0"/>
+                        <a:ea typeface="Calibri" charset="0"/>
+                        <a:cs typeface="Calibri" charset="0"/>
+                      </a:endParaRPr>
+                    </a:p>
+                  </a:txBody>
+                  <a:tcPr marL="73152" marR="73152" marT="73152" marB="73152" anchor="ctr">
+                    <a:lnL w="9525" cap="flat" cmpd="sng" algn="ctr">
+                      <a:solidFill>
+                        <a:srgbClr val="22303C"/>
+                      </a:solidFill>
+                      <a:prstDash val="solid"/>
+                      <a:round/>
+                      <a:headEnd type="none" w="med" len="med"/>
+                      <a:tailEnd type="none" w="med" len="med"/>
+                    </a:lnL>
+                    <a:lnR w="9525" cap="flat" cmpd="sng" algn="ctr">
+                      <a:solidFill>
+                        <a:srgbClr val="22303C"/>
+                      </a:solidFill>
+                      <a:prstDash val="solid"/>
+                      <a:round/>
+                      <a:headEnd type="none" w="med" len="med"/>
+                      <a:tailEnd type="none" w="med" len="med"/>
+                    </a:lnR>
+                    <a:lnT w="9525" cap="flat" cmpd="sng" algn="ctr">
+                      <a:solidFill>
+                        <a:srgbClr val="22303C"/>
+                      </a:solidFill>
+                      <a:prstDash val="solid"/>
+                      <a:round/>
+                      <a:headEnd type="none" w="med" len="med"/>
+                      <a:tailEnd type="none" w="med" len="med"/>
+                    </a:lnT>
+                    <a:lnB w="9525" cap="flat" cmpd="sng" algn="ctr">
+                      <a:solidFill>
+                        <a:srgbClr val="22303C"/>
+                      </a:solidFill>
+                      <a:prstDash val="solid"/>
+                      <a:round/>
+                      <a:headEnd type="none" w="med" len="med"/>
+                      <a:tailEnd type="none" w="med" len="med"/>
+                    </a:lnB>
+                    <a:solidFill>
+                      <a:srgbClr val="0F1822"/>
+                    </a:solidFill>
+                  </a:tcPr>
+                </a:tc>
+                <a:tc>
+                  <a:txBody>
+                    <a:bodyPr/>
+                    <a:lstStyle/>
+                    <a:p>
+                      <a:pPr indent="0" marL="0">
+                        <a:buNone/>
+                      </a:pPr>
+                      <a:r>
+                        <a:rPr lang="en-US" sz="1000" dirty="0">
+                          <a:solidFill>
+                            <a:srgbClr val="39D98A"/>
+                          </a:solidFill>
+                          <a:latin typeface="Calibri" pitchFamily="34" charset="0"/>
+                          <a:ea typeface="Calibri" pitchFamily="34" charset="-122"/>
+                          <a:cs typeface="Calibri" pitchFamily="34" charset="-120"/>
+                        </a:rPr>
+                        <a:t>padajú podľa neho reálne korekcie a rozhodnutia?</a:t>
+                      </a:r>
+                      <a:endParaRPr lang="en-US" sz="1000" dirty="0">
+                        <a:latin typeface="Calibri" charset="0"/>
+                        <a:ea typeface="Calibri" charset="0"/>
+                        <a:cs typeface="Calibri" charset="0"/>
+                      </a:endParaRPr>
+                    </a:p>
+                  </a:txBody>
+                  <a:tcPr marL="73152" marR="73152" marT="73152" marB="73152" anchor="ctr">
+                    <a:lnL w="9525" cap="flat" cmpd="sng" algn="ctr">
+                      <a:solidFill>
+                        <a:srgbClr val="22303C"/>
+                      </a:solidFill>
+                      <a:prstDash val="solid"/>
+                      <a:round/>
+                      <a:headEnd type="none" w="med" len="med"/>
+                      <a:tailEnd type="none" w="med" len="med"/>
+                    </a:lnL>
+                    <a:lnR w="9525" cap="flat" cmpd="sng" algn="ctr">
+                      <a:solidFill>
+                        <a:srgbClr val="22303C"/>
+                      </a:solidFill>
+                      <a:prstDash val="solid"/>
+                      <a:round/>
+                      <a:headEnd type="none" w="med" len="med"/>
+                      <a:tailEnd type="none" w="med" len="med"/>
+                    </a:lnR>
+                    <a:lnT w="9525" cap="flat" cmpd="sng" algn="ctr">
+                      <a:solidFill>
+                        <a:srgbClr val="22303C"/>
+                      </a:solidFill>
+                      <a:prstDash val="solid"/>
+                      <a:round/>
+                      <a:headEnd type="none" w="med" len="med"/>
+                      <a:tailEnd type="none" w="med" len="med"/>
+                    </a:lnT>
+                    <a:lnB w="9525" cap="flat" cmpd="sng" algn="ctr">
+                      <a:solidFill>
+                        <a:srgbClr val="22303C"/>
+                      </a:solidFill>
+                      <a:prstDash val="solid"/>
+                      <a:round/>
+                      <a:headEnd type="none" w="med" len="med"/>
+                      <a:tailEnd type="none" w="med" len="med"/>
+                    </a:lnB>
+                    <a:solidFill>
+                      <a:srgbClr val="0F1822"/>
+                    </a:solidFill>
+                  </a:tcPr>
+                </a:tc>
+                <a:tc>
+                  <a:txBody>
+                    <a:bodyPr/>
+                    <a:lstStyle/>
+                    <a:p>
+                      <a:pPr indent="0" marL="0">
+                        <a:buNone/>
+                      </a:pPr>
+                      <a:r>
+                        <a:rPr lang="en-US" sz="1000" dirty="0">
+                          <a:solidFill>
+                            <a:srgbClr val="39D98A"/>
+                          </a:solidFill>
+                          <a:latin typeface="Calibri" pitchFamily="34" charset="0"/>
+                          <a:ea typeface="Calibri" pitchFamily="34" charset="-122"/>
+                          <a:cs typeface="Calibri" pitchFamily="34" charset="-120"/>
+                        </a:rPr>
+                        <a:t>chcú ho SK a HU — replikovať v 2027?</a:t>
+                      </a:r>
+                      <a:endParaRPr lang="en-US" sz="1000" dirty="0">
+                        <a:latin typeface="Calibri" charset="0"/>
+                        <a:ea typeface="Calibri" charset="0"/>
+                        <a:cs typeface="Calibri" charset="0"/>
+                      </a:endParaRPr>
+                    </a:p>
+                  </a:txBody>
+                  <a:tcPr marL="73152" marR="73152" marT="73152" marB="73152" anchor="ctr">
+                    <a:lnL w="9525" cap="flat" cmpd="sng" algn="ctr">
+                      <a:solidFill>
+                        <a:srgbClr val="22303C"/>
+                      </a:solidFill>
+                      <a:prstDash val="solid"/>
+                      <a:round/>
+                      <a:headEnd type="none" w="med" len="med"/>
+                      <a:tailEnd type="none" w="med" len="med"/>
+                    </a:lnL>
+                    <a:lnR w="9525" cap="flat" cmpd="sng" algn="ctr">
+                      <a:solidFill>
+                        <a:srgbClr val="22303C"/>
+                      </a:solidFill>
+                      <a:prstDash val="solid"/>
+                      <a:round/>
+                      <a:headEnd type="none" w="med" len="med"/>
+                      <a:tailEnd type="none" w="med" len="med"/>
+                    </a:lnR>
+                    <a:lnT w="9525" cap="flat" cmpd="sng" algn="ctr">
+                      <a:solidFill>
+                        <a:srgbClr val="22303C"/>
+                      </a:solidFill>
+                      <a:prstDash val="solid"/>
+                      <a:round/>
+                      <a:headEnd type="none" w="med" len="med"/>
+                      <a:tailEnd type="none" w="med" len="med"/>
+                    </a:lnT>
+                    <a:lnB w="9525" cap="flat" cmpd="sng" algn="ctr">
+                      <a:solidFill>
+                        <a:srgbClr val="22303C"/>
+                      </a:solidFill>
+                      <a:prstDash val="solid"/>
+                      <a:round/>
+                      <a:headEnd type="none" w="med" len="med"/>
+                      <a:tailEnd type="none" w="med" len="med"/>
+                    </a:lnB>
+                    <a:solidFill>
+                      <a:srgbClr val="0F1822"/>
+                    </a:solidFill>
+                  </a:tcPr>
+                </a:tc>
+              </a:tr>
+            </a:tbl>
+          </a:graphicData>
+        </a:graphic>
+      </p:graphicFrame>
+      <p:sp>
+        <p:nvSpPr>
+          <p:cNvPr id="7" name="Text 4"/>
+          <p:cNvSpPr txBox="1"/>
+          <p:nvPr/>
+        </p:nvSpPr>
+        <p:spPr>
+          <a:xfrm>
+            <a:off x="566928" y="6355080"/>
+            <a:ext cx="11064240" cy="320040"/>
+          </a:xfrm>
+          <a:prstGeom prst="rect">
+            <a:avLst/>
+          </a:prstGeom>
+          <a:noFill/>
+          <a:ln/>
+        </p:spPr>
+        <p:txBody>
+          <a:bodyPr wrap="square" lIns="0" tIns="0" rIns="0" bIns="0" rtlCol="0" anchor="ctr"/>
+          <a:lstStyle/>
+          <a:p>
+            <a:pPr indent="0" marL="0">
+              <a:buNone/>
+            </a:pPr>
+            <a:r>
+              <a:rPr lang="en-US" sz="1100" i="1" dirty="0">
+                <a:solidFill>
+                  <a:srgbClr val="8DA2B2"/>
+                </a:solidFill>
+                <a:latin typeface="Calibri" pitchFamily="34" charset="0"/>
+                <a:ea typeface="Calibri" pitchFamily="34" charset="-122"/>
+                <a:cs typeface="Calibri" pitchFamily="34" charset="-120"/>
+              </a:rPr>
+              <a:t>Champion: Stevo F. · beží vývoj pre českú entitu · realizovateľnosť 3/5</a:t>
+            </a:r>
+            <a:endParaRPr lang="en-US" sz="1100" dirty="0"/>
+          </a:p>
+        </p:txBody>
+      </p:sp>
+    </p:spTree>
+  </p:cSld>
+  <p:clrMapOvr>
+    <a:masterClrMapping/>
+  </p:clrMapOvr>
+</p:sld>
+</file>
+
+<file path=ppt/slides/slide11.xml><?xml version="1.0" encoding="utf-8"?>
+<p:sld xmlns:a="http://schemas.openxmlformats.org/drawingml/2006/main" xmlns:r="http://schemas.openxmlformats.org/officeDocument/2006/relationships" xmlns:p="http://schemas.openxmlformats.org/presentationml/2006/main">
+  <p:cSld name="Slide 11">
+    <p:bg>
+      <p:bgPr>
+        <a:solidFill>
+          <a:srgbClr val="0B0F14"/>
+        </a:solidFill>
+      </p:bgPr>
+    </p:bg>
+    <p:spTree>
+      <p:nvGrpSpPr>
+        <p:cNvPr id="1" name=""/>
+        <p:cNvGrpSpPr/>
+        <p:nvPr/>
+      </p:nvGrpSpPr>
+      <p:grpSpPr>
+        <a:xfrm>
+          <a:off x="0" y="0"/>
+          <a:ext cx="0" cy="0"/>
+          <a:chOff x="0" y="0"/>
+          <a:chExt cx="0" cy="0"/>
+        </a:xfrm>
+      </p:grpSpPr>
+      <p:sp>
+        <p:nvSpPr>
+          <p:cNvPr id="2" name="Text 0"/>
+          <p:cNvSpPr txBox="1"/>
+          <p:nvPr/>
+        </p:nvSpPr>
+        <p:spPr>
+          <a:xfrm>
+            <a:off x="566928" y="292608"/>
+            <a:ext cx="2743200" cy="365760"/>
+          </a:xfrm>
+          <a:prstGeom prst="rect">
+            <a:avLst/>
+          </a:prstGeom>
+          <a:noFill/>
+          <a:ln/>
+        </p:spPr>
+        <p:txBody>
+          <a:bodyPr wrap="square" lIns="0" tIns="0" rIns="0" bIns="0" rtlCol="0" anchor="ctr"/>
+          <a:lstStyle/>
+          <a:p>
+            <a:pPr algn="l" indent="0" marL="0">
+              <a:buNone/>
+            </a:pPr>
+            <a:r>
+              <a:rPr lang="en-US" sz="1300" b="1" dirty="0">
+                <a:solidFill>
+                  <a:srgbClr val="F2F6F8"/>
+                </a:solidFill>
+                <a:latin typeface="Calibri" pitchFamily="34" charset="0"/>
+                <a:ea typeface="Calibri" pitchFamily="34" charset="-122"/>
+                <a:cs typeface="Calibri" pitchFamily="34" charset="-120"/>
+              </a:rPr>
+              <a:t>Monetize</a:t>
+            </a:r>
+            <a:pPr algn="l" indent="0" marL="0">
+              <a:buNone/>
+            </a:pPr>
+            <a:r>
+              <a:rPr lang="en-US" sz="1300" b="1" dirty="0">
+                <a:solidFill>
+                  <a:srgbClr val="3FB6E8"/>
+                </a:solidFill>
+                <a:latin typeface="Calibri" pitchFamily="34" charset="0"/>
+                <a:ea typeface="Calibri" pitchFamily="34" charset="-122"/>
+                <a:cs typeface="Calibri" pitchFamily="34" charset="-120"/>
+              </a:rPr>
+              <a:t>.CX</a:t>
+            </a:r>
+            <a:endParaRPr lang="en-US" sz="1300" dirty="0"/>
+          </a:p>
+        </p:txBody>
+      </p:sp>
+      <p:sp>
+        <p:nvSpPr>
+          <p:cNvPr id="3" name="Text 1"/>
+          <p:cNvSpPr txBox="1"/>
+          <p:nvPr/>
+        </p:nvSpPr>
+        <p:spPr>
+          <a:xfrm>
+            <a:off x="585216" y="868680"/>
+            <a:ext cx="10972800" cy="292608"/>
+          </a:xfrm>
+          <a:prstGeom prst="rect">
+            <a:avLst/>
+          </a:prstGeom>
+          <a:noFill/>
+          <a:ln/>
+        </p:spPr>
+        <p:txBody>
+          <a:bodyPr wrap="square" lIns="0" tIns="0" rIns="0" bIns="0" rtlCol="0" anchor="ctr"/>
+          <a:lstStyle/>
+          <a:p>
+            <a:pPr algn="l" indent="0" marL="0">
+              <a:buNone/>
+            </a:pPr>
+            <a:r>
+              <a:rPr lang="en-US" sz="1050" b="1" spc="300" kern="0" dirty="0">
+                <a:solidFill>
+                  <a:srgbClr val="3FB6E8"/>
+                </a:solidFill>
+                <a:latin typeface="Calibri" pitchFamily="34" charset="0"/>
+                <a:ea typeface="Calibri" pitchFamily="34" charset="-122"/>
+                <a:cs typeface="Calibri" pitchFamily="34" charset="-120"/>
+              </a:rPr>
+              <a:t>RIZIKO</a:t>
+            </a:r>
+            <a:endParaRPr lang="en-US" sz="1050" dirty="0"/>
+          </a:p>
+        </p:txBody>
+      </p:sp>
+      <p:sp>
+        <p:nvSpPr>
+          <p:cNvPr id="4" name="Text 2"/>
+          <p:cNvSpPr txBox="1"/>
+          <p:nvPr/>
+        </p:nvSpPr>
+        <p:spPr>
+          <a:xfrm>
+            <a:off x="566928" y="1207008"/>
+            <a:ext cx="11064240" cy="685800"/>
+          </a:xfrm>
+          <a:prstGeom prst="rect">
+            <a:avLst/>
+          </a:prstGeom>
+          <a:noFill/>
+          <a:ln/>
+        </p:spPr>
+        <p:txBody>
+          <a:bodyPr wrap="square" lIns="0" tIns="0" rIns="0" bIns="0" rtlCol="0" anchor="ctr"/>
+          <a:lstStyle/>
+          <a:p>
+            <a:pPr algn="l" indent="0" marL="0">
+              <a:buNone/>
+            </a:pPr>
+            <a:r>
+              <a:rPr lang="en-US" sz="2800" b="1" dirty="0">
+                <a:solidFill>
+                  <a:srgbClr val="F2F6F8"/>
+                </a:solidFill>
+                <a:latin typeface="Cambria" pitchFamily="34" charset="0"/>
+                <a:ea typeface="Cambria" pitchFamily="34" charset="-122"/>
+                <a:cs typeface="Cambria" pitchFamily="34" charset="-120"/>
+              </a:rPr>
+              <a:t>Riziková expozícia je zámerne veľmi nízka</a:t>
+            </a:r>
+            <a:endParaRPr lang="en-US" sz="2800" dirty="0"/>
+          </a:p>
+        </p:txBody>
+      </p:sp>
+      <p:sp>
+        <p:nvSpPr>
+          <p:cNvPr id="5" name="Shape 3"/>
+          <p:cNvSpPr/>
+          <p:nvPr/>
+        </p:nvSpPr>
+        <p:spPr>
+          <a:xfrm>
+            <a:off x="566928" y="2011680"/>
+            <a:ext cx="5440680" cy="3063240"/>
+          </a:xfrm>
+          <a:prstGeom prst="roundRect">
+            <a:avLst>
+              <a:gd name="adj" fmla="val 2090"/>
+            </a:avLst>
+          </a:prstGeom>
+          <a:solidFill>
+            <a:srgbClr val="111C26"/>
+          </a:solidFill>
+          <a:ln w="12700">
+            <a:solidFill>
+              <a:srgbClr val="263A4C"/>
+            </a:solidFill>
+            <a:prstDash val="solid"/>
+          </a:ln>
+        </p:spPr>
+      </p:sp>
+      <p:sp>
+        <p:nvSpPr>
+          <p:cNvPr id="6" name="Text 4"/>
+          <p:cNvSpPr txBox="1"/>
+          <p:nvPr/>
+        </p:nvSpPr>
+        <p:spPr>
+          <a:xfrm>
+            <a:off x="896112" y="2286000"/>
+            <a:ext cx="4754880" cy="256032"/>
+          </a:xfrm>
+          <a:prstGeom prst="rect">
+            <a:avLst/>
+          </a:prstGeom>
+          <a:noFill/>
+          <a:ln/>
+        </p:spPr>
+        <p:txBody>
+          <a:bodyPr wrap="square" lIns="0" tIns="0" rIns="0" bIns="0" rtlCol="0" anchor="ctr"/>
+          <a:lstStyle/>
+          <a:p>
+            <a:pPr algn="l" indent="0" marL="0">
+              <a:buNone/>
+            </a:pPr>
+            <a:r>
+              <a:rPr lang="en-US" sz="950" b="1" spc="250" kern="0" dirty="0">
+                <a:solidFill>
+                  <a:srgbClr val="3FB6E8"/>
+                </a:solidFill>
+                <a:latin typeface="Calibri" pitchFamily="34" charset="0"/>
+                <a:ea typeface="Calibri" pitchFamily="34" charset="-122"/>
+                <a:cs typeface="Calibri" pitchFamily="34" charset="-120"/>
+              </a:rPr>
+              <a:t>INVESTIČNÁ BÁZA — DRŽANÁ DOLE</a:t>
+            </a:r>
+            <a:endParaRPr lang="en-US" sz="950" dirty="0"/>
+          </a:p>
+        </p:txBody>
+      </p:sp>
+      <p:sp>
+        <p:nvSpPr>
+          <p:cNvPr id="7" name="Text 5"/>
+          <p:cNvSpPr txBox="1"/>
+          <p:nvPr/>
+        </p:nvSpPr>
+        <p:spPr>
+          <a:xfrm>
+            <a:off x="896112" y="2697480"/>
+            <a:ext cx="4800600" cy="2011680"/>
+          </a:xfrm>
+          <a:prstGeom prst="rect">
+            <a:avLst/>
+          </a:prstGeom>
+          <a:noFill/>
+          <a:ln/>
+        </p:spPr>
+        <p:txBody>
+          <a:bodyPr wrap="square" lIns="0" tIns="0" rIns="0" bIns="0" rtlCol="0" anchor="ctr"/>
+          <a:lstStyle/>
+          <a:p>
+            <a:pPr marL="342900" indent="-342900">
+              <a:spcAft>
+                <a:spcPts val="700"/>
+              </a:spcAft>
+              <a:buSzPct val="100000"/>
+              <a:buChar char="–"/>
+            </a:pPr>
+            <a:r>
+              <a:rPr lang="en-US" sz="1250" b="1" dirty="0">
+                <a:solidFill>
+                  <a:srgbClr val="F2F6F8"/>
+                </a:solidFill>
+                <a:latin typeface="Calibri" pitchFamily="34" charset="0"/>
+                <a:ea typeface="Calibri" pitchFamily="34" charset="-122"/>
+                <a:cs typeface="Calibri" pitchFamily="34" charset="-120"/>
+              </a:rPr>
+              <a:t>ja — part-time</a:t>
+            </a:r>
+            <a:endParaRPr lang="en-US" sz="1250" dirty="0"/>
+          </a:p>
+          <a:p>
+            <a:pPr marL="342900" indent="-342900">
+              <a:spcAft>
+                <a:spcPts val="700"/>
+              </a:spcAft>
+              <a:buSzPct val="100000"/>
+              <a:buChar char="–"/>
+            </a:pPr>
+            <a:r>
+              <a:rPr lang="en-US" sz="1250" b="1" dirty="0">
+                <a:solidFill>
+                  <a:srgbClr val="F2F6F8"/>
+                </a:solidFill>
+                <a:latin typeface="Calibri" pitchFamily="34" charset="0"/>
+                <a:ea typeface="Calibri" pitchFamily="34" charset="-122"/>
+                <a:cs typeface="Calibri" pitchFamily="34" charset="-120"/>
+              </a:rPr>
+              <a:t>softvér, ktorý (zatiaľ) platím ja</a:t>
+            </a:r>
+            <a:endParaRPr lang="en-US" sz="1250" dirty="0"/>
+          </a:p>
+          <a:p>
+            <a:pPr marL="342900" indent="-342900">
+              <a:spcAft>
+                <a:spcPts val="700"/>
+              </a:spcAft>
+              <a:buSzPct val="100000"/>
+              <a:buChar char="–"/>
+            </a:pPr>
+            <a:r>
+              <a:rPr lang="en-US" sz="1250" b="1" dirty="0">
+                <a:solidFill>
+                  <a:srgbClr val="F2F6F8"/>
+                </a:solidFill>
+                <a:latin typeface="Calibri" pitchFamily="34" charset="0"/>
+                <a:ea typeface="Calibri" pitchFamily="34" charset="-122"/>
+                <a:cs typeface="Calibri" pitchFamily="34" charset="-120"/>
+              </a:rPr>
+              <a:t>infra rádovo desiatky €/mes.</a:t>
+            </a:r>
+            <a:endParaRPr lang="en-US" sz="1250" dirty="0"/>
+          </a:p>
+          <a:p>
+            <a:pPr marL="342900" indent="-342900">
+              <a:spcAft>
+                <a:spcPts val="700"/>
+              </a:spcAft>
+              <a:buSzPct val="100000"/>
+              <a:buChar char="–"/>
+            </a:pPr>
+            <a:r>
+              <a:rPr lang="en-US" sz="1250" dirty="0">
+                <a:solidFill>
+                  <a:srgbClr val="F2F6F8"/>
+                </a:solidFill>
+                <a:latin typeface="Calibri" pitchFamily="34" charset="0"/>
+                <a:ea typeface="Calibri" pitchFamily="34" charset="-122"/>
+                <a:cs typeface="Calibri" pitchFamily="34" charset="-120"/>
+              </a:rPr>
+              <a:t>prípadne part-time vývojár — ak sa k tomu dopracujeme a bude to dávať zmysel (najskôr Peritora a Splato)</a:t>
+            </a:r>
+            <a:endParaRPr lang="en-US" sz="1250" dirty="0"/>
+          </a:p>
+        </p:txBody>
+      </p:sp>
+      <p:sp>
+        <p:nvSpPr>
+          <p:cNvPr id="8" name="Shape 6"/>
+          <p:cNvSpPr/>
+          <p:nvPr/>
+        </p:nvSpPr>
+        <p:spPr>
+          <a:xfrm>
+            <a:off x="6190488" y="2011680"/>
+            <a:ext cx="5440680" cy="3063240"/>
+          </a:xfrm>
+          <a:prstGeom prst="roundRect">
+            <a:avLst>
+              <a:gd name="adj" fmla="val 2090"/>
+            </a:avLst>
+          </a:prstGeom>
+          <a:solidFill>
+            <a:srgbClr val="111C26"/>
+          </a:solidFill>
+          <a:ln w="12700">
+            <a:solidFill>
+              <a:srgbClr val="263A4C"/>
+            </a:solidFill>
+            <a:prstDash val="solid"/>
+          </a:ln>
+        </p:spPr>
+      </p:sp>
+      <p:sp>
+        <p:nvSpPr>
+          <p:cNvPr id="9" name="Text 7"/>
+          <p:cNvSpPr txBox="1"/>
+          <p:nvPr/>
+        </p:nvSpPr>
+        <p:spPr>
+          <a:xfrm>
+            <a:off x="6519672" y="2286000"/>
+            <a:ext cx="4754880" cy="256032"/>
+          </a:xfrm>
+          <a:prstGeom prst="rect">
+            <a:avLst/>
+          </a:prstGeom>
+          <a:noFill/>
+          <a:ln/>
+        </p:spPr>
+        <p:txBody>
+          <a:bodyPr wrap="square" lIns="0" tIns="0" rIns="0" bIns="0" rtlCol="0" anchor="ctr"/>
+          <a:lstStyle/>
+          <a:p>
+            <a:pPr algn="l" indent="0" marL="0">
+              <a:buNone/>
+            </a:pPr>
+            <a:r>
+              <a:rPr lang="en-US" sz="950" b="1" spc="250" kern="0" dirty="0">
+                <a:solidFill>
+                  <a:srgbClr val="F2B33D"/>
+                </a:solidFill>
+                <a:latin typeface="Calibri" pitchFamily="34" charset="0"/>
+                <a:ea typeface="Calibri" pitchFamily="34" charset="-122"/>
+                <a:cs typeface="Calibri" pitchFamily="34" charset="-120"/>
+              </a:rPr>
+              <a:t>NAJHORŠÍ SCENÁR PRI JEDNOM PILOTE</a:t>
+            </a:r>
+            <a:endParaRPr lang="en-US" sz="950" dirty="0"/>
+          </a:p>
+        </p:txBody>
+      </p:sp>
+      <p:sp>
+        <p:nvSpPr>
+          <p:cNvPr id="10" name="Text 8"/>
+          <p:cNvSpPr txBox="1"/>
+          <p:nvPr/>
+        </p:nvSpPr>
+        <p:spPr>
+          <a:xfrm>
+            <a:off x="6519672" y="2697480"/>
+            <a:ext cx="4800600" cy="502920"/>
+          </a:xfrm>
+          <a:prstGeom prst="rect">
+            <a:avLst/>
+          </a:prstGeom>
+          <a:noFill/>
+          <a:ln/>
+        </p:spPr>
+        <p:txBody>
+          <a:bodyPr wrap="square" lIns="0" tIns="0" rIns="0" bIns="0" rtlCol="0" anchor="ctr"/>
+          <a:lstStyle/>
+          <a:p>
+            <a:pPr indent="0" marL="0">
+              <a:buNone/>
+            </a:pPr>
+            <a:r>
+              <a:rPr lang="en-US" sz="2000" b="1" dirty="0">
+                <a:solidFill>
+                  <a:srgbClr val="F2F6F8"/>
+                </a:solidFill>
+                <a:latin typeface="Cambria" pitchFamily="34" charset="0"/>
+                <a:ea typeface="Cambria" pitchFamily="34" charset="-122"/>
+                <a:cs typeface="Cambria" pitchFamily="34" charset="-120"/>
+              </a:rPr>
+              <a:t>~4 týždne práce</a:t>
+            </a:r>
+            <a:pPr indent="0" marL="0">
+              <a:buNone/>
+            </a:pPr>
+            <a:r>
+              <a:rPr lang="en-US" sz="1300" dirty="0">
+                <a:solidFill>
+                  <a:srgbClr val="8DA2B2"/>
+                </a:solidFill>
+                <a:latin typeface="Calibri" pitchFamily="34" charset="0"/>
+                <a:ea typeface="Calibri" pitchFamily="34" charset="-122"/>
+                <a:cs typeface="Calibri" pitchFamily="34" charset="-120"/>
+              </a:rPr>
+              <a:t>  a poznatok, že to nefunguje.</a:t>
+            </a:r>
+            <a:endParaRPr lang="en-US" sz="2000" dirty="0"/>
+          </a:p>
+        </p:txBody>
+      </p:sp>
+      <p:sp>
+        <p:nvSpPr>
+          <p:cNvPr id="11" name="Text 9"/>
+          <p:cNvSpPr txBox="1"/>
+          <p:nvPr/>
+        </p:nvSpPr>
+        <p:spPr>
+          <a:xfrm>
+            <a:off x="6519672" y="3291840"/>
+            <a:ext cx="4800600" cy="1463040"/>
+          </a:xfrm>
+          <a:prstGeom prst="rect">
+            <a:avLst/>
+          </a:prstGeom>
+          <a:noFill/>
+          <a:ln/>
+        </p:spPr>
+        <p:txBody>
+          <a:bodyPr wrap="square" lIns="0" tIns="0" rIns="0" bIns="0" rtlCol="0" anchor="ctr"/>
+          <a:lstStyle/>
+          <a:p>
+            <a:pPr indent="0" marL="0">
+              <a:lnSpc>
+                <a:spcPct val="115000"/>
+              </a:lnSpc>
+              <a:buNone/>
+            </a:pPr>
+            <a:r>
+              <a:rPr lang="en-US" sz="1250" dirty="0">
+                <a:solidFill>
+                  <a:srgbClr val="8DA2B2"/>
+                </a:solidFill>
+                <a:latin typeface="Calibri" pitchFamily="34" charset="0"/>
+                <a:ea typeface="Calibri" pitchFamily="34" charset="-122"/>
+                <a:cs typeface="Calibri" pitchFamily="34" charset="-120"/>
+              </a:rPr>
+              <a:t>Presne to sa teraz stalo s AI MoneyMastermind — a je to v poriadku, na to gate slúži.</a:t>
+            </a:r>
+            <a:endParaRPr lang="en-US" sz="1250" dirty="0"/>
+          </a:p>
+          <a:p>
+            <a:pPr indent="0" marL="0">
+              <a:lnSpc>
+                <a:spcPct val="115000"/>
+              </a:lnSpc>
+              <a:buNone/>
+            </a:pPr>
+            <a:endParaRPr lang="en-US" sz="1250" dirty="0"/>
+          </a:p>
+          <a:p>
+            <a:pPr indent="0" marL="0">
+              <a:lnSpc>
+                <a:spcPct val="115000"/>
+              </a:lnSpc>
+              <a:buNone/>
+            </a:pPr>
+            <a:r>
+              <a:rPr lang="en-US" sz="1250" b="1" dirty="0">
+                <a:solidFill>
+                  <a:srgbClr val="F2F6F8"/>
+                </a:solidFill>
+                <a:latin typeface="Calibri" pitchFamily="34" charset="0"/>
+                <a:ea typeface="Calibri" pitchFamily="34" charset="-122"/>
+                <a:cs typeface="Calibri" pitchFamily="34" charset="-120"/>
+              </a:rPr>
+              <a:t>Žiadny rozpočet. Žiadny tím. Žiadny záväzok.</a:t>
+            </a:r>
+            <a:endParaRPr lang="en-US" sz="1250" dirty="0"/>
+          </a:p>
+        </p:txBody>
+      </p:sp>
+      <p:sp>
+        <p:nvSpPr>
+          <p:cNvPr id="12" name="Text 10"/>
+          <p:cNvSpPr txBox="1"/>
+          <p:nvPr/>
+        </p:nvSpPr>
+        <p:spPr>
+          <a:xfrm>
+            <a:off x="566928" y="5440680"/>
+            <a:ext cx="11064240" cy="1005840"/>
+          </a:xfrm>
+          <a:prstGeom prst="rect">
+            <a:avLst/>
+          </a:prstGeom>
+          <a:noFill/>
+          <a:ln/>
+        </p:spPr>
+        <p:txBody>
+          <a:bodyPr wrap="square" lIns="0" tIns="0" rIns="0" bIns="0" rtlCol="0" anchor="ctr"/>
+          <a:lstStyle/>
+          <a:p>
+            <a:pPr algn="ctr" indent="0" marL="0">
+              <a:lnSpc>
+                <a:spcPct val="125000"/>
+              </a:lnSpc>
+              <a:buNone/>
+            </a:pPr>
+            <a:r>
+              <a:rPr lang="en-US" sz="1400" dirty="0">
+                <a:solidFill>
+                  <a:srgbClr val="8DA2B2"/>
+                </a:solidFill>
+                <a:latin typeface="Calibri" pitchFamily="34" charset="0"/>
+                <a:ea typeface="Calibri" pitchFamily="34" charset="-122"/>
+                <a:cs typeface="Calibri" pitchFamily="34" charset="-120"/>
+              </a:rPr>
+              <a:t>Low-cost, high-upside: riziko na strane firmy je nulové, upside je celý náš.
+</a:t>
+            </a:r>
+            <a:pPr algn="ctr" indent="0" marL="0">
+              <a:lnSpc>
+                <a:spcPct val="125000"/>
+              </a:lnSpc>
+              <a:buNone/>
+            </a:pPr>
+            <a:r>
+              <a:rPr lang="en-US" sz="1900" b="1" dirty="0">
+                <a:solidFill>
+                  <a:srgbClr val="F2F6F8"/>
+                </a:solidFill>
+                <a:latin typeface="Cambria" pitchFamily="34" charset="0"/>
+                <a:ea typeface="Cambria" pitchFamily="34" charset="-122"/>
+                <a:cs typeface="Cambria" pitchFamily="34" charset="-120"/>
+              </a:rPr>
+              <a:t>Nerozhodujeme o investícii — rozhodujeme o tom, či dáme priestor pokusu.</a:t>
+            </a:r>
+            <a:endParaRPr lang="en-US" sz="1400" dirty="0"/>
+          </a:p>
+        </p:txBody>
+      </p:sp>
+    </p:spTree>
+  </p:cSld>
+  <p:clrMapOvr>
+    <a:masterClrMapping/>
+  </p:clrMapOvr>
+</p:sld>
+</file>
+
+<file path=ppt/slides/slide12.xml><?xml version="1.0" encoding="utf-8"?>
+<p:sld xmlns:a="http://schemas.openxmlformats.org/drawingml/2006/main" xmlns:r="http://schemas.openxmlformats.org/officeDocument/2006/relationships" xmlns:p="http://schemas.openxmlformats.org/presentationml/2006/main">
+  <p:cSld name="Slide 12">
+    <p:bg>
+      <p:bgPr>
+        <a:solidFill>
+          <a:srgbClr val="0B0F14"/>
+        </a:solidFill>
+      </p:bgPr>
+    </p:bg>
+    <p:spTree>
+      <p:nvGrpSpPr>
+        <p:cNvPr id="1" name=""/>
+        <p:cNvGrpSpPr/>
+        <p:nvPr/>
+      </p:nvGrpSpPr>
+      <p:grpSpPr>
+        <a:xfrm>
+          <a:off x="0" y="0"/>
+          <a:ext cx="0" cy="0"/>
+          <a:chOff x="0" y="0"/>
+          <a:chExt cx="0" cy="0"/>
+        </a:xfrm>
+      </p:grpSpPr>
+      <p:sp>
+        <p:nvSpPr>
+          <p:cNvPr id="2" name="Text 0"/>
+          <p:cNvSpPr txBox="1"/>
+          <p:nvPr/>
+        </p:nvSpPr>
+        <p:spPr>
+          <a:xfrm>
+            <a:off x="566928" y="292608"/>
+            <a:ext cx="2743200" cy="365760"/>
+          </a:xfrm>
+          <a:prstGeom prst="rect">
+            <a:avLst/>
+          </a:prstGeom>
+          <a:noFill/>
+          <a:ln/>
+        </p:spPr>
+        <p:txBody>
+          <a:bodyPr wrap="square" lIns="0" tIns="0" rIns="0" bIns="0" rtlCol="0" anchor="ctr"/>
+          <a:lstStyle/>
+          <a:p>
+            <a:pPr algn="l" indent="0" marL="0">
+              <a:buNone/>
+            </a:pPr>
+            <a:r>
+              <a:rPr lang="en-US" sz="1300" b="1" dirty="0">
+                <a:solidFill>
+                  <a:srgbClr val="F2F6F8"/>
+                </a:solidFill>
+                <a:latin typeface="Calibri" pitchFamily="34" charset="0"/>
+                <a:ea typeface="Calibri" pitchFamily="34" charset="-122"/>
+                <a:cs typeface="Calibri" pitchFamily="34" charset="-120"/>
+              </a:rPr>
+              <a:t>Monetize</a:t>
+            </a:r>
+            <a:pPr algn="l" indent="0" marL="0">
+              <a:buNone/>
+            </a:pPr>
+            <a:r>
+              <a:rPr lang="en-US" sz="1300" b="1" dirty="0">
+                <a:solidFill>
+                  <a:srgbClr val="3FB6E8"/>
+                </a:solidFill>
+                <a:latin typeface="Calibri" pitchFamily="34" charset="0"/>
+                <a:ea typeface="Calibri" pitchFamily="34" charset="-122"/>
+                <a:cs typeface="Calibri" pitchFamily="34" charset="-120"/>
+              </a:rPr>
+              <a:t>.CX</a:t>
+            </a:r>
+            <a:endParaRPr lang="en-US" sz="1300" dirty="0"/>
+          </a:p>
+        </p:txBody>
+      </p:sp>
+      <p:sp>
+        <p:nvSpPr>
+          <p:cNvPr id="3" name="Text 1"/>
+          <p:cNvSpPr txBox="1"/>
+          <p:nvPr/>
+        </p:nvSpPr>
+        <p:spPr>
+          <a:xfrm>
+            <a:off x="585216" y="868680"/>
+            <a:ext cx="10972800" cy="292608"/>
+          </a:xfrm>
+          <a:prstGeom prst="rect">
+            <a:avLst/>
+          </a:prstGeom>
+          <a:noFill/>
+          <a:ln/>
+        </p:spPr>
+        <p:txBody>
+          <a:bodyPr wrap="square" lIns="0" tIns="0" rIns="0" bIns="0" rtlCol="0" anchor="ctr"/>
+          <a:lstStyle/>
+          <a:p>
+            <a:pPr algn="l" indent="0" marL="0">
+              <a:buNone/>
+            </a:pPr>
+            <a:r>
+              <a:rPr lang="en-US" sz="1050" b="1" spc="300" kern="0" dirty="0">
+                <a:solidFill>
+                  <a:srgbClr val="3FB6E8"/>
+                </a:solidFill>
+                <a:latin typeface="Calibri" pitchFamily="34" charset="0"/>
+                <a:ea typeface="Calibri" pitchFamily="34" charset="-122"/>
+                <a:cs typeface="Calibri" pitchFamily="34" charset="-120"/>
+              </a:rPr>
+              <a:t>SPÔSOB PRÁCE</a:t>
+            </a:r>
+            <a:endParaRPr lang="en-US" sz="1050" dirty="0"/>
+          </a:p>
+        </p:txBody>
+      </p:sp>
+      <p:sp>
+        <p:nvSpPr>
+          <p:cNvPr id="4" name="Text 2"/>
+          <p:cNvSpPr txBox="1"/>
+          <p:nvPr/>
+        </p:nvSpPr>
+        <p:spPr>
+          <a:xfrm>
+            <a:off x="566928" y="1207008"/>
+            <a:ext cx="11064240" cy="685800"/>
+          </a:xfrm>
+          <a:prstGeom prst="rect">
+            <a:avLst/>
+          </a:prstGeom>
+          <a:noFill/>
+          <a:ln/>
+        </p:spPr>
+        <p:txBody>
+          <a:bodyPr wrap="square" lIns="0" tIns="0" rIns="0" bIns="0" rtlCol="0" anchor="ctr"/>
+          <a:lstStyle/>
+          <a:p>
+            <a:pPr algn="l" indent="0" marL="0">
+              <a:buNone/>
+            </a:pPr>
+            <a:r>
+              <a:rPr lang="en-US" sz="2800" b="1" dirty="0">
+                <a:solidFill>
+                  <a:srgbClr val="F2F6F8"/>
+                </a:solidFill>
+                <a:latin typeface="Cambria" pitchFamily="34" charset="0"/>
+                <a:ea typeface="Cambria" pitchFamily="34" charset="-122"/>
+                <a:cs typeface="Cambria" pitchFamily="34" charset="-120"/>
+              </a:rPr>
+              <a:t>Skúšať — iterovať — škálovať — zahodiť</a:t>
+            </a:r>
+            <a:endParaRPr lang="en-US" sz="2800" dirty="0"/>
+          </a:p>
+        </p:txBody>
+      </p:sp>
+      <p:sp>
+        <p:nvSpPr>
+          <p:cNvPr id="5" name="Shape 3"/>
+          <p:cNvSpPr/>
+          <p:nvPr/>
+        </p:nvSpPr>
+        <p:spPr>
+          <a:xfrm>
+            <a:off x="566928" y="2103120"/>
+            <a:ext cx="2624328" cy="1920240"/>
+          </a:xfrm>
+          <a:prstGeom prst="roundRect">
+            <a:avLst>
+              <a:gd name="adj" fmla="val 3333"/>
+            </a:avLst>
+          </a:prstGeom>
+          <a:solidFill>
+            <a:srgbClr val="111C26"/>
+          </a:solidFill>
+          <a:ln w="12700">
+            <a:solidFill>
+              <a:srgbClr val="263A4C"/>
+            </a:solidFill>
+            <a:prstDash val="solid"/>
+          </a:ln>
+        </p:spPr>
+      </p:sp>
+      <p:sp>
+        <p:nvSpPr>
+          <p:cNvPr id="6" name="Text 4"/>
+          <p:cNvSpPr txBox="1"/>
+          <p:nvPr/>
+        </p:nvSpPr>
+        <p:spPr>
+          <a:xfrm>
+            <a:off x="795528" y="2286000"/>
+            <a:ext cx="548640" cy="365760"/>
+          </a:xfrm>
+          <a:prstGeom prst="rect">
+            <a:avLst/>
+          </a:prstGeom>
+          <a:noFill/>
+          <a:ln/>
+        </p:spPr>
+        <p:txBody>
+          <a:bodyPr wrap="square" lIns="0" tIns="0" rIns="0" bIns="0" rtlCol="0" anchor="ctr"/>
+          <a:lstStyle/>
+          <a:p>
+            <a:pPr indent="0" marL="0">
+              <a:buNone/>
+            </a:pPr>
+            <a:r>
+              <a:rPr lang="en-US" sz="1700" b="1" dirty="0">
+                <a:solidFill>
+                  <a:srgbClr val="5C7183"/>
+                </a:solidFill>
+                <a:latin typeface="Cambria" pitchFamily="34" charset="0"/>
+                <a:ea typeface="Cambria" pitchFamily="34" charset="-122"/>
+                <a:cs typeface="Cambria" pitchFamily="34" charset="-120"/>
+              </a:rPr>
+              <a:t>1</a:t>
+            </a:r>
+            <a:endParaRPr lang="en-US" sz="1700" dirty="0"/>
+          </a:p>
+        </p:txBody>
+      </p:sp>
+      <p:sp>
+        <p:nvSpPr>
+          <p:cNvPr id="7" name="Text 5"/>
+          <p:cNvSpPr txBox="1"/>
+          <p:nvPr/>
+        </p:nvSpPr>
+        <p:spPr>
+          <a:xfrm>
+            <a:off x="795528" y="2651760"/>
+            <a:ext cx="2194560" cy="320040"/>
+          </a:xfrm>
+          <a:prstGeom prst="rect">
+            <a:avLst/>
+          </a:prstGeom>
+          <a:noFill/>
+          <a:ln/>
+        </p:spPr>
+        <p:txBody>
+          <a:bodyPr wrap="square" lIns="0" tIns="0" rIns="0" bIns="0" rtlCol="0" anchor="ctr"/>
+          <a:lstStyle/>
+          <a:p>
+            <a:pPr indent="0" marL="0">
+              <a:buNone/>
+            </a:pPr>
+            <a:r>
+              <a:rPr lang="en-US" sz="1350" b="1" spc="200" kern="0" dirty="0">
+                <a:solidFill>
+                  <a:srgbClr val="3FB6E8"/>
+                </a:solidFill>
+                <a:latin typeface="Calibri" pitchFamily="34" charset="0"/>
+                <a:ea typeface="Calibri" pitchFamily="34" charset="-122"/>
+                <a:cs typeface="Calibri" pitchFamily="34" charset="-120"/>
+              </a:rPr>
+              <a:t>SKÚŠAŤ</a:t>
+            </a:r>
+            <a:endParaRPr lang="en-US" sz="1350" dirty="0"/>
+          </a:p>
+        </p:txBody>
+      </p:sp>
+      <p:sp>
+        <p:nvSpPr>
+          <p:cNvPr id="8" name="Text 6"/>
+          <p:cNvSpPr txBox="1"/>
+          <p:nvPr/>
+        </p:nvSpPr>
+        <p:spPr>
+          <a:xfrm>
+            <a:off x="795528" y="3017520"/>
+            <a:ext cx="2194560" cy="914400"/>
+          </a:xfrm>
+          <a:prstGeom prst="rect">
+            <a:avLst/>
+          </a:prstGeom>
+          <a:noFill/>
+          <a:ln/>
+        </p:spPr>
+        <p:txBody>
+          <a:bodyPr wrap="square" lIns="0" tIns="0" rIns="0" bIns="0" rtlCol="0" anchor="ctr"/>
+          <a:lstStyle/>
+          <a:p>
+            <a:pPr indent="0" marL="0">
+              <a:lnSpc>
+                <a:spcPct val="110000"/>
+              </a:lnSpc>
+              <a:buNone/>
+            </a:pPr>
+            <a:r>
+              <a:rPr lang="en-US" sz="1050" dirty="0">
+                <a:solidFill>
+                  <a:srgbClr val="8DA2B2"/>
+                </a:solidFill>
+                <a:latin typeface="Calibri" pitchFamily="34" charset="0"/>
+                <a:ea typeface="Calibri" pitchFamily="34" charset="-122"/>
+                <a:cs typeface="Calibri" pitchFamily="34" charset="-120"/>
+              </a:rPr>
+              <a:t>pilot za týždne, nie mesiace — s vopred dohodnutou metrikou</a:t>
+            </a:r>
+            <a:endParaRPr lang="en-US" sz="1050" dirty="0"/>
+          </a:p>
+        </p:txBody>
+      </p:sp>
+      <p:sp>
+        <p:nvSpPr>
+          <p:cNvPr id="9" name="Shape 7"/>
+          <p:cNvSpPr/>
+          <p:nvPr/>
+        </p:nvSpPr>
+        <p:spPr>
+          <a:xfrm>
+            <a:off x="3378708" y="2103120"/>
+            <a:ext cx="2624328" cy="1920240"/>
+          </a:xfrm>
+          <a:prstGeom prst="roundRect">
+            <a:avLst>
+              <a:gd name="adj" fmla="val 3333"/>
+            </a:avLst>
+          </a:prstGeom>
+          <a:solidFill>
+            <a:srgbClr val="111C26"/>
+          </a:solidFill>
+          <a:ln w="12700">
+            <a:solidFill>
+              <a:srgbClr val="263A4C"/>
+            </a:solidFill>
+            <a:prstDash val="solid"/>
+          </a:ln>
+        </p:spPr>
+      </p:sp>
+      <p:sp>
+        <p:nvSpPr>
+          <p:cNvPr id="10" name="Text 8"/>
+          <p:cNvSpPr txBox="1"/>
+          <p:nvPr/>
+        </p:nvSpPr>
+        <p:spPr>
+          <a:xfrm>
+            <a:off x="3607308" y="2286000"/>
+            <a:ext cx="548640" cy="365760"/>
+          </a:xfrm>
+          <a:prstGeom prst="rect">
+            <a:avLst/>
+          </a:prstGeom>
+          <a:noFill/>
+          <a:ln/>
+        </p:spPr>
+        <p:txBody>
+          <a:bodyPr wrap="square" lIns="0" tIns="0" rIns="0" bIns="0" rtlCol="0" anchor="ctr"/>
+          <a:lstStyle/>
+          <a:p>
+            <a:pPr indent="0" marL="0">
+              <a:buNone/>
+            </a:pPr>
+            <a:r>
+              <a:rPr lang="en-US" sz="1700" b="1" dirty="0">
+                <a:solidFill>
+                  <a:srgbClr val="5C7183"/>
+                </a:solidFill>
+                <a:latin typeface="Cambria" pitchFamily="34" charset="0"/>
+                <a:ea typeface="Cambria" pitchFamily="34" charset="-122"/>
+                <a:cs typeface="Cambria" pitchFamily="34" charset="-120"/>
+              </a:rPr>
+              <a:t>2</a:t>
+            </a:r>
+            <a:endParaRPr lang="en-US" sz="1700" dirty="0"/>
+          </a:p>
+        </p:txBody>
+      </p:sp>
+      <p:sp>
+        <p:nvSpPr>
+          <p:cNvPr id="11" name="Text 9"/>
+          <p:cNvSpPr txBox="1"/>
+          <p:nvPr/>
+        </p:nvSpPr>
+        <p:spPr>
+          <a:xfrm>
+            <a:off x="3607308" y="2651760"/>
+            <a:ext cx="2194560" cy="320040"/>
+          </a:xfrm>
+          <a:prstGeom prst="rect">
+            <a:avLst/>
+          </a:prstGeom>
+          <a:noFill/>
+          <a:ln/>
+        </p:spPr>
+        <p:txBody>
+          <a:bodyPr wrap="square" lIns="0" tIns="0" rIns="0" bIns="0" rtlCol="0" anchor="ctr"/>
+          <a:lstStyle/>
+          <a:p>
+            <a:pPr indent="0" marL="0">
+              <a:buNone/>
+            </a:pPr>
+            <a:r>
+              <a:rPr lang="en-US" sz="1350" b="1" spc="200" kern="0" dirty="0">
+                <a:solidFill>
+                  <a:srgbClr val="3FB6E8"/>
+                </a:solidFill>
+                <a:latin typeface="Calibri" pitchFamily="34" charset="0"/>
+                <a:ea typeface="Calibri" pitchFamily="34" charset="-122"/>
+                <a:cs typeface="Calibri" pitchFamily="34" charset="-120"/>
+              </a:rPr>
+              <a:t>ITEROVAŤ</a:t>
+            </a:r>
+            <a:endParaRPr lang="en-US" sz="1350" dirty="0"/>
+          </a:p>
+        </p:txBody>
+      </p:sp>
+      <p:sp>
+        <p:nvSpPr>
+          <p:cNvPr id="12" name="Text 10"/>
+          <p:cNvSpPr txBox="1"/>
+          <p:nvPr/>
+        </p:nvSpPr>
+        <p:spPr>
+          <a:xfrm>
+            <a:off x="3607308" y="3017520"/>
+            <a:ext cx="2194560" cy="914400"/>
+          </a:xfrm>
+          <a:prstGeom prst="rect">
+            <a:avLst/>
+          </a:prstGeom>
+          <a:noFill/>
+          <a:ln/>
+        </p:spPr>
+        <p:txBody>
+          <a:bodyPr wrap="square" lIns="0" tIns="0" rIns="0" bIns="0" rtlCol="0" anchor="ctr"/>
+          <a:lstStyle/>
+          <a:p>
+            <a:pPr indent="0" marL="0">
+              <a:lnSpc>
+                <a:spcPct val="110000"/>
+              </a:lnSpc>
+              <a:buNone/>
+            </a:pPr>
+            <a:r>
+              <a:rPr lang="en-US" sz="1050" dirty="0">
+                <a:solidFill>
+                  <a:srgbClr val="8DA2B2"/>
+                </a:solidFill>
+                <a:latin typeface="Calibri" pitchFamily="34" charset="0"/>
+                <a:ea typeface="Calibri" pitchFamily="34" charset="-122"/>
+                <a:cs typeface="Calibri" pitchFamily="34" charset="-120"/>
+              </a:rPr>
+              <a:t>ak metrika žije, ladíme produkt aj cenu na reálnych používateľoch</a:t>
+            </a:r>
+            <a:endParaRPr lang="en-US" sz="1050" dirty="0"/>
+          </a:p>
+        </p:txBody>
+      </p:sp>
+      <p:sp>
+        <p:nvSpPr>
+          <p:cNvPr id="13" name="Shape 11"/>
+          <p:cNvSpPr/>
+          <p:nvPr/>
+        </p:nvSpPr>
+        <p:spPr>
+          <a:xfrm>
+            <a:off x="6190488" y="2103120"/>
+            <a:ext cx="2624328" cy="1920240"/>
+          </a:xfrm>
+          <a:prstGeom prst="roundRect">
+            <a:avLst>
+              <a:gd name="adj" fmla="val 3333"/>
+            </a:avLst>
+          </a:prstGeom>
+          <a:solidFill>
+            <a:srgbClr val="111C26"/>
+          </a:solidFill>
+          <a:ln w="12700">
+            <a:solidFill>
+              <a:srgbClr val="263A4C"/>
+            </a:solidFill>
+            <a:prstDash val="solid"/>
+          </a:ln>
+        </p:spPr>
+      </p:sp>
+      <p:sp>
+        <p:nvSpPr>
+          <p:cNvPr id="14" name="Text 12"/>
+          <p:cNvSpPr txBox="1"/>
+          <p:nvPr/>
+        </p:nvSpPr>
+        <p:spPr>
+          <a:xfrm>
+            <a:off x="6419088" y="2286000"/>
+            <a:ext cx="548640" cy="365760"/>
+          </a:xfrm>
+          <a:prstGeom prst="rect">
+            <a:avLst/>
+          </a:prstGeom>
+          <a:noFill/>
+          <a:ln/>
+        </p:spPr>
+        <p:txBody>
+          <a:bodyPr wrap="square" lIns="0" tIns="0" rIns="0" bIns="0" rtlCol="0" anchor="ctr"/>
+          <a:lstStyle/>
+          <a:p>
+            <a:pPr indent="0" marL="0">
+              <a:buNone/>
+            </a:pPr>
+            <a:r>
+              <a:rPr lang="en-US" sz="1700" b="1" dirty="0">
+                <a:solidFill>
+                  <a:srgbClr val="5C7183"/>
+                </a:solidFill>
+                <a:latin typeface="Cambria" pitchFamily="34" charset="0"/>
+                <a:ea typeface="Cambria" pitchFamily="34" charset="-122"/>
+                <a:cs typeface="Cambria" pitchFamily="34" charset="-120"/>
+              </a:rPr>
+              <a:t>3</a:t>
+            </a:r>
+            <a:endParaRPr lang="en-US" sz="1700" dirty="0"/>
+          </a:p>
+        </p:txBody>
+      </p:sp>
+      <p:sp>
+        <p:nvSpPr>
+          <p:cNvPr id="15" name="Text 13"/>
+          <p:cNvSpPr txBox="1"/>
+          <p:nvPr/>
+        </p:nvSpPr>
+        <p:spPr>
+          <a:xfrm>
+            <a:off x="6419088" y="2651760"/>
+            <a:ext cx="2194560" cy="320040"/>
+          </a:xfrm>
+          <a:prstGeom prst="rect">
+            <a:avLst/>
+          </a:prstGeom>
+          <a:noFill/>
+          <a:ln/>
+        </p:spPr>
+        <p:txBody>
+          <a:bodyPr wrap="square" lIns="0" tIns="0" rIns="0" bIns="0" rtlCol="0" anchor="ctr"/>
+          <a:lstStyle/>
+          <a:p>
+            <a:pPr indent="0" marL="0">
+              <a:buNone/>
+            </a:pPr>
+            <a:r>
+              <a:rPr lang="en-US" sz="1350" b="1" spc="200" kern="0" dirty="0">
+                <a:solidFill>
+                  <a:srgbClr val="39D98A"/>
+                </a:solidFill>
+                <a:latin typeface="Calibri" pitchFamily="34" charset="0"/>
+                <a:ea typeface="Calibri" pitchFamily="34" charset="-122"/>
+                <a:cs typeface="Calibri" pitchFamily="34" charset="-120"/>
+              </a:rPr>
+              <a:t>ŠKÁLOVAŤ</a:t>
+            </a:r>
+            <a:endParaRPr lang="en-US" sz="1350" dirty="0"/>
+          </a:p>
+        </p:txBody>
+      </p:sp>
+      <p:sp>
+        <p:nvSpPr>
+          <p:cNvPr id="16" name="Text 14"/>
+          <p:cNvSpPr txBox="1"/>
+          <p:nvPr/>
+        </p:nvSpPr>
+        <p:spPr>
+          <a:xfrm>
+            <a:off x="6419088" y="3017520"/>
+            <a:ext cx="2194560" cy="914400"/>
+          </a:xfrm>
+          <a:prstGeom prst="rect">
+            <a:avLst/>
+          </a:prstGeom>
+          <a:noFill/>
+          <a:ln/>
+        </p:spPr>
+        <p:txBody>
+          <a:bodyPr wrap="square" lIns="0" tIns="0" rIns="0" bIns="0" rtlCol="0" anchor="ctr"/>
+          <a:lstStyle/>
+          <a:p>
+            <a:pPr indent="0" marL="0">
+              <a:lnSpc>
+                <a:spcPct val="110000"/>
+              </a:lnSpc>
+              <a:buNone/>
+            </a:pPr>
+            <a:r>
+              <a:rPr lang="en-US" sz="1050" dirty="0">
+                <a:solidFill>
+                  <a:srgbClr val="8DA2B2"/>
+                </a:solidFill>
+                <a:latin typeface="Calibri" pitchFamily="34" charset="0"/>
+                <a:ea typeface="Calibri" pitchFamily="34" charset="-122"/>
+                <a:cs typeface="Calibri" pitchFamily="34" charset="-120"/>
+              </a:rPr>
+              <a:t>čo funguje, dostane vývojára a distribúciu — CZ/HU cez sieť Forbes</a:t>
+            </a:r>
+            <a:endParaRPr lang="en-US" sz="1050" dirty="0"/>
+          </a:p>
+        </p:txBody>
+      </p:sp>
+      <p:sp>
+        <p:nvSpPr>
+          <p:cNvPr id="17" name="Shape 15"/>
+          <p:cNvSpPr/>
+          <p:nvPr/>
+        </p:nvSpPr>
+        <p:spPr>
+          <a:xfrm>
+            <a:off x="9002268" y="2103120"/>
+            <a:ext cx="2624328" cy="1920240"/>
+          </a:xfrm>
+          <a:prstGeom prst="roundRect">
+            <a:avLst>
+              <a:gd name="adj" fmla="val 3333"/>
+            </a:avLst>
+          </a:prstGeom>
+          <a:solidFill>
+            <a:srgbClr val="111C26"/>
+          </a:solidFill>
+          <a:ln w="12700">
+            <a:solidFill>
+              <a:srgbClr val="263A4C"/>
+            </a:solidFill>
+            <a:prstDash val="solid"/>
+          </a:ln>
+        </p:spPr>
+      </p:sp>
+      <p:sp>
+        <p:nvSpPr>
+          <p:cNvPr id="18" name="Text 16"/>
+          <p:cNvSpPr txBox="1"/>
+          <p:nvPr/>
+        </p:nvSpPr>
+        <p:spPr>
+          <a:xfrm>
+            <a:off x="9230868" y="2286000"/>
+            <a:ext cx="548640" cy="365760"/>
+          </a:xfrm>
+          <a:prstGeom prst="rect">
+            <a:avLst/>
+          </a:prstGeom>
+          <a:noFill/>
+          <a:ln/>
+        </p:spPr>
+        <p:txBody>
+          <a:bodyPr wrap="square" lIns="0" tIns="0" rIns="0" bIns="0" rtlCol="0" anchor="ctr"/>
+          <a:lstStyle/>
+          <a:p>
+            <a:pPr indent="0" marL="0">
+              <a:buNone/>
+            </a:pPr>
+            <a:r>
+              <a:rPr lang="en-US" sz="1700" b="1" dirty="0">
+                <a:solidFill>
+                  <a:srgbClr val="5C7183"/>
+                </a:solidFill>
+                <a:latin typeface="Cambria" pitchFamily="34" charset="0"/>
+                <a:ea typeface="Cambria" pitchFamily="34" charset="-122"/>
+                <a:cs typeface="Cambria" pitchFamily="34" charset="-120"/>
+              </a:rPr>
+              <a:t>4</a:t>
+            </a:r>
+            <a:endParaRPr lang="en-US" sz="1700" dirty="0"/>
+          </a:p>
+        </p:txBody>
+      </p:sp>
+      <p:sp>
+        <p:nvSpPr>
+          <p:cNvPr id="19" name="Text 17"/>
+          <p:cNvSpPr txBox="1"/>
+          <p:nvPr/>
+        </p:nvSpPr>
+        <p:spPr>
+          <a:xfrm>
+            <a:off x="9230868" y="2651760"/>
+            <a:ext cx="2194560" cy="320040"/>
+          </a:xfrm>
+          <a:prstGeom prst="rect">
+            <a:avLst/>
+          </a:prstGeom>
+          <a:noFill/>
+          <a:ln/>
+        </p:spPr>
+        <p:txBody>
+          <a:bodyPr wrap="square" lIns="0" tIns="0" rIns="0" bIns="0" rtlCol="0" anchor="ctr"/>
+          <a:lstStyle/>
+          <a:p>
+            <a:pPr indent="0" marL="0">
+              <a:buNone/>
+            </a:pPr>
+            <a:r>
+              <a:rPr lang="en-US" sz="1350" b="1" spc="200" kern="0" dirty="0">
+                <a:solidFill>
+                  <a:srgbClr val="F2B33D"/>
+                </a:solidFill>
+                <a:latin typeface="Calibri" pitchFamily="34" charset="0"/>
+                <a:ea typeface="Calibri" pitchFamily="34" charset="-122"/>
+                <a:cs typeface="Calibri" pitchFamily="34" charset="-120"/>
+              </a:rPr>
+              <a:t>ZAHODIŤ</a:t>
+            </a:r>
+            <a:endParaRPr lang="en-US" sz="1350" dirty="0"/>
+          </a:p>
+        </p:txBody>
+      </p:sp>
+      <p:sp>
+        <p:nvSpPr>
+          <p:cNvPr id="20" name="Text 18"/>
+          <p:cNvSpPr txBox="1"/>
+          <p:nvPr/>
+        </p:nvSpPr>
+        <p:spPr>
+          <a:xfrm>
+            <a:off x="9230868" y="3017520"/>
+            <a:ext cx="2194560" cy="914400"/>
+          </a:xfrm>
+          <a:prstGeom prst="rect">
+            <a:avLst/>
+          </a:prstGeom>
+          <a:noFill/>
+          <a:ln/>
+        </p:spPr>
+        <p:txBody>
+          <a:bodyPr wrap="square" lIns="0" tIns="0" rIns="0" bIns="0" rtlCol="0" anchor="ctr"/>
+          <a:lstStyle/>
+          <a:p>
+            <a:pPr indent="0" marL="0">
+              <a:lnSpc>
+                <a:spcPct val="110000"/>
+              </a:lnSpc>
+              <a:buNone/>
+            </a:pPr>
+            <a:r>
+              <a:rPr lang="en-US" sz="1050" dirty="0">
+                <a:solidFill>
+                  <a:srgbClr val="8DA2B2"/>
+                </a:solidFill>
+                <a:latin typeface="Calibri" pitchFamily="34" charset="0"/>
+                <a:ea typeface="Calibri" pitchFamily="34" charset="-122"/>
+                <a:cs typeface="Calibri" pitchFamily="34" charset="-120"/>
+              </a:rPr>
+              <a:t>ak metrika na pilote nesedí, projekt končí — bez sentimentu</a:t>
+            </a:r>
+            <a:endParaRPr lang="en-US" sz="1050" dirty="0"/>
+          </a:p>
+        </p:txBody>
+      </p:sp>
+      <p:sp>
+        <p:nvSpPr>
+          <p:cNvPr id="21" name="Text 19"/>
+          <p:cNvSpPr txBox="1"/>
+          <p:nvPr/>
+        </p:nvSpPr>
+        <p:spPr>
+          <a:xfrm>
+            <a:off x="566928" y="4343400"/>
+            <a:ext cx="11064240" cy="868680"/>
+          </a:xfrm>
+          <a:prstGeom prst="rect">
+            <a:avLst/>
+          </a:prstGeom>
+          <a:noFill/>
+          <a:ln/>
+        </p:spPr>
+        <p:txBody>
+          <a:bodyPr wrap="square" lIns="0" tIns="0" rIns="0" bIns="0" rtlCol="0" anchor="ctr"/>
+          <a:lstStyle/>
+          <a:p>
+            <a:pPr indent="0" marL="0">
+              <a:lnSpc>
+                <a:spcPct val="115000"/>
+              </a:lnSpc>
+              <a:buNone/>
+            </a:pPr>
+            <a:r>
+              <a:rPr lang="en-US" sz="1350" b="1" dirty="0">
+                <a:solidFill>
+                  <a:srgbClr val="F2F6F8"/>
+                </a:solidFill>
+                <a:latin typeface="Calibri" pitchFamily="34" charset="0"/>
+                <a:ea typeface="Calibri" pitchFamily="34" charset="-122"/>
+                <a:cs typeface="Calibri" pitchFamily="34" charset="-120"/>
+              </a:rPr>
+              <a:t>Hodnota nie je v tom, že vyjde každý pokus. </a:t>
+            </a:r>
+            <a:pPr indent="0" marL="0">
+              <a:lnSpc>
+                <a:spcPct val="115000"/>
+              </a:lnSpc>
+              <a:buNone/>
+            </a:pPr>
+            <a:r>
+              <a:rPr lang="en-US" sz="1350" dirty="0">
+                <a:solidFill>
+                  <a:srgbClr val="8DA2B2"/>
+                </a:solidFill>
+                <a:latin typeface="Calibri" pitchFamily="34" charset="0"/>
+                <a:ea typeface="Calibri" pitchFamily="34" charset="-122"/>
+                <a:cs typeface="Calibri" pitchFamily="34" charset="-120"/>
+              </a:rPr>
+              <a:t>Je v tom, že cena jedného pokusu je nízka — a každý ďalší je lacnejší než predchádzajúci, lebo stack, metodika aj distribučná cesta už stoja. AI MoneyMastermind je dôkaz, že gate funguje: pokus stál 4 týždne a poznatok máme.</a:t>
+            </a:r>
+            <a:endParaRPr lang="en-US" sz="1350" dirty="0"/>
+          </a:p>
+        </p:txBody>
+      </p:sp>
+      <p:sp>
+        <p:nvSpPr>
+          <p:cNvPr id="22" name="Text 20"/>
+          <p:cNvSpPr txBox="1"/>
+          <p:nvPr/>
+        </p:nvSpPr>
+        <p:spPr>
+          <a:xfrm>
+            <a:off x="566928" y="5394960"/>
+            <a:ext cx="11064240" cy="822960"/>
+          </a:xfrm>
+          <a:prstGeom prst="rect">
+            <a:avLst/>
+          </a:prstGeom>
+          <a:noFill/>
+          <a:ln/>
+        </p:spPr>
+        <p:txBody>
+          <a:bodyPr wrap="square" lIns="0" tIns="0" rIns="0" bIns="0" rtlCol="0" anchor="ctr"/>
+          <a:lstStyle/>
+          <a:p>
+            <a:pPr algn="ctr" indent="0" marL="0">
+              <a:lnSpc>
+                <a:spcPct val="115000"/>
+              </a:lnSpc>
+              <a:buNone/>
+            </a:pPr>
+            <a:r>
+              <a:rPr lang="en-US" sz="1600" i="1" dirty="0">
+                <a:solidFill>
+                  <a:srgbClr val="F2F6F8"/>
+                </a:solidFill>
+                <a:latin typeface="Cambria" pitchFamily="34" charset="0"/>
+                <a:ea typeface="Cambria" pitchFamily="34" charset="-122"/>
+                <a:cs typeface="Cambria" pitchFamily="34" charset="-120"/>
+              </a:rPr>
+              <a:t>Ak nebudeme inovovať, nebudeme sa zlepšovať. Toto je najlacnejší spôsob, ako si udržať náskok — skúšať veľa vecí za málo peňazí a rýchlo zahadzovať to, čo nefunguje.</a:t>
+            </a:r>
+            <a:endParaRPr lang="en-US" sz="1600" dirty="0"/>
+          </a:p>
+        </p:txBody>
+      </p:sp>
+    </p:spTree>
+  </p:cSld>
+  <p:clrMapOvr>
+    <a:masterClrMapping/>
+  </p:clrMapOvr>
+</p:sld>
+</file>
+
+<file path=ppt/slides/slide13.xml><?xml version="1.0" encoding="utf-8"?>
+<p:sld xmlns:a="http://schemas.openxmlformats.org/drawingml/2006/main" xmlns:r="http://schemas.openxmlformats.org/officeDocument/2006/relationships" xmlns:p="http://schemas.openxmlformats.org/presentationml/2006/main">
+  <p:cSld name="Slide 13">
     <p:bg>
       <p:bgPr>
         <a:solidFill>
@@ -9615,7 +12971,7 @@
                 <a:ea typeface="Calibri" pitchFamily="34" charset="-122"/>
                 <a:cs typeface="Calibri" pitchFamily="34" charset="-120"/>
               </a:rPr>
-              <a:t>KONKRÉTNY PRÍKLAD  ·  NOVÝ RASTOVÝ PRODUKT</a:t>
+              <a:t>PLÁN PROJEKTU 1 / 4  ·  NOVÝ RASTOVÝ PRODUKT</a:t>
             </a:r>
             <a:endParaRPr lang="en-US" sz="1050" dirty="0"/>
           </a:p>
@@ -13346,7 +16702,7 @@
                 <a:ea typeface="Calibri" pitchFamily="34" charset="-122"/>
                 <a:cs typeface="Calibri" pitchFamily="34" charset="-120"/>
               </a:rPr>
-              <a:t>RIZIKO</a:t>
+              <a:t>PLÁN PROJEKTU 2 / 4  ·  NOVÝ RASTOVÝ PRODUKT</a:t>
             </a:r>
             <a:endParaRPr lang="en-US" sz="1050" dirty="0"/>
           </a:p>
@@ -13377,7 +16733,7 @@
               <a:buNone/>
             </a:pPr>
             <a:r>
-              <a:rPr lang="en-US" sz="2800" b="1" dirty="0">
+              <a:rPr lang="en-US" sz="2600" b="1" dirty="0">
                 <a:solidFill>
                   <a:srgbClr val="F2F6F8"/>
                 </a:solidFill>
@@ -13385,49 +16741,22 @@
                 <a:ea typeface="Cambria" pitchFamily="34" charset="-122"/>
                 <a:cs typeface="Cambria" pitchFamily="34" charset="-120"/>
               </a:rPr>
-              <a:t>Riziková expozícia je zámerne veľmi nízka</a:t>
-            </a:r>
-            <a:endParaRPr lang="en-US" sz="2800" dirty="0"/>
+              <a:t>Blinks — plán a rozhodovacie body</a:t>
+            </a:r>
+            <a:endParaRPr lang="en-US" sz="2600" dirty="0"/>
           </a:p>
         </p:txBody>
       </p:sp>
       <p:sp>
         <p:nvSpPr>
-          <p:cNvPr id="5" name="Shape 3"/>
-          <p:cNvSpPr/>
+          <p:cNvPr id="5" name="Text 3"/>
+          <p:cNvSpPr txBox="1"/>
           <p:nvPr/>
         </p:nvSpPr>
         <p:spPr>
           <a:xfrm>
-            <a:off x="566928" y="2011680"/>
-            <a:ext cx="5440680" cy="3063240"/>
-          </a:xfrm>
-          <a:prstGeom prst="roundRect">
-            <a:avLst>
-              <a:gd name="adj" fmla="val 2090"/>
-            </a:avLst>
-          </a:prstGeom>
-          <a:solidFill>
-            <a:srgbClr val="111C26"/>
-          </a:solidFill>
-          <a:ln w="12700">
-            <a:solidFill>
-              <a:srgbClr val="263A4C"/>
-            </a:solidFill>
-            <a:prstDash val="solid"/>
-          </a:ln>
-        </p:spPr>
-      </p:sp>
-      <p:sp>
-        <p:nvSpPr>
-          <p:cNvPr id="6" name="Text 4"/>
-          <p:cNvSpPr txBox="1"/>
-          <p:nvPr/>
-        </p:nvSpPr>
-        <p:spPr>
-          <a:xfrm>
-            <a:off x="896112" y="2286000"/>
-            <a:ext cx="4754880" cy="256032"/>
+            <a:off x="566928" y="1810512"/>
+            <a:ext cx="11064240" cy="548640"/>
           </a:xfrm>
           <a:prstGeom prst="rect">
             <a:avLst/>
@@ -13439,34 +16768,1445 @@
           <a:bodyPr wrap="square" lIns="0" tIns="0" rIns="0" bIns="0" rtlCol="0" anchor="ctr"/>
           <a:lstStyle/>
           <a:p>
-            <a:pPr algn="l" indent="0" marL="0">
-              <a:buNone/>
-            </a:pPr>
-            <a:r>
-              <a:rPr lang="en-US" sz="950" b="1" spc="250" kern="0" dirty="0">
-                <a:solidFill>
-                  <a:srgbClr val="3FB6E8"/>
+            <a:pPr indent="0" marL="0">
+              <a:lnSpc>
+                <a:spcPct val="105000"/>
+              </a:lnSpc>
+              <a:buNone/>
+            </a:pPr>
+            <a:r>
+              <a:rPr lang="en-US" sz="1200" b="1" dirty="0">
+                <a:solidFill>
+                  <a:srgbClr val="F2F6F8"/>
                 </a:solidFill>
                 <a:latin typeface="Calibri" pitchFamily="34" charset="0"/>
                 <a:ea typeface="Calibri" pitchFamily="34" charset="-122"/>
                 <a:cs typeface="Calibri" pitchFamily="34" charset="-120"/>
               </a:rPr>
-              <a:t>INVESTIČNÁ BÁZA — DRŽANÁ DOLE</a:t>
-            </a:r>
-            <a:endParaRPr lang="en-US" sz="950" dirty="0"/>
+              <a:t>Východisko: </a:t>
+            </a:r>
+            <a:pPr indent="0" marL="0">
+              <a:lnSpc>
+                <a:spcPct val="105000"/>
+              </a:lnSpc>
+              <a:buNone/>
+            </a:pPr>
+            <a:r>
+              <a:rPr lang="en-US" sz="1200" dirty="0">
+                <a:solidFill>
+                  <a:srgbClr val="8DA2B2"/>
+                </a:solidFill>
+                <a:latin typeface="Calibri" pitchFamily="34" charset="0"/>
+                <a:ea typeface="Calibri" pitchFamily="34" charset="-122"/>
+                <a:cs typeface="Calibri" pitchFamily="34" charset="-120"/>
+              </a:rPr>
+              <a:t>mladšie publikum žije vo formáte stories a na web sa nevracia. Blinks je denný stream Forbes obsahu vo vlastnom kanáli — návyk, ktorý nestojí na Googli.</a:t>
+            </a:r>
+            <a:endParaRPr lang="en-US" sz="1200" dirty="0"/>
           </a:p>
         </p:txBody>
       </p:sp>
-      <p:sp>
-        <p:nvSpPr>
-          <p:cNvPr id="7" name="Text 5"/>
+      <p:graphicFrame>
+        <p:nvGraphicFramePr>
+          <p:cNvPr id="9" name="Table 0"/>
+          <p:cNvGraphicFramePr>
+            <a:graphicFrameLocks noGrp="1"/>
+          </p:cNvGraphicFramePr>
+          <p:nvPr>
+            <p:extLst>
+              <p:ext uri="{D42A27DB-BD31-4B8C-83A1-F6EECF244321}">
+                <p14:modId xmlns:p14="http://schemas.microsoft.com/office/powerpoint/2010/main" val="1579011935"/>
+              </p:ext>
+            </p:extLst>
+          </p:nvPr>
+        </p:nvGraphicFramePr>
+        <p:xfrm>
+          <a:off x="566928" y="2487168"/>
+          <a:ext cx="11064240" cy="914400"/>
+        </p:xfrm>
+        <a:graphic>
+          <a:graphicData uri="http://schemas.openxmlformats.org/drawingml/2006/table">
+            <a:tbl>
+              <a:tblPr/>
+              <a:tblGrid>
+                <a:gridCol w="1371600"/>
+                <a:gridCol w="3200400"/>
+                <a:gridCol w="3200400"/>
+                <a:gridCol w="3291840"/>
+              </a:tblGrid>
+              <a:tr h="411480">
+                <a:tc>
+                  <a:txBody>
+                    <a:bodyPr/>
+                    <a:lstStyle/>
+                    <a:p>
+                      <a:pPr indent="0" marL="0">
+                        <a:buNone/>
+                      </a:pPr>
+                      <a:endParaRPr lang="en-US" sz="1000" dirty="0">
+                        <a:latin typeface="Calibri" charset="0"/>
+                        <a:ea typeface="Calibri" charset="0"/>
+                        <a:cs typeface="Calibri" charset="0"/>
+                      </a:endParaRPr>
+                    </a:p>
+                  </a:txBody>
+                  <a:tcPr marL="73152" marR="73152" marT="73152" marB="73152" anchor="ctr">
+                    <a:lnL w="9525" cap="flat" cmpd="sng" algn="ctr">
+                      <a:solidFill>
+                        <a:srgbClr val="22303C"/>
+                      </a:solidFill>
+                      <a:prstDash val="solid"/>
+                      <a:round/>
+                      <a:headEnd type="none" w="med" len="med"/>
+                      <a:tailEnd type="none" w="med" len="med"/>
+                    </a:lnL>
+                    <a:lnR w="9525" cap="flat" cmpd="sng" algn="ctr">
+                      <a:solidFill>
+                        <a:srgbClr val="22303C"/>
+                      </a:solidFill>
+                      <a:prstDash val="solid"/>
+                      <a:round/>
+                      <a:headEnd type="none" w="med" len="med"/>
+                      <a:tailEnd type="none" w="med" len="med"/>
+                    </a:lnR>
+                    <a:lnT w="9525" cap="flat" cmpd="sng" algn="ctr">
+                      <a:solidFill>
+                        <a:srgbClr val="22303C"/>
+                      </a:solidFill>
+                      <a:prstDash val="solid"/>
+                      <a:round/>
+                      <a:headEnd type="none" w="med" len="med"/>
+                      <a:tailEnd type="none" w="med" len="med"/>
+                    </a:lnT>
+                    <a:lnB w="9525" cap="flat" cmpd="sng" algn="ctr">
+                      <a:solidFill>
+                        <a:srgbClr val="22303C"/>
+                      </a:solidFill>
+                      <a:prstDash val="solid"/>
+                      <a:round/>
+                      <a:headEnd type="none" w="med" len="med"/>
+                      <a:tailEnd type="none" w="med" len="med"/>
+                    </a:lnB>
+                    <a:solidFill>
+                      <a:srgbClr val="16242F"/>
+                    </a:solidFill>
+                  </a:tcPr>
+                </a:tc>
+                <a:tc>
+                  <a:txBody>
+                    <a:bodyPr/>
+                    <a:lstStyle/>
+                    <a:p>
+                      <a:pPr indent="0" marL="0">
+                        <a:buNone/>
+                      </a:pPr>
+                      <a:r>
+                        <a:rPr lang="en-US" sz="1000" b="1" spc="150" kern="0" dirty="0">
+                          <a:solidFill>
+                            <a:srgbClr val="3FB6E8"/>
+                          </a:solidFill>
+                          <a:latin typeface="Calibri" pitchFamily="34" charset="0"/>
+                          <a:ea typeface="Calibri" pitchFamily="34" charset="-122"/>
+                          <a:cs typeface="Calibri" pitchFamily="34" charset="-120"/>
+                        </a:rPr>
+                        <a:t>TERAZ (0–8 TÝŽDŇOV)</a:t>
+                      </a:r>
+                      <a:endParaRPr lang="en-US" sz="1000" dirty="0">
+                        <a:latin typeface="Calibri" charset="0"/>
+                        <a:ea typeface="Calibri" charset="0"/>
+                        <a:cs typeface="Calibri" charset="0"/>
+                      </a:endParaRPr>
+                    </a:p>
+                  </a:txBody>
+                  <a:tcPr marL="73152" marR="73152" marT="73152" marB="73152" anchor="ctr">
+                    <a:lnL w="9525" cap="flat" cmpd="sng" algn="ctr">
+                      <a:solidFill>
+                        <a:srgbClr val="22303C"/>
+                      </a:solidFill>
+                      <a:prstDash val="solid"/>
+                      <a:round/>
+                      <a:headEnd type="none" w="med" len="med"/>
+                      <a:tailEnd type="none" w="med" len="med"/>
+                    </a:lnL>
+                    <a:lnR w="9525" cap="flat" cmpd="sng" algn="ctr">
+                      <a:solidFill>
+                        <a:srgbClr val="22303C"/>
+                      </a:solidFill>
+                      <a:prstDash val="solid"/>
+                      <a:round/>
+                      <a:headEnd type="none" w="med" len="med"/>
+                      <a:tailEnd type="none" w="med" len="med"/>
+                    </a:lnR>
+                    <a:lnT w="9525" cap="flat" cmpd="sng" algn="ctr">
+                      <a:solidFill>
+                        <a:srgbClr val="22303C"/>
+                      </a:solidFill>
+                      <a:prstDash val="solid"/>
+                      <a:round/>
+                      <a:headEnd type="none" w="med" len="med"/>
+                      <a:tailEnd type="none" w="med" len="med"/>
+                    </a:lnT>
+                    <a:lnB w="9525" cap="flat" cmpd="sng" algn="ctr">
+                      <a:solidFill>
+                        <a:srgbClr val="22303C"/>
+                      </a:solidFill>
+                      <a:prstDash val="solid"/>
+                      <a:round/>
+                      <a:headEnd type="none" w="med" len="med"/>
+                      <a:tailEnd type="none" w="med" len="med"/>
+                    </a:lnB>
+                    <a:solidFill>
+                      <a:srgbClr val="16242F"/>
+                    </a:solidFill>
+                  </a:tcPr>
+                </a:tc>
+                <a:tc>
+                  <a:txBody>
+                    <a:bodyPr/>
+                    <a:lstStyle/>
+                    <a:p>
+                      <a:pPr indent="0" marL="0">
+                        <a:buNone/>
+                      </a:pPr>
+                      <a:r>
+                        <a:rPr lang="en-US" sz="1000" b="1" spc="150" kern="0" dirty="0">
+                          <a:solidFill>
+                            <a:srgbClr val="3FB6E8"/>
+                          </a:solidFill>
+                          <a:latin typeface="Calibri" pitchFamily="34" charset="0"/>
+                          <a:ea typeface="Calibri" pitchFamily="34" charset="-122"/>
+                          <a:cs typeface="Calibri" pitchFamily="34" charset="-120"/>
+                        </a:rPr>
+                        <a:t>6 MESIACOV</a:t>
+                      </a:r>
+                      <a:endParaRPr lang="en-US" sz="1000" dirty="0">
+                        <a:latin typeface="Calibri" charset="0"/>
+                        <a:ea typeface="Calibri" charset="0"/>
+                        <a:cs typeface="Calibri" charset="0"/>
+                      </a:endParaRPr>
+                    </a:p>
+                  </a:txBody>
+                  <a:tcPr marL="73152" marR="73152" marT="73152" marB="73152" anchor="ctr">
+                    <a:lnL w="9525" cap="flat" cmpd="sng" algn="ctr">
+                      <a:solidFill>
+                        <a:srgbClr val="22303C"/>
+                      </a:solidFill>
+                      <a:prstDash val="solid"/>
+                      <a:round/>
+                      <a:headEnd type="none" w="med" len="med"/>
+                      <a:tailEnd type="none" w="med" len="med"/>
+                    </a:lnL>
+                    <a:lnR w="9525" cap="flat" cmpd="sng" algn="ctr">
+                      <a:solidFill>
+                        <a:srgbClr val="22303C"/>
+                      </a:solidFill>
+                      <a:prstDash val="solid"/>
+                      <a:round/>
+                      <a:headEnd type="none" w="med" len="med"/>
+                      <a:tailEnd type="none" w="med" len="med"/>
+                    </a:lnR>
+                    <a:lnT w="9525" cap="flat" cmpd="sng" algn="ctr">
+                      <a:solidFill>
+                        <a:srgbClr val="22303C"/>
+                      </a:solidFill>
+                      <a:prstDash val="solid"/>
+                      <a:round/>
+                      <a:headEnd type="none" w="med" len="med"/>
+                      <a:tailEnd type="none" w="med" len="med"/>
+                    </a:lnT>
+                    <a:lnB w="9525" cap="flat" cmpd="sng" algn="ctr">
+                      <a:solidFill>
+                        <a:srgbClr val="22303C"/>
+                      </a:solidFill>
+                      <a:prstDash val="solid"/>
+                      <a:round/>
+                      <a:headEnd type="none" w="med" len="med"/>
+                      <a:tailEnd type="none" w="med" len="med"/>
+                    </a:lnB>
+                    <a:solidFill>
+                      <a:srgbClr val="16242F"/>
+                    </a:solidFill>
+                  </a:tcPr>
+                </a:tc>
+                <a:tc>
+                  <a:txBody>
+                    <a:bodyPr/>
+                    <a:lstStyle/>
+                    <a:p>
+                      <a:pPr indent="0" marL="0">
+                        <a:buNone/>
+                      </a:pPr>
+                      <a:r>
+                        <a:rPr lang="en-US" sz="1000" b="1" spc="150" kern="0" dirty="0">
+                          <a:solidFill>
+                            <a:srgbClr val="3FB6E8"/>
+                          </a:solidFill>
+                          <a:latin typeface="Calibri" pitchFamily="34" charset="0"/>
+                          <a:ea typeface="Calibri" pitchFamily="34" charset="-122"/>
+                          <a:cs typeface="Calibri" pitchFamily="34" charset="-120"/>
+                        </a:rPr>
+                        <a:t>12 MESIACOV</a:t>
+                      </a:r>
+                      <a:endParaRPr lang="en-US" sz="1000" dirty="0">
+                        <a:latin typeface="Calibri" charset="0"/>
+                        <a:ea typeface="Calibri" charset="0"/>
+                        <a:cs typeface="Calibri" charset="0"/>
+                      </a:endParaRPr>
+                    </a:p>
+                  </a:txBody>
+                  <a:tcPr marL="73152" marR="73152" marT="73152" marB="73152" anchor="ctr">
+                    <a:lnL w="9525" cap="flat" cmpd="sng" algn="ctr">
+                      <a:solidFill>
+                        <a:srgbClr val="22303C"/>
+                      </a:solidFill>
+                      <a:prstDash val="solid"/>
+                      <a:round/>
+                      <a:headEnd type="none" w="med" len="med"/>
+                      <a:tailEnd type="none" w="med" len="med"/>
+                    </a:lnL>
+                    <a:lnR w="9525" cap="flat" cmpd="sng" algn="ctr">
+                      <a:solidFill>
+                        <a:srgbClr val="22303C"/>
+                      </a:solidFill>
+                      <a:prstDash val="solid"/>
+                      <a:round/>
+                      <a:headEnd type="none" w="med" len="med"/>
+                      <a:tailEnd type="none" w="med" len="med"/>
+                    </a:lnR>
+                    <a:lnT w="9525" cap="flat" cmpd="sng" algn="ctr">
+                      <a:solidFill>
+                        <a:srgbClr val="22303C"/>
+                      </a:solidFill>
+                      <a:prstDash val="solid"/>
+                      <a:round/>
+                      <a:headEnd type="none" w="med" len="med"/>
+                      <a:tailEnd type="none" w="med" len="med"/>
+                    </a:lnT>
+                    <a:lnB w="9525" cap="flat" cmpd="sng" algn="ctr">
+                      <a:solidFill>
+                        <a:srgbClr val="22303C"/>
+                      </a:solidFill>
+                      <a:prstDash val="solid"/>
+                      <a:round/>
+                      <a:headEnd type="none" w="med" len="med"/>
+                      <a:tailEnd type="none" w="med" len="med"/>
+                    </a:lnB>
+                    <a:solidFill>
+                      <a:srgbClr val="16242F"/>
+                    </a:solidFill>
+                  </a:tcPr>
+                </a:tc>
+              </a:tr>
+              <a:tr h="868680">
+                <a:tc>
+                  <a:txBody>
+                    <a:bodyPr/>
+                    <a:lstStyle/>
+                    <a:p>
+                      <a:pPr indent="0" marL="0">
+                        <a:buNone/>
+                      </a:pPr>
+                      <a:r>
+                        <a:rPr lang="en-US" sz="1050" b="1" dirty="0">
+                          <a:solidFill>
+                            <a:srgbClr val="F2F6F8"/>
+                          </a:solidFill>
+                          <a:latin typeface="Calibri" pitchFamily="34" charset="0"/>
+                          <a:ea typeface="Calibri" pitchFamily="34" charset="-122"/>
+                          <a:cs typeface="Calibri" pitchFamily="34" charset="-120"/>
+                        </a:rPr>
+                        <a:t>Tržby</a:t>
+                      </a:r>
+                      <a:endParaRPr lang="en-US" sz="1050" dirty="0">
+                        <a:latin typeface="Calibri" charset="0"/>
+                        <a:ea typeface="Calibri" charset="0"/>
+                        <a:cs typeface="Calibri" charset="0"/>
+                      </a:endParaRPr>
+                    </a:p>
+                  </a:txBody>
+                  <a:tcPr marL="73152" marR="73152" marT="73152" marB="73152" anchor="ctr">
+                    <a:lnL w="9525" cap="flat" cmpd="sng" algn="ctr">
+                      <a:solidFill>
+                        <a:srgbClr val="22303C"/>
+                      </a:solidFill>
+                      <a:prstDash val="solid"/>
+                      <a:round/>
+                      <a:headEnd type="none" w="med" len="med"/>
+                      <a:tailEnd type="none" w="med" len="med"/>
+                    </a:lnL>
+                    <a:lnR w="9525" cap="flat" cmpd="sng" algn="ctr">
+                      <a:solidFill>
+                        <a:srgbClr val="22303C"/>
+                      </a:solidFill>
+                      <a:prstDash val="solid"/>
+                      <a:round/>
+                      <a:headEnd type="none" w="med" len="med"/>
+                      <a:tailEnd type="none" w="med" len="med"/>
+                    </a:lnR>
+                    <a:lnT w="9525" cap="flat" cmpd="sng" algn="ctr">
+                      <a:solidFill>
+                        <a:srgbClr val="22303C"/>
+                      </a:solidFill>
+                      <a:prstDash val="solid"/>
+                      <a:round/>
+                      <a:headEnd type="none" w="med" len="med"/>
+                      <a:tailEnd type="none" w="med" len="med"/>
+                    </a:lnT>
+                    <a:lnB w="9525" cap="flat" cmpd="sng" algn="ctr">
+                      <a:solidFill>
+                        <a:srgbClr val="22303C"/>
+                      </a:solidFill>
+                      <a:prstDash val="solid"/>
+                      <a:round/>
+                      <a:headEnd type="none" w="med" len="med"/>
+                      <a:tailEnd type="none" w="med" len="med"/>
+                    </a:lnB>
+                    <a:solidFill>
+                      <a:srgbClr val="0F1822"/>
+                    </a:solidFill>
+                  </a:tcPr>
+                </a:tc>
+                <a:tc>
+                  <a:txBody>
+                    <a:bodyPr/>
+                    <a:lstStyle/>
+                    <a:p>
+                      <a:pPr indent="0" marL="0">
+                        <a:buNone/>
+                      </a:pPr>
+                      <a:r>
+                        <a:rPr lang="en-US" sz="1000" dirty="0">
+                          <a:solidFill>
+                            <a:srgbClr val="8DA2B2"/>
+                          </a:solidFill>
+                          <a:latin typeface="Calibri" pitchFamily="34" charset="0"/>
+                          <a:ea typeface="Calibri" pitchFamily="34" charset="-122"/>
+                          <a:cs typeface="Calibri" pitchFamily="34" charset="-120"/>
+                        </a:rPr>
+                        <a:t>0 € — najprv hodnota, nie predaj</a:t>
+                      </a:r>
+                      <a:endParaRPr lang="en-US" sz="1000" dirty="0">
+                        <a:latin typeface="Calibri" charset="0"/>
+                        <a:ea typeface="Calibri" charset="0"/>
+                        <a:cs typeface="Calibri" charset="0"/>
+                      </a:endParaRPr>
+                    </a:p>
+                  </a:txBody>
+                  <a:tcPr marL="73152" marR="73152" marT="73152" marB="73152" anchor="ctr">
+                    <a:lnL w="9525" cap="flat" cmpd="sng" algn="ctr">
+                      <a:solidFill>
+                        <a:srgbClr val="22303C"/>
+                      </a:solidFill>
+                      <a:prstDash val="solid"/>
+                      <a:round/>
+                      <a:headEnd type="none" w="med" len="med"/>
+                      <a:tailEnd type="none" w="med" len="med"/>
+                    </a:lnL>
+                    <a:lnR w="9525" cap="flat" cmpd="sng" algn="ctr">
+                      <a:solidFill>
+                        <a:srgbClr val="22303C"/>
+                      </a:solidFill>
+                      <a:prstDash val="solid"/>
+                      <a:round/>
+                      <a:headEnd type="none" w="med" len="med"/>
+                      <a:tailEnd type="none" w="med" len="med"/>
+                    </a:lnR>
+                    <a:lnT w="9525" cap="flat" cmpd="sng" algn="ctr">
+                      <a:solidFill>
+                        <a:srgbClr val="22303C"/>
+                      </a:solidFill>
+                      <a:prstDash val="solid"/>
+                      <a:round/>
+                      <a:headEnd type="none" w="med" len="med"/>
+                      <a:tailEnd type="none" w="med" len="med"/>
+                    </a:lnT>
+                    <a:lnB w="9525" cap="flat" cmpd="sng" algn="ctr">
+                      <a:solidFill>
+                        <a:srgbClr val="22303C"/>
+                      </a:solidFill>
+                      <a:prstDash val="solid"/>
+                      <a:round/>
+                      <a:headEnd type="none" w="med" len="med"/>
+                      <a:tailEnd type="none" w="med" len="med"/>
+                    </a:lnB>
+                    <a:solidFill>
+                      <a:srgbClr val="0F1822"/>
+                    </a:solidFill>
+                  </a:tcPr>
+                </a:tc>
+                <a:tc>
+                  <a:txBody>
+                    <a:bodyPr/>
+                    <a:lstStyle/>
+                    <a:p>
+                      <a:pPr indent="0" marL="0">
+                        <a:buNone/>
+                      </a:pPr>
+                      <a:r>
+                        <a:rPr lang="en-US" sz="1000" dirty="0">
+                          <a:solidFill>
+                            <a:srgbClr val="F2F6F8"/>
+                          </a:solidFill>
+                          <a:latin typeface="Calibri" pitchFamily="34" charset="0"/>
+                          <a:ea typeface="Calibri" pitchFamily="34" charset="-122"/>
+                          <a:cs typeface="Calibri" pitchFamily="34" charset="-120"/>
+                        </a:rPr>
+                        <a:t>prvý sponzoring formátu (Insight of the day s partnerom) — scenárovo, podľa nameraného engagementu</a:t>
+                      </a:r>
+                      <a:endParaRPr lang="en-US" sz="1000" dirty="0">
+                        <a:latin typeface="Calibri" charset="0"/>
+                        <a:ea typeface="Calibri" charset="0"/>
+                        <a:cs typeface="Calibri" charset="0"/>
+                      </a:endParaRPr>
+                    </a:p>
+                  </a:txBody>
+                  <a:tcPr marL="73152" marR="73152" marT="73152" marB="73152" anchor="ctr">
+                    <a:lnL w="9525" cap="flat" cmpd="sng" algn="ctr">
+                      <a:solidFill>
+                        <a:srgbClr val="22303C"/>
+                      </a:solidFill>
+                      <a:prstDash val="solid"/>
+                      <a:round/>
+                      <a:headEnd type="none" w="med" len="med"/>
+                      <a:tailEnd type="none" w="med" len="med"/>
+                    </a:lnL>
+                    <a:lnR w="9525" cap="flat" cmpd="sng" algn="ctr">
+                      <a:solidFill>
+                        <a:srgbClr val="22303C"/>
+                      </a:solidFill>
+                      <a:prstDash val="solid"/>
+                      <a:round/>
+                      <a:headEnd type="none" w="med" len="med"/>
+                      <a:tailEnd type="none" w="med" len="med"/>
+                    </a:lnR>
+                    <a:lnT w="9525" cap="flat" cmpd="sng" algn="ctr">
+                      <a:solidFill>
+                        <a:srgbClr val="22303C"/>
+                      </a:solidFill>
+                      <a:prstDash val="solid"/>
+                      <a:round/>
+                      <a:headEnd type="none" w="med" len="med"/>
+                      <a:tailEnd type="none" w="med" len="med"/>
+                    </a:lnT>
+                    <a:lnB w="9525" cap="flat" cmpd="sng" algn="ctr">
+                      <a:solidFill>
+                        <a:srgbClr val="22303C"/>
+                      </a:solidFill>
+                      <a:prstDash val="solid"/>
+                      <a:round/>
+                      <a:headEnd type="none" w="med" len="med"/>
+                      <a:tailEnd type="none" w="med" len="med"/>
+                    </a:lnB>
+                    <a:solidFill>
+                      <a:srgbClr val="0F1822"/>
+                    </a:solidFill>
+                  </a:tcPr>
+                </a:tc>
+                <a:tc>
+                  <a:txBody>
+                    <a:bodyPr/>
+                    <a:lstStyle/>
+                    <a:p>
+                      <a:pPr indent="0" marL="0">
+                        <a:buNone/>
+                      </a:pPr>
+                      <a:r>
+                        <a:rPr lang="en-US" sz="1000" dirty="0">
+                          <a:solidFill>
+                            <a:srgbClr val="F2F6F8"/>
+                          </a:solidFill>
+                          <a:latin typeface="Calibri" pitchFamily="34" charset="0"/>
+                          <a:ea typeface="Calibri" pitchFamily="34" charset="-122"/>
+                          <a:cs typeface="Calibri" pitchFamily="34" charset="-120"/>
+                        </a:rPr>
+                        <a:t>samostatný monetizačný kanál — natívne karty + sponzoring; číslo dáme po pilote, nie pred ním</a:t>
+                      </a:r>
+                      <a:endParaRPr lang="en-US" sz="1000" dirty="0">
+                        <a:latin typeface="Calibri" charset="0"/>
+                        <a:ea typeface="Calibri" charset="0"/>
+                        <a:cs typeface="Calibri" charset="0"/>
+                      </a:endParaRPr>
+                    </a:p>
+                  </a:txBody>
+                  <a:tcPr marL="73152" marR="73152" marT="73152" marB="73152" anchor="ctr">
+                    <a:lnL w="9525" cap="flat" cmpd="sng" algn="ctr">
+                      <a:solidFill>
+                        <a:srgbClr val="22303C"/>
+                      </a:solidFill>
+                      <a:prstDash val="solid"/>
+                      <a:round/>
+                      <a:headEnd type="none" w="med" len="med"/>
+                      <a:tailEnd type="none" w="med" len="med"/>
+                    </a:lnL>
+                    <a:lnR w="9525" cap="flat" cmpd="sng" algn="ctr">
+                      <a:solidFill>
+                        <a:srgbClr val="22303C"/>
+                      </a:solidFill>
+                      <a:prstDash val="solid"/>
+                      <a:round/>
+                      <a:headEnd type="none" w="med" len="med"/>
+                      <a:tailEnd type="none" w="med" len="med"/>
+                    </a:lnR>
+                    <a:lnT w="9525" cap="flat" cmpd="sng" algn="ctr">
+                      <a:solidFill>
+                        <a:srgbClr val="22303C"/>
+                      </a:solidFill>
+                      <a:prstDash val="solid"/>
+                      <a:round/>
+                      <a:headEnd type="none" w="med" len="med"/>
+                      <a:tailEnd type="none" w="med" len="med"/>
+                    </a:lnT>
+                    <a:lnB w="9525" cap="flat" cmpd="sng" algn="ctr">
+                      <a:solidFill>
+                        <a:srgbClr val="22303C"/>
+                      </a:solidFill>
+                      <a:prstDash val="solid"/>
+                      <a:round/>
+                      <a:headEnd type="none" w="med" len="med"/>
+                      <a:tailEnd type="none" w="med" len="med"/>
+                    </a:lnB>
+                    <a:solidFill>
+                      <a:srgbClr val="0F1822"/>
+                    </a:solidFill>
+                  </a:tcPr>
+                </a:tc>
+              </a:tr>
+              <a:tr h="822960">
+                <a:tc>
+                  <a:txBody>
+                    <a:bodyPr/>
+                    <a:lstStyle/>
+                    <a:p>
+                      <a:pPr indent="0" marL="0">
+                        <a:buNone/>
+                      </a:pPr>
+                      <a:r>
+                        <a:rPr lang="en-US" sz="1050" b="1" dirty="0">
+                          <a:solidFill>
+                            <a:srgbClr val="F2F6F8"/>
+                          </a:solidFill>
+                          <a:latin typeface="Calibri" pitchFamily="34" charset="0"/>
+                          <a:ea typeface="Calibri" pitchFamily="34" charset="-122"/>
+                          <a:cs typeface="Calibri" pitchFamily="34" charset="-120"/>
+                        </a:rPr>
+                        <a:t>Náklad</a:t>
+                      </a:r>
+                      <a:endParaRPr lang="en-US" sz="1050" dirty="0">
+                        <a:latin typeface="Calibri" charset="0"/>
+                        <a:ea typeface="Calibri" charset="0"/>
+                        <a:cs typeface="Calibri" charset="0"/>
+                      </a:endParaRPr>
+                    </a:p>
+                  </a:txBody>
+                  <a:tcPr marL="73152" marR="73152" marT="73152" marB="73152" anchor="ctr">
+                    <a:lnL w="9525" cap="flat" cmpd="sng" algn="ctr">
+                      <a:solidFill>
+                        <a:srgbClr val="22303C"/>
+                      </a:solidFill>
+                      <a:prstDash val="solid"/>
+                      <a:round/>
+                      <a:headEnd type="none" w="med" len="med"/>
+                      <a:tailEnd type="none" w="med" len="med"/>
+                    </a:lnL>
+                    <a:lnR w="9525" cap="flat" cmpd="sng" algn="ctr">
+                      <a:solidFill>
+                        <a:srgbClr val="22303C"/>
+                      </a:solidFill>
+                      <a:prstDash val="solid"/>
+                      <a:round/>
+                      <a:headEnd type="none" w="med" len="med"/>
+                      <a:tailEnd type="none" w="med" len="med"/>
+                    </a:lnR>
+                    <a:lnT w="9525" cap="flat" cmpd="sng" algn="ctr">
+                      <a:solidFill>
+                        <a:srgbClr val="22303C"/>
+                      </a:solidFill>
+                      <a:prstDash val="solid"/>
+                      <a:round/>
+                      <a:headEnd type="none" w="med" len="med"/>
+                      <a:tailEnd type="none" w="med" len="med"/>
+                    </a:lnT>
+                    <a:lnB w="9525" cap="flat" cmpd="sng" algn="ctr">
+                      <a:solidFill>
+                        <a:srgbClr val="22303C"/>
+                      </a:solidFill>
+                      <a:prstDash val="solid"/>
+                      <a:round/>
+                      <a:headEnd type="none" w="med" len="med"/>
+                      <a:tailEnd type="none" w="med" len="med"/>
+                    </a:lnB>
+                    <a:solidFill>
+                      <a:srgbClr val="0F1822"/>
+                    </a:solidFill>
+                  </a:tcPr>
+                </a:tc>
+                <a:tc>
+                  <a:txBody>
+                    <a:bodyPr/>
+                    <a:lstStyle/>
+                    <a:p>
+                      <a:pPr indent="0" marL="0">
+                        <a:buNone/>
+                      </a:pPr>
+                      <a:r>
+                        <a:rPr lang="en-US" sz="1000" dirty="0">
+                          <a:solidFill>
+                            <a:srgbClr val="F2F6F8"/>
+                          </a:solidFill>
+                          <a:latin typeface="Calibri" pitchFamily="34" charset="0"/>
+                          <a:ea typeface="Calibri" pitchFamily="34" charset="-122"/>
+                          <a:cs typeface="Calibri" pitchFamily="34" charset="-120"/>
+                        </a:rPr>
+                        <a:t>Vivo (realizácia) + Adriana H. (obsah) — beží na obsahu, ktorý už vyrábame</a:t>
+                      </a:r>
+                      <a:endParaRPr lang="en-US" sz="1000" dirty="0">
+                        <a:latin typeface="Calibri" charset="0"/>
+                        <a:ea typeface="Calibri" charset="0"/>
+                        <a:cs typeface="Calibri" charset="0"/>
+                      </a:endParaRPr>
+                    </a:p>
+                  </a:txBody>
+                  <a:tcPr marL="73152" marR="73152" marT="73152" marB="73152" anchor="ctr">
+                    <a:lnL w="9525" cap="flat" cmpd="sng" algn="ctr">
+                      <a:solidFill>
+                        <a:srgbClr val="22303C"/>
+                      </a:solidFill>
+                      <a:prstDash val="solid"/>
+                      <a:round/>
+                      <a:headEnd type="none" w="med" len="med"/>
+                      <a:tailEnd type="none" w="med" len="med"/>
+                    </a:lnL>
+                    <a:lnR w="9525" cap="flat" cmpd="sng" algn="ctr">
+                      <a:solidFill>
+                        <a:srgbClr val="22303C"/>
+                      </a:solidFill>
+                      <a:prstDash val="solid"/>
+                      <a:round/>
+                      <a:headEnd type="none" w="med" len="med"/>
+                      <a:tailEnd type="none" w="med" len="med"/>
+                    </a:lnR>
+                    <a:lnT w="9525" cap="flat" cmpd="sng" algn="ctr">
+                      <a:solidFill>
+                        <a:srgbClr val="22303C"/>
+                      </a:solidFill>
+                      <a:prstDash val="solid"/>
+                      <a:round/>
+                      <a:headEnd type="none" w="med" len="med"/>
+                      <a:tailEnd type="none" w="med" len="med"/>
+                    </a:lnT>
+                    <a:lnB w="9525" cap="flat" cmpd="sng" algn="ctr">
+                      <a:solidFill>
+                        <a:srgbClr val="22303C"/>
+                      </a:solidFill>
+                      <a:prstDash val="solid"/>
+                      <a:round/>
+                      <a:headEnd type="none" w="med" len="med"/>
+                      <a:tailEnd type="none" w="med" len="med"/>
+                    </a:lnB>
+                    <a:solidFill>
+                      <a:srgbClr val="0F1822"/>
+                    </a:solidFill>
+                  </a:tcPr>
+                </a:tc>
+                <a:tc>
+                  <a:txBody>
+                    <a:bodyPr/>
+                    <a:lstStyle/>
+                    <a:p>
+                      <a:pPr indent="0" marL="0">
+                        <a:buNone/>
+                      </a:pPr>
+                      <a:r>
+                        <a:rPr lang="en-US" sz="1000" dirty="0">
+                          <a:solidFill>
+                            <a:srgbClr val="F2F6F8"/>
+                          </a:solidFill>
+                          <a:latin typeface="Calibri" pitchFamily="34" charset="0"/>
+                          <a:ea typeface="Calibri" pitchFamily="34" charset="-122"/>
+                          <a:cs typeface="Calibri" pitchFamily="34" charset="-120"/>
+                        </a:rPr>
+                        <a:t>to isté + údržba streamu</a:t>
+                      </a:r>
+                      <a:endParaRPr lang="en-US" sz="1000" dirty="0">
+                        <a:latin typeface="Calibri" charset="0"/>
+                        <a:ea typeface="Calibri" charset="0"/>
+                        <a:cs typeface="Calibri" charset="0"/>
+                      </a:endParaRPr>
+                    </a:p>
+                  </a:txBody>
+                  <a:tcPr marL="73152" marR="73152" marT="73152" marB="73152" anchor="ctr">
+                    <a:lnL w="9525" cap="flat" cmpd="sng" algn="ctr">
+                      <a:solidFill>
+                        <a:srgbClr val="22303C"/>
+                      </a:solidFill>
+                      <a:prstDash val="solid"/>
+                      <a:round/>
+                      <a:headEnd type="none" w="med" len="med"/>
+                      <a:tailEnd type="none" w="med" len="med"/>
+                    </a:lnL>
+                    <a:lnR w="9525" cap="flat" cmpd="sng" algn="ctr">
+                      <a:solidFill>
+                        <a:srgbClr val="22303C"/>
+                      </a:solidFill>
+                      <a:prstDash val="solid"/>
+                      <a:round/>
+                      <a:headEnd type="none" w="med" len="med"/>
+                      <a:tailEnd type="none" w="med" len="med"/>
+                    </a:lnR>
+                    <a:lnT w="9525" cap="flat" cmpd="sng" algn="ctr">
+                      <a:solidFill>
+                        <a:srgbClr val="22303C"/>
+                      </a:solidFill>
+                      <a:prstDash val="solid"/>
+                      <a:round/>
+                      <a:headEnd type="none" w="med" len="med"/>
+                      <a:tailEnd type="none" w="med" len="med"/>
+                    </a:lnT>
+                    <a:lnB w="9525" cap="flat" cmpd="sng" algn="ctr">
+                      <a:solidFill>
+                        <a:srgbClr val="22303C"/>
+                      </a:solidFill>
+                      <a:prstDash val="solid"/>
+                      <a:round/>
+                      <a:headEnd type="none" w="med" len="med"/>
+                      <a:tailEnd type="none" w="med" len="med"/>
+                    </a:lnB>
+                    <a:solidFill>
+                      <a:srgbClr val="0F1822"/>
+                    </a:solidFill>
+                  </a:tcPr>
+                </a:tc>
+                <a:tc>
+                  <a:txBody>
+                    <a:bodyPr/>
+                    <a:lstStyle/>
+                    <a:p>
+                      <a:pPr indent="0" marL="0">
+                        <a:buNone/>
+                      </a:pPr>
+                      <a:r>
+                        <a:rPr lang="en-US" sz="1000" dirty="0">
+                          <a:solidFill>
+                            <a:srgbClr val="F2F6F8"/>
+                          </a:solidFill>
+                          <a:latin typeface="Calibri" pitchFamily="34" charset="0"/>
+                          <a:ea typeface="Calibri" pitchFamily="34" charset="-122"/>
+                          <a:cs typeface="Calibri" pitchFamily="34" charset="-120"/>
+                        </a:rPr>
+                        <a:t>to isté — žiadna nová výroba obsahu, žiadny tím</a:t>
+                      </a:r>
+                      <a:endParaRPr lang="en-US" sz="1000" dirty="0">
+                        <a:latin typeface="Calibri" charset="0"/>
+                        <a:ea typeface="Calibri" charset="0"/>
+                        <a:cs typeface="Calibri" charset="0"/>
+                      </a:endParaRPr>
+                    </a:p>
+                  </a:txBody>
+                  <a:tcPr marL="73152" marR="73152" marT="73152" marB="73152" anchor="ctr">
+                    <a:lnL w="9525" cap="flat" cmpd="sng" algn="ctr">
+                      <a:solidFill>
+                        <a:srgbClr val="22303C"/>
+                      </a:solidFill>
+                      <a:prstDash val="solid"/>
+                      <a:round/>
+                      <a:headEnd type="none" w="med" len="med"/>
+                      <a:tailEnd type="none" w="med" len="med"/>
+                    </a:lnL>
+                    <a:lnR w="9525" cap="flat" cmpd="sng" algn="ctr">
+                      <a:solidFill>
+                        <a:srgbClr val="22303C"/>
+                      </a:solidFill>
+                      <a:prstDash val="solid"/>
+                      <a:round/>
+                      <a:headEnd type="none" w="med" len="med"/>
+                      <a:tailEnd type="none" w="med" len="med"/>
+                    </a:lnR>
+                    <a:lnT w="9525" cap="flat" cmpd="sng" algn="ctr">
+                      <a:solidFill>
+                        <a:srgbClr val="22303C"/>
+                      </a:solidFill>
+                      <a:prstDash val="solid"/>
+                      <a:round/>
+                      <a:headEnd type="none" w="med" len="med"/>
+                      <a:tailEnd type="none" w="med" len="med"/>
+                    </a:lnT>
+                    <a:lnB w="9525" cap="flat" cmpd="sng" algn="ctr">
+                      <a:solidFill>
+                        <a:srgbClr val="22303C"/>
+                      </a:solidFill>
+                      <a:prstDash val="solid"/>
+                      <a:round/>
+                      <a:headEnd type="none" w="med" len="med"/>
+                      <a:tailEnd type="none" w="med" len="med"/>
+                    </a:lnB>
+                    <a:solidFill>
+                      <a:srgbClr val="0F1822"/>
+                    </a:solidFill>
+                  </a:tcPr>
+                </a:tc>
+              </a:tr>
+              <a:tr h="822960">
+                <a:tc>
+                  <a:txBody>
+                    <a:bodyPr/>
+                    <a:lstStyle/>
+                    <a:p>
+                      <a:pPr indent="0" marL="0">
+                        <a:buNone/>
+                      </a:pPr>
+                      <a:r>
+                        <a:rPr lang="en-US" sz="1050" b="1" dirty="0">
+                          <a:solidFill>
+                            <a:srgbClr val="F2F6F8"/>
+                          </a:solidFill>
+                          <a:latin typeface="Calibri" pitchFamily="34" charset="0"/>
+                          <a:ea typeface="Calibri" pitchFamily="34" charset="-122"/>
+                          <a:cs typeface="Calibri" pitchFamily="34" charset="-120"/>
+                        </a:rPr>
+                        <a:t>Nefinančný prínos</a:t>
+                      </a:r>
+                      <a:endParaRPr lang="en-US" sz="1050" dirty="0">
+                        <a:latin typeface="Calibri" charset="0"/>
+                        <a:ea typeface="Calibri" charset="0"/>
+                        <a:cs typeface="Calibri" charset="0"/>
+                      </a:endParaRPr>
+                    </a:p>
+                  </a:txBody>
+                  <a:tcPr marL="73152" marR="73152" marT="73152" marB="73152" anchor="ctr">
+                    <a:lnL w="9525" cap="flat" cmpd="sng" algn="ctr">
+                      <a:solidFill>
+                        <a:srgbClr val="22303C"/>
+                      </a:solidFill>
+                      <a:prstDash val="solid"/>
+                      <a:round/>
+                      <a:headEnd type="none" w="med" len="med"/>
+                      <a:tailEnd type="none" w="med" len="med"/>
+                    </a:lnL>
+                    <a:lnR w="9525" cap="flat" cmpd="sng" algn="ctr">
+                      <a:solidFill>
+                        <a:srgbClr val="22303C"/>
+                      </a:solidFill>
+                      <a:prstDash val="solid"/>
+                      <a:round/>
+                      <a:headEnd type="none" w="med" len="med"/>
+                      <a:tailEnd type="none" w="med" len="med"/>
+                    </a:lnR>
+                    <a:lnT w="9525" cap="flat" cmpd="sng" algn="ctr">
+                      <a:solidFill>
+                        <a:srgbClr val="22303C"/>
+                      </a:solidFill>
+                      <a:prstDash val="solid"/>
+                      <a:round/>
+                      <a:headEnd type="none" w="med" len="med"/>
+                      <a:tailEnd type="none" w="med" len="med"/>
+                    </a:lnT>
+                    <a:lnB w="9525" cap="flat" cmpd="sng" algn="ctr">
+                      <a:solidFill>
+                        <a:srgbClr val="22303C"/>
+                      </a:solidFill>
+                      <a:prstDash val="solid"/>
+                      <a:round/>
+                      <a:headEnd type="none" w="med" len="med"/>
+                      <a:tailEnd type="none" w="med" len="med"/>
+                    </a:lnB>
+                    <a:solidFill>
+                      <a:srgbClr val="0F1822"/>
+                    </a:solidFill>
+                  </a:tcPr>
+                </a:tc>
+                <a:tc>
+                  <a:txBody>
+                    <a:bodyPr/>
+                    <a:lstStyle/>
+                    <a:p>
+                      <a:pPr indent="0" marL="0">
+                        <a:buNone/>
+                      </a:pPr>
+                      <a:r>
+                        <a:rPr lang="en-US" sz="1000" dirty="0">
+                          <a:solidFill>
+                            <a:srgbClr val="F2F6F8"/>
+                          </a:solidFill>
+                          <a:latin typeface="Calibri" pitchFamily="34" charset="0"/>
+                          <a:ea typeface="Calibri" pitchFamily="34" charset="-122"/>
+                          <a:cs typeface="Calibri" pitchFamily="34" charset="-120"/>
+                        </a:rPr>
+                        <a:t>Insight of the day ako prvé zlepšenie hodnoty, potom MVP</a:t>
+                      </a:r>
+                      <a:endParaRPr lang="en-US" sz="1000" dirty="0">
+                        <a:latin typeface="Calibri" charset="0"/>
+                        <a:ea typeface="Calibri" charset="0"/>
+                        <a:cs typeface="Calibri" charset="0"/>
+                      </a:endParaRPr>
+                    </a:p>
+                  </a:txBody>
+                  <a:tcPr marL="73152" marR="73152" marT="73152" marB="73152" anchor="ctr">
+                    <a:lnL w="9525" cap="flat" cmpd="sng" algn="ctr">
+                      <a:solidFill>
+                        <a:srgbClr val="22303C"/>
+                      </a:solidFill>
+                      <a:prstDash val="solid"/>
+                      <a:round/>
+                      <a:headEnd type="none" w="med" len="med"/>
+                      <a:tailEnd type="none" w="med" len="med"/>
+                    </a:lnL>
+                    <a:lnR w="9525" cap="flat" cmpd="sng" algn="ctr">
+                      <a:solidFill>
+                        <a:srgbClr val="22303C"/>
+                      </a:solidFill>
+                      <a:prstDash val="solid"/>
+                      <a:round/>
+                      <a:headEnd type="none" w="med" len="med"/>
+                      <a:tailEnd type="none" w="med" len="med"/>
+                    </a:lnR>
+                    <a:lnT w="9525" cap="flat" cmpd="sng" algn="ctr">
+                      <a:solidFill>
+                        <a:srgbClr val="22303C"/>
+                      </a:solidFill>
+                      <a:prstDash val="solid"/>
+                      <a:round/>
+                      <a:headEnd type="none" w="med" len="med"/>
+                      <a:tailEnd type="none" w="med" len="med"/>
+                    </a:lnT>
+                    <a:lnB w="9525" cap="flat" cmpd="sng" algn="ctr">
+                      <a:solidFill>
+                        <a:srgbClr val="22303C"/>
+                      </a:solidFill>
+                      <a:prstDash val="solid"/>
+                      <a:round/>
+                      <a:headEnd type="none" w="med" len="med"/>
+                      <a:tailEnd type="none" w="med" len="med"/>
+                    </a:lnB>
+                    <a:solidFill>
+                      <a:srgbClr val="0F1822"/>
+                    </a:solidFill>
+                  </a:tcPr>
+                </a:tc>
+                <a:tc>
+                  <a:txBody>
+                    <a:bodyPr/>
+                    <a:lstStyle/>
+                    <a:p>
+                      <a:pPr indent="0" marL="0">
+                        <a:buNone/>
+                      </a:pPr>
+                      <a:r>
+                        <a:rPr lang="en-US" sz="1000" dirty="0">
+                          <a:solidFill>
+                            <a:srgbClr val="F2F6F8"/>
+                          </a:solidFill>
+                          <a:latin typeface="Calibri" pitchFamily="34" charset="0"/>
+                          <a:ea typeface="Calibri" pitchFamily="34" charset="-122"/>
+                          <a:cs typeface="Calibri" pitchFamily="34" charset="-120"/>
+                        </a:rPr>
+                        <a:t>denný návyk mimo Googlu a sociálnych sietí — múr proti závislosti</a:t>
+                      </a:r>
+                      <a:endParaRPr lang="en-US" sz="1000" dirty="0">
+                        <a:latin typeface="Calibri" charset="0"/>
+                        <a:ea typeface="Calibri" charset="0"/>
+                        <a:cs typeface="Calibri" charset="0"/>
+                      </a:endParaRPr>
+                    </a:p>
+                  </a:txBody>
+                  <a:tcPr marL="73152" marR="73152" marT="73152" marB="73152" anchor="ctr">
+                    <a:lnL w="9525" cap="flat" cmpd="sng" algn="ctr">
+                      <a:solidFill>
+                        <a:srgbClr val="22303C"/>
+                      </a:solidFill>
+                      <a:prstDash val="solid"/>
+                      <a:round/>
+                      <a:headEnd type="none" w="med" len="med"/>
+                      <a:tailEnd type="none" w="med" len="med"/>
+                    </a:lnL>
+                    <a:lnR w="9525" cap="flat" cmpd="sng" algn="ctr">
+                      <a:solidFill>
+                        <a:srgbClr val="22303C"/>
+                      </a:solidFill>
+                      <a:prstDash val="solid"/>
+                      <a:round/>
+                      <a:headEnd type="none" w="med" len="med"/>
+                      <a:tailEnd type="none" w="med" len="med"/>
+                    </a:lnR>
+                    <a:lnT w="9525" cap="flat" cmpd="sng" algn="ctr">
+                      <a:solidFill>
+                        <a:srgbClr val="22303C"/>
+                      </a:solidFill>
+                      <a:prstDash val="solid"/>
+                      <a:round/>
+                      <a:headEnd type="none" w="med" len="med"/>
+                      <a:tailEnd type="none" w="med" len="med"/>
+                    </a:lnT>
+                    <a:lnB w="9525" cap="flat" cmpd="sng" algn="ctr">
+                      <a:solidFill>
+                        <a:srgbClr val="22303C"/>
+                      </a:solidFill>
+                      <a:prstDash val="solid"/>
+                      <a:round/>
+                      <a:headEnd type="none" w="med" len="med"/>
+                      <a:tailEnd type="none" w="med" len="med"/>
+                    </a:lnB>
+                    <a:solidFill>
+                      <a:srgbClr val="0F1822"/>
+                    </a:solidFill>
+                  </a:tcPr>
+                </a:tc>
+                <a:tc>
+                  <a:txBody>
+                    <a:bodyPr/>
+                    <a:lstStyle/>
+                    <a:p>
+                      <a:pPr indent="0" marL="0">
+                        <a:buNone/>
+                      </a:pPr>
+                      <a:r>
+                        <a:rPr lang="en-US" sz="1000" dirty="0">
+                          <a:solidFill>
+                            <a:srgbClr val="F2F6F8"/>
+                          </a:solidFill>
+                          <a:latin typeface="Calibri" pitchFamily="34" charset="0"/>
+                          <a:ea typeface="Calibri" pitchFamily="34" charset="-122"/>
+                          <a:cs typeface="Calibri" pitchFamily="34" charset="-120"/>
+                        </a:rPr>
+                        <a:t>2× return unique users vs. web + dáta o čítaní, ktoré web nedáva</a:t>
+                      </a:r>
+                      <a:endParaRPr lang="en-US" sz="1000" dirty="0">
+                        <a:latin typeface="Calibri" charset="0"/>
+                        <a:ea typeface="Calibri" charset="0"/>
+                        <a:cs typeface="Calibri" charset="0"/>
+                      </a:endParaRPr>
+                    </a:p>
+                  </a:txBody>
+                  <a:tcPr marL="73152" marR="73152" marT="73152" marB="73152" anchor="ctr">
+                    <a:lnL w="9525" cap="flat" cmpd="sng" algn="ctr">
+                      <a:solidFill>
+                        <a:srgbClr val="22303C"/>
+                      </a:solidFill>
+                      <a:prstDash val="solid"/>
+                      <a:round/>
+                      <a:headEnd type="none" w="med" len="med"/>
+                      <a:tailEnd type="none" w="med" len="med"/>
+                    </a:lnL>
+                    <a:lnR w="9525" cap="flat" cmpd="sng" algn="ctr">
+                      <a:solidFill>
+                        <a:srgbClr val="22303C"/>
+                      </a:solidFill>
+                      <a:prstDash val="solid"/>
+                      <a:round/>
+                      <a:headEnd type="none" w="med" len="med"/>
+                      <a:tailEnd type="none" w="med" len="med"/>
+                    </a:lnR>
+                    <a:lnT w="9525" cap="flat" cmpd="sng" algn="ctr">
+                      <a:solidFill>
+                        <a:srgbClr val="22303C"/>
+                      </a:solidFill>
+                      <a:prstDash val="solid"/>
+                      <a:round/>
+                      <a:headEnd type="none" w="med" len="med"/>
+                      <a:tailEnd type="none" w="med" len="med"/>
+                    </a:lnT>
+                    <a:lnB w="9525" cap="flat" cmpd="sng" algn="ctr">
+                      <a:solidFill>
+                        <a:srgbClr val="22303C"/>
+                      </a:solidFill>
+                      <a:prstDash val="solid"/>
+                      <a:round/>
+                      <a:headEnd type="none" w="med" len="med"/>
+                      <a:tailEnd type="none" w="med" len="med"/>
+                    </a:lnB>
+                    <a:solidFill>
+                      <a:srgbClr val="0F1822"/>
+                    </a:solidFill>
+                  </a:tcPr>
+                </a:tc>
+              </a:tr>
+              <a:tr h="822960">
+                <a:tc>
+                  <a:txBody>
+                    <a:bodyPr/>
+                    <a:lstStyle/>
+                    <a:p>
+                      <a:pPr indent="0" marL="0">
+                        <a:buNone/>
+                      </a:pPr>
+                      <a:r>
+                        <a:rPr lang="en-US" sz="1050" b="1" dirty="0">
+                          <a:solidFill>
+                            <a:srgbClr val="F2F6F8"/>
+                          </a:solidFill>
+                          <a:latin typeface="Calibri" pitchFamily="34" charset="0"/>
+                          <a:ea typeface="Calibri" pitchFamily="34" charset="-122"/>
+                          <a:cs typeface="Calibri" pitchFamily="34" charset="-120"/>
+                        </a:rPr>
+                        <a:t>Rozhodovací bod</a:t>
+                      </a:r>
+                      <a:endParaRPr lang="en-US" sz="1050" dirty="0">
+                        <a:latin typeface="Calibri" charset="0"/>
+                        <a:ea typeface="Calibri" charset="0"/>
+                        <a:cs typeface="Calibri" charset="0"/>
+                      </a:endParaRPr>
+                    </a:p>
+                  </a:txBody>
+                  <a:tcPr marL="73152" marR="73152" marT="73152" marB="73152" anchor="ctr">
+                    <a:lnL w="9525" cap="flat" cmpd="sng" algn="ctr">
+                      <a:solidFill>
+                        <a:srgbClr val="22303C"/>
+                      </a:solidFill>
+                      <a:prstDash val="solid"/>
+                      <a:round/>
+                      <a:headEnd type="none" w="med" len="med"/>
+                      <a:tailEnd type="none" w="med" len="med"/>
+                    </a:lnL>
+                    <a:lnR w="9525" cap="flat" cmpd="sng" algn="ctr">
+                      <a:solidFill>
+                        <a:srgbClr val="22303C"/>
+                      </a:solidFill>
+                      <a:prstDash val="solid"/>
+                      <a:round/>
+                      <a:headEnd type="none" w="med" len="med"/>
+                      <a:tailEnd type="none" w="med" len="med"/>
+                    </a:lnR>
+                    <a:lnT w="9525" cap="flat" cmpd="sng" algn="ctr">
+                      <a:solidFill>
+                        <a:srgbClr val="22303C"/>
+                      </a:solidFill>
+                      <a:prstDash val="solid"/>
+                      <a:round/>
+                      <a:headEnd type="none" w="med" len="med"/>
+                      <a:tailEnd type="none" w="med" len="med"/>
+                    </a:lnT>
+                    <a:lnB w="9525" cap="flat" cmpd="sng" algn="ctr">
+                      <a:solidFill>
+                        <a:srgbClr val="22303C"/>
+                      </a:solidFill>
+                      <a:prstDash val="solid"/>
+                      <a:round/>
+                      <a:headEnd type="none" w="med" len="med"/>
+                      <a:tailEnd type="none" w="med" len="med"/>
+                    </a:lnB>
+                    <a:solidFill>
+                      <a:srgbClr val="0F1822"/>
+                    </a:solidFill>
+                  </a:tcPr>
+                </a:tc>
+                <a:tc>
+                  <a:txBody>
+                    <a:bodyPr/>
+                    <a:lstStyle/>
+                    <a:p>
+                      <a:pPr indent="0" marL="0">
+                        <a:buNone/>
+                      </a:pPr>
+                      <a:r>
+                        <a:rPr lang="en-US" sz="1000" dirty="0">
+                          <a:solidFill>
+                            <a:srgbClr val="39D98A"/>
+                          </a:solidFill>
+                          <a:latin typeface="Calibri" pitchFamily="34" charset="0"/>
+                          <a:ea typeface="Calibri" pitchFamily="34" charset="-122"/>
+                          <a:cs typeface="Calibri" pitchFamily="34" charset="-120"/>
+                        </a:rPr>
+                        <a:t>vracajú sa ľudia na Insight of the day? Ak nie, formát prerábame alebo končíme.</a:t>
+                      </a:r>
+                      <a:endParaRPr lang="en-US" sz="1000" dirty="0">
+                        <a:latin typeface="Calibri" charset="0"/>
+                        <a:ea typeface="Calibri" charset="0"/>
+                        <a:cs typeface="Calibri" charset="0"/>
+                      </a:endParaRPr>
+                    </a:p>
+                  </a:txBody>
+                  <a:tcPr marL="73152" marR="73152" marT="73152" marB="73152" anchor="ctr">
+                    <a:lnL w="9525" cap="flat" cmpd="sng" algn="ctr">
+                      <a:solidFill>
+                        <a:srgbClr val="22303C"/>
+                      </a:solidFill>
+                      <a:prstDash val="solid"/>
+                      <a:round/>
+                      <a:headEnd type="none" w="med" len="med"/>
+                      <a:tailEnd type="none" w="med" len="med"/>
+                    </a:lnL>
+                    <a:lnR w="9525" cap="flat" cmpd="sng" algn="ctr">
+                      <a:solidFill>
+                        <a:srgbClr val="22303C"/>
+                      </a:solidFill>
+                      <a:prstDash val="solid"/>
+                      <a:round/>
+                      <a:headEnd type="none" w="med" len="med"/>
+                      <a:tailEnd type="none" w="med" len="med"/>
+                    </a:lnR>
+                    <a:lnT w="9525" cap="flat" cmpd="sng" algn="ctr">
+                      <a:solidFill>
+                        <a:srgbClr val="22303C"/>
+                      </a:solidFill>
+                      <a:prstDash val="solid"/>
+                      <a:round/>
+                      <a:headEnd type="none" w="med" len="med"/>
+                      <a:tailEnd type="none" w="med" len="med"/>
+                    </a:lnT>
+                    <a:lnB w="9525" cap="flat" cmpd="sng" algn="ctr">
+                      <a:solidFill>
+                        <a:srgbClr val="22303C"/>
+                      </a:solidFill>
+                      <a:prstDash val="solid"/>
+                      <a:round/>
+                      <a:headEnd type="none" w="med" len="med"/>
+                      <a:tailEnd type="none" w="med" len="med"/>
+                    </a:lnB>
+                    <a:solidFill>
+                      <a:srgbClr val="0F1822"/>
+                    </a:solidFill>
+                  </a:tcPr>
+                </a:tc>
+                <a:tc>
+                  <a:txBody>
+                    <a:bodyPr/>
+                    <a:lstStyle/>
+                    <a:p>
+                      <a:pPr indent="0" marL="0">
+                        <a:buNone/>
+                      </a:pPr>
+                      <a:r>
+                        <a:rPr lang="en-US" sz="1000" dirty="0">
+                          <a:solidFill>
+                            <a:srgbClr val="39D98A"/>
+                          </a:solidFill>
+                          <a:latin typeface="Calibri" pitchFamily="34" charset="0"/>
+                          <a:ea typeface="Calibri" pitchFamily="34" charset="-122"/>
+                          <a:cs typeface="Calibri" pitchFamily="34" charset="-120"/>
+                        </a:rPr>
+                        <a:t>drží denná návratnosť a rastie po launchi MVP?</a:t>
+                      </a:r>
+                      <a:endParaRPr lang="en-US" sz="1000" dirty="0">
+                        <a:latin typeface="Calibri" charset="0"/>
+                        <a:ea typeface="Calibri" charset="0"/>
+                        <a:cs typeface="Calibri" charset="0"/>
+                      </a:endParaRPr>
+                    </a:p>
+                  </a:txBody>
+                  <a:tcPr marL="73152" marR="73152" marT="73152" marB="73152" anchor="ctr">
+                    <a:lnL w="9525" cap="flat" cmpd="sng" algn="ctr">
+                      <a:solidFill>
+                        <a:srgbClr val="22303C"/>
+                      </a:solidFill>
+                      <a:prstDash val="solid"/>
+                      <a:round/>
+                      <a:headEnd type="none" w="med" len="med"/>
+                      <a:tailEnd type="none" w="med" len="med"/>
+                    </a:lnL>
+                    <a:lnR w="9525" cap="flat" cmpd="sng" algn="ctr">
+                      <a:solidFill>
+                        <a:srgbClr val="22303C"/>
+                      </a:solidFill>
+                      <a:prstDash val="solid"/>
+                      <a:round/>
+                      <a:headEnd type="none" w="med" len="med"/>
+                      <a:tailEnd type="none" w="med" len="med"/>
+                    </a:lnR>
+                    <a:lnT w="9525" cap="flat" cmpd="sng" algn="ctr">
+                      <a:solidFill>
+                        <a:srgbClr val="22303C"/>
+                      </a:solidFill>
+                      <a:prstDash val="solid"/>
+                      <a:round/>
+                      <a:headEnd type="none" w="med" len="med"/>
+                      <a:tailEnd type="none" w="med" len="med"/>
+                    </a:lnT>
+                    <a:lnB w="9525" cap="flat" cmpd="sng" algn="ctr">
+                      <a:solidFill>
+                        <a:srgbClr val="22303C"/>
+                      </a:solidFill>
+                      <a:prstDash val="solid"/>
+                      <a:round/>
+                      <a:headEnd type="none" w="med" len="med"/>
+                      <a:tailEnd type="none" w="med" len="med"/>
+                    </a:lnB>
+                    <a:solidFill>
+                      <a:srgbClr val="0F1822"/>
+                    </a:solidFill>
+                  </a:tcPr>
+                </a:tc>
+                <a:tc>
+                  <a:txBody>
+                    <a:bodyPr/>
+                    <a:lstStyle/>
+                    <a:p>
+                      <a:pPr indent="0" marL="0">
+                        <a:buNone/>
+                      </a:pPr>
+                      <a:r>
+                        <a:rPr lang="en-US" sz="1000" dirty="0">
+                          <a:solidFill>
+                            <a:srgbClr val="39D98A"/>
+                          </a:solidFill>
+                          <a:latin typeface="Calibri" pitchFamily="34" charset="0"/>
+                          <a:ea typeface="Calibri" pitchFamily="34" charset="-122"/>
+                          <a:cs typeface="Calibri" pitchFamily="34" charset="-120"/>
+                        </a:rPr>
+                        <a:t>je Blinks kanál s vlastnou monetizáciou — alebo len feature webu?</a:t>
+                      </a:r>
+                      <a:endParaRPr lang="en-US" sz="1000" dirty="0">
+                        <a:latin typeface="Calibri" charset="0"/>
+                        <a:ea typeface="Calibri" charset="0"/>
+                        <a:cs typeface="Calibri" charset="0"/>
+                      </a:endParaRPr>
+                    </a:p>
+                  </a:txBody>
+                  <a:tcPr marL="73152" marR="73152" marT="73152" marB="73152" anchor="ctr">
+                    <a:lnL w="9525" cap="flat" cmpd="sng" algn="ctr">
+                      <a:solidFill>
+                        <a:srgbClr val="22303C"/>
+                      </a:solidFill>
+                      <a:prstDash val="solid"/>
+                      <a:round/>
+                      <a:headEnd type="none" w="med" len="med"/>
+                      <a:tailEnd type="none" w="med" len="med"/>
+                    </a:lnL>
+                    <a:lnR w="9525" cap="flat" cmpd="sng" algn="ctr">
+                      <a:solidFill>
+                        <a:srgbClr val="22303C"/>
+                      </a:solidFill>
+                      <a:prstDash val="solid"/>
+                      <a:round/>
+                      <a:headEnd type="none" w="med" len="med"/>
+                      <a:tailEnd type="none" w="med" len="med"/>
+                    </a:lnR>
+                    <a:lnT w="9525" cap="flat" cmpd="sng" algn="ctr">
+                      <a:solidFill>
+                        <a:srgbClr val="22303C"/>
+                      </a:solidFill>
+                      <a:prstDash val="solid"/>
+                      <a:round/>
+                      <a:headEnd type="none" w="med" len="med"/>
+                      <a:tailEnd type="none" w="med" len="med"/>
+                    </a:lnT>
+                    <a:lnB w="9525" cap="flat" cmpd="sng" algn="ctr">
+                      <a:solidFill>
+                        <a:srgbClr val="22303C"/>
+                      </a:solidFill>
+                      <a:prstDash val="solid"/>
+                      <a:round/>
+                      <a:headEnd type="none" w="med" len="med"/>
+                      <a:tailEnd type="none" w="med" len="med"/>
+                    </a:lnB>
+                    <a:solidFill>
+                      <a:srgbClr val="0F1822"/>
+                    </a:solidFill>
+                  </a:tcPr>
+                </a:tc>
+              </a:tr>
+            </a:tbl>
+          </a:graphicData>
+        </a:graphic>
+      </p:graphicFrame>
+      <p:sp>
+        <p:nvSpPr>
+          <p:cNvPr id="7" name="Text 4"/>
           <p:cNvSpPr txBox="1"/>
           <p:nvPr/>
         </p:nvSpPr>
         <p:spPr>
           <a:xfrm>
-            <a:off x="896112" y="2697480"/>
-            <a:ext cx="4800600" cy="2011680"/>
+            <a:off x="566928" y="6355080"/>
+            <a:ext cx="11064240" cy="320040"/>
           </a:xfrm>
           <a:prstGeom prst="rect">
             <a:avLst/>
@@ -13478,338 +18218,21 @@
           <a:bodyPr wrap="square" lIns="0" tIns="0" rIns="0" bIns="0" rtlCol="0" anchor="ctr"/>
           <a:lstStyle/>
           <a:p>
-            <a:pPr marL="342900" indent="-342900">
-              <a:spcAft>
-                <a:spcPts val="700"/>
-              </a:spcAft>
-              <a:buSzPct val="100000"/>
-              <a:buChar char="–"/>
-            </a:pPr>
-            <a:r>
-              <a:rPr lang="en-US" sz="1250" b="1" dirty="0">
-                <a:solidFill>
-                  <a:srgbClr val="F2F6F8"/>
+            <a:pPr indent="0" marL="0">
+              <a:buNone/>
+            </a:pPr>
+            <a:r>
+              <a:rPr lang="en-US" sz="1100" i="1" dirty="0">
+                <a:solidFill>
+                  <a:srgbClr val="8DA2B2"/>
                 </a:solidFill>
                 <a:latin typeface="Calibri" pitchFamily="34" charset="0"/>
                 <a:ea typeface="Calibri" pitchFamily="34" charset="-122"/>
                 <a:cs typeface="Calibri" pitchFamily="34" charset="-120"/>
               </a:rPr>
-              <a:t>ja — part-time</a:t>
-            </a:r>
-            <a:endParaRPr lang="en-US" sz="1250" dirty="0"/>
-          </a:p>
-          <a:p>
-            <a:pPr marL="342900" indent="-342900">
-              <a:spcAft>
-                <a:spcPts val="700"/>
-              </a:spcAft>
-              <a:buSzPct val="100000"/>
-              <a:buChar char="–"/>
-            </a:pPr>
-            <a:r>
-              <a:rPr lang="en-US" sz="1250" b="1" dirty="0">
-                <a:solidFill>
-                  <a:srgbClr val="F2F6F8"/>
-                </a:solidFill>
-                <a:latin typeface="Calibri" pitchFamily="34" charset="0"/>
-                <a:ea typeface="Calibri" pitchFamily="34" charset="-122"/>
-                <a:cs typeface="Calibri" pitchFamily="34" charset="-120"/>
-              </a:rPr>
-              <a:t>softvér, ktorý (zatiaľ) platím ja</a:t>
-            </a:r>
-            <a:endParaRPr lang="en-US" sz="1250" dirty="0"/>
-          </a:p>
-          <a:p>
-            <a:pPr marL="342900" indent="-342900">
-              <a:spcAft>
-                <a:spcPts val="700"/>
-              </a:spcAft>
-              <a:buSzPct val="100000"/>
-              <a:buChar char="–"/>
-            </a:pPr>
-            <a:r>
-              <a:rPr lang="en-US" sz="1250" b="1" dirty="0">
-                <a:solidFill>
-                  <a:srgbClr val="F2F6F8"/>
-                </a:solidFill>
-                <a:latin typeface="Calibri" pitchFamily="34" charset="0"/>
-                <a:ea typeface="Calibri" pitchFamily="34" charset="-122"/>
-                <a:cs typeface="Calibri" pitchFamily="34" charset="-120"/>
-              </a:rPr>
-              <a:t>infra rádovo desiatky €/mes.</a:t>
-            </a:r>
-            <a:endParaRPr lang="en-US" sz="1250" dirty="0"/>
-          </a:p>
-          <a:p>
-            <a:pPr marL="342900" indent="-342900">
-              <a:spcAft>
-                <a:spcPts val="700"/>
-              </a:spcAft>
-              <a:buSzPct val="100000"/>
-              <a:buChar char="–"/>
-            </a:pPr>
-            <a:r>
-              <a:rPr lang="en-US" sz="1250" dirty="0">
-                <a:solidFill>
-                  <a:srgbClr val="F2F6F8"/>
-                </a:solidFill>
-                <a:latin typeface="Calibri" pitchFamily="34" charset="0"/>
-                <a:ea typeface="Calibri" pitchFamily="34" charset="-122"/>
-                <a:cs typeface="Calibri" pitchFamily="34" charset="-120"/>
-              </a:rPr>
-              <a:t>prípadne part-time vývojár — ak sa k tomu dopracujeme a bude to dávať zmysel (najskôr Peritora a Splato)</a:t>
-            </a:r>
-            <a:endParaRPr lang="en-US" sz="1250" dirty="0"/>
-          </a:p>
-        </p:txBody>
-      </p:sp>
-      <p:sp>
-        <p:nvSpPr>
-          <p:cNvPr id="8" name="Shape 6"/>
-          <p:cNvSpPr/>
-          <p:nvPr/>
-        </p:nvSpPr>
-        <p:spPr>
-          <a:xfrm>
-            <a:off x="6190488" y="2011680"/>
-            <a:ext cx="5440680" cy="3063240"/>
-          </a:xfrm>
-          <a:prstGeom prst="roundRect">
-            <a:avLst>
-              <a:gd name="adj" fmla="val 2090"/>
-            </a:avLst>
-          </a:prstGeom>
-          <a:solidFill>
-            <a:srgbClr val="111C26"/>
-          </a:solidFill>
-          <a:ln w="12700">
-            <a:solidFill>
-              <a:srgbClr val="263A4C"/>
-            </a:solidFill>
-            <a:prstDash val="solid"/>
-          </a:ln>
-        </p:spPr>
-      </p:sp>
-      <p:sp>
-        <p:nvSpPr>
-          <p:cNvPr id="9" name="Text 7"/>
-          <p:cNvSpPr txBox="1"/>
-          <p:nvPr/>
-        </p:nvSpPr>
-        <p:spPr>
-          <a:xfrm>
-            <a:off x="6519672" y="2286000"/>
-            <a:ext cx="4754880" cy="256032"/>
-          </a:xfrm>
-          <a:prstGeom prst="rect">
-            <a:avLst/>
-          </a:prstGeom>
-          <a:noFill/>
-          <a:ln/>
-        </p:spPr>
-        <p:txBody>
-          <a:bodyPr wrap="square" lIns="0" tIns="0" rIns="0" bIns="0" rtlCol="0" anchor="ctr"/>
-          <a:lstStyle/>
-          <a:p>
-            <a:pPr algn="l" indent="0" marL="0">
-              <a:buNone/>
-            </a:pPr>
-            <a:r>
-              <a:rPr lang="en-US" sz="950" b="1" spc="250" kern="0" dirty="0">
-                <a:solidFill>
-                  <a:srgbClr val="F2B33D"/>
-                </a:solidFill>
-                <a:latin typeface="Calibri" pitchFamily="34" charset="0"/>
-                <a:ea typeface="Calibri" pitchFamily="34" charset="-122"/>
-                <a:cs typeface="Calibri" pitchFamily="34" charset="-120"/>
-              </a:rPr>
-              <a:t>NAJHORŠÍ SCENÁR PRI JEDNOM PILOTE</a:t>
-            </a:r>
-            <a:endParaRPr lang="en-US" sz="950" dirty="0"/>
-          </a:p>
-        </p:txBody>
-      </p:sp>
-      <p:sp>
-        <p:nvSpPr>
-          <p:cNvPr id="10" name="Text 8"/>
-          <p:cNvSpPr txBox="1"/>
-          <p:nvPr/>
-        </p:nvSpPr>
-        <p:spPr>
-          <a:xfrm>
-            <a:off x="6519672" y="2697480"/>
-            <a:ext cx="4800600" cy="502920"/>
-          </a:xfrm>
-          <a:prstGeom prst="rect">
-            <a:avLst/>
-          </a:prstGeom>
-          <a:noFill/>
-          <a:ln/>
-        </p:spPr>
-        <p:txBody>
-          <a:bodyPr wrap="square" lIns="0" tIns="0" rIns="0" bIns="0" rtlCol="0" anchor="ctr"/>
-          <a:lstStyle/>
-          <a:p>
-            <a:pPr indent="0" marL="0">
-              <a:buNone/>
-            </a:pPr>
-            <a:r>
-              <a:rPr lang="en-US" sz="2000" b="1" dirty="0">
-                <a:solidFill>
-                  <a:srgbClr val="F2F6F8"/>
-                </a:solidFill>
-                <a:latin typeface="Cambria" pitchFamily="34" charset="0"/>
-                <a:ea typeface="Cambria" pitchFamily="34" charset="-122"/>
-                <a:cs typeface="Cambria" pitchFamily="34" charset="-120"/>
-              </a:rPr>
-              <a:t>~4 týždne práce</a:t>
-            </a:r>
-            <a:pPr indent="0" marL="0">
-              <a:buNone/>
-            </a:pPr>
-            <a:r>
-              <a:rPr lang="en-US" sz="1300" dirty="0">
-                <a:solidFill>
-                  <a:srgbClr val="8DA2B2"/>
-                </a:solidFill>
-                <a:latin typeface="Calibri" pitchFamily="34" charset="0"/>
-                <a:ea typeface="Calibri" pitchFamily="34" charset="-122"/>
-                <a:cs typeface="Calibri" pitchFamily="34" charset="-120"/>
-              </a:rPr>
-              <a:t>  a poznatok, že to nefunguje.</a:t>
-            </a:r>
-            <a:endParaRPr lang="en-US" sz="2000" dirty="0"/>
-          </a:p>
-        </p:txBody>
-      </p:sp>
-      <p:sp>
-        <p:nvSpPr>
-          <p:cNvPr id="11" name="Text 9"/>
-          <p:cNvSpPr txBox="1"/>
-          <p:nvPr/>
-        </p:nvSpPr>
-        <p:spPr>
-          <a:xfrm>
-            <a:off x="6519672" y="3291840"/>
-            <a:ext cx="4800600" cy="1463040"/>
-          </a:xfrm>
-          <a:prstGeom prst="rect">
-            <a:avLst/>
-          </a:prstGeom>
-          <a:noFill/>
-          <a:ln/>
-        </p:spPr>
-        <p:txBody>
-          <a:bodyPr wrap="square" lIns="0" tIns="0" rIns="0" bIns="0" rtlCol="0" anchor="ctr"/>
-          <a:lstStyle/>
-          <a:p>
-            <a:pPr indent="0" marL="0">
-              <a:lnSpc>
-                <a:spcPct val="115000"/>
-              </a:lnSpc>
-              <a:buNone/>
-            </a:pPr>
-            <a:r>
-              <a:rPr lang="en-US" sz="1250" dirty="0">
-                <a:solidFill>
-                  <a:srgbClr val="8DA2B2"/>
-                </a:solidFill>
-                <a:latin typeface="Calibri" pitchFamily="34" charset="0"/>
-                <a:ea typeface="Calibri" pitchFamily="34" charset="-122"/>
-                <a:cs typeface="Calibri" pitchFamily="34" charset="-120"/>
-              </a:rPr>
-              <a:t>Presne to sa teraz stalo s AI MoneyMastermind — a je to v poriadku, na to gate slúži.</a:t>
-            </a:r>
-            <a:endParaRPr lang="en-US" sz="1250" dirty="0"/>
-          </a:p>
-          <a:p>
-            <a:pPr indent="0" marL="0">
-              <a:lnSpc>
-                <a:spcPct val="115000"/>
-              </a:lnSpc>
-              <a:buNone/>
-            </a:pPr>
-            <a:endParaRPr lang="en-US" sz="1250" dirty="0"/>
-          </a:p>
-          <a:p>
-            <a:pPr indent="0" marL="0">
-              <a:lnSpc>
-                <a:spcPct val="115000"/>
-              </a:lnSpc>
-              <a:buNone/>
-            </a:pPr>
-            <a:r>
-              <a:rPr lang="en-US" sz="1250" b="1" dirty="0">
-                <a:solidFill>
-                  <a:srgbClr val="F2F6F8"/>
-                </a:solidFill>
-                <a:latin typeface="Calibri" pitchFamily="34" charset="0"/>
-                <a:ea typeface="Calibri" pitchFamily="34" charset="-122"/>
-                <a:cs typeface="Calibri" pitchFamily="34" charset="-120"/>
-              </a:rPr>
-              <a:t>Žiadny rozpočet. Žiadny tím. Žiadny záväzok.</a:t>
-            </a:r>
-            <a:endParaRPr lang="en-US" sz="1250" dirty="0"/>
-          </a:p>
-        </p:txBody>
-      </p:sp>
-      <p:sp>
-        <p:nvSpPr>
-          <p:cNvPr id="12" name="Text 10"/>
-          <p:cNvSpPr txBox="1"/>
-          <p:nvPr/>
-        </p:nvSpPr>
-        <p:spPr>
-          <a:xfrm>
-            <a:off x="566928" y="5440680"/>
-            <a:ext cx="11064240" cy="1005840"/>
-          </a:xfrm>
-          <a:prstGeom prst="rect">
-            <a:avLst/>
-          </a:prstGeom>
-          <a:noFill/>
-          <a:ln/>
-        </p:spPr>
-        <p:txBody>
-          <a:bodyPr wrap="square" lIns="0" tIns="0" rIns="0" bIns="0" rtlCol="0" anchor="ctr"/>
-          <a:lstStyle/>
-          <a:p>
-            <a:pPr algn="ctr" indent="0" marL="0">
-              <a:lnSpc>
-                <a:spcPct val="125000"/>
-              </a:lnSpc>
-              <a:buNone/>
-            </a:pPr>
-            <a:r>
-              <a:rPr lang="en-US" sz="1400" dirty="0">
-                <a:solidFill>
-                  <a:srgbClr val="8DA2B2"/>
-                </a:solidFill>
-                <a:latin typeface="Calibri" pitchFamily="34" charset="0"/>
-                <a:ea typeface="Calibri" pitchFamily="34" charset="-122"/>
-                <a:cs typeface="Calibri" pitchFamily="34" charset="-120"/>
-              </a:rPr>
-              <a:t>Low-cost, high-upside: riziko na strane firmy je nulové, upside je celý náš.
-</a:t>
-            </a:r>
-            <a:pPr algn="ctr" indent="0" marL="0">
-              <a:lnSpc>
-                <a:spcPct val="125000"/>
-              </a:lnSpc>
-              <a:buNone/>
-            </a:pPr>
-            <a:r>
-              <a:rPr lang="en-US" sz="1900" b="1" dirty="0">
-                <a:solidFill>
-                  <a:srgbClr val="F2F6F8"/>
-                </a:solidFill>
-                <a:latin typeface="Cambria" pitchFamily="34" charset="0"/>
-                <a:ea typeface="Cambria" pitchFamily="34" charset="-122"/>
-                <a:cs typeface="Cambria" pitchFamily="34" charset="-120"/>
-              </a:rPr>
-              <a:t>Nerozhodujeme o investícii — rozhodujeme o tom, či dáme priestor pokusu.</a:t>
-            </a:r>
-            <a:endParaRPr lang="en-US" sz="1400" dirty="0"/>
+              <a:t>Champion: Adriana H. · realizácia Vivo · realizovateľnosť 3/5 · poradie: Insight of the day → MVP</a:t>
+            </a:r>
+            <a:endParaRPr lang="en-US" sz="1100" dirty="0"/>
           </a:p>
         </p:txBody>
       </p:sp>
@@ -13931,7 +18354,7 @@
                 <a:ea typeface="Calibri" pitchFamily="34" charset="-122"/>
                 <a:cs typeface="Calibri" pitchFamily="34" charset="-120"/>
               </a:rPr>
-              <a:t>SPÔSOB PRÁCE</a:t>
+              <a:t>PLÁN PROJEKTU 3 / 4  ·  NOVÝ RASTOVÝ PRODUKT</a:t>
             </a:r>
             <a:endParaRPr lang="en-US" sz="1050" dirty="0"/>
           </a:p>
@@ -13962,7 +18385,7 @@
               <a:buNone/>
             </a:pPr>
             <a:r>
-              <a:rPr lang="en-US" sz="2800" b="1" dirty="0">
+              <a:rPr lang="en-US" sz="2600" b="1" dirty="0">
                 <a:solidFill>
                   <a:srgbClr val="F2F6F8"/>
                 </a:solidFill>
@@ -13970,49 +18393,22 @@
                 <a:ea typeface="Cambria" pitchFamily="34" charset="-122"/>
                 <a:cs typeface="Cambria" pitchFamily="34" charset="-120"/>
               </a:rPr>
-              <a:t>Skúšať — iterovať — škálovať — zahodiť</a:t>
-            </a:r>
-            <a:endParaRPr lang="en-US" sz="2800" dirty="0"/>
+              <a:t>Splato — plán a rozhodovacie body</a:t>
+            </a:r>
+            <a:endParaRPr lang="en-US" sz="2600" dirty="0"/>
           </a:p>
         </p:txBody>
       </p:sp>
       <p:sp>
         <p:nvSpPr>
-          <p:cNvPr id="5" name="Shape 3"/>
-          <p:cNvSpPr/>
+          <p:cNvPr id="5" name="Text 3"/>
+          <p:cNvSpPr txBox="1"/>
           <p:nvPr/>
         </p:nvSpPr>
         <p:spPr>
           <a:xfrm>
-            <a:off x="566928" y="2103120"/>
-            <a:ext cx="2624328" cy="1920240"/>
-          </a:xfrm>
-          <a:prstGeom prst="roundRect">
-            <a:avLst>
-              <a:gd name="adj" fmla="val 3333"/>
-            </a:avLst>
-          </a:prstGeom>
-          <a:solidFill>
-            <a:srgbClr val="111C26"/>
-          </a:solidFill>
-          <a:ln w="12700">
-            <a:solidFill>
-              <a:srgbClr val="263A4C"/>
-            </a:solidFill>
-            <a:prstDash val="solid"/>
-          </a:ln>
-        </p:spPr>
-      </p:sp>
-      <p:sp>
-        <p:nvSpPr>
-          <p:cNvPr id="6" name="Text 4"/>
-          <p:cNvSpPr txBox="1"/>
-          <p:nvPr/>
-        </p:nvSpPr>
-        <p:spPr>
-          <a:xfrm>
-            <a:off x="795528" y="2286000"/>
-            <a:ext cx="548640" cy="365760"/>
+            <a:off x="566928" y="1810512"/>
+            <a:ext cx="11064240" cy="548640"/>
           </a:xfrm>
           <a:prstGeom prst="rect">
             <a:avLst/>
@@ -14025,33 +18421,1444 @@
           <a:lstStyle/>
           <a:p>
             <a:pPr indent="0" marL="0">
-              <a:buNone/>
-            </a:pPr>
-            <a:r>
-              <a:rPr lang="en-US" sz="1700" b="1" dirty="0">
-                <a:solidFill>
-                  <a:srgbClr val="5C7183"/>
-                </a:solidFill>
-                <a:latin typeface="Cambria" pitchFamily="34" charset="0"/>
-                <a:ea typeface="Cambria" pitchFamily="34" charset="-122"/>
-                <a:cs typeface="Cambria" pitchFamily="34" charset="-120"/>
-              </a:rPr>
-              <a:t>1</a:t>
-            </a:r>
-            <a:endParaRPr lang="en-US" sz="1700" dirty="0"/>
+              <a:lnSpc>
+                <a:spcPct val="105000"/>
+              </a:lnSpc>
+              <a:buNone/>
+            </a:pPr>
+            <a:r>
+              <a:rPr lang="en-US" sz="1200" b="1" dirty="0">
+                <a:solidFill>
+                  <a:srgbClr val="F2F6F8"/>
+                </a:solidFill>
+                <a:latin typeface="Calibri" pitchFamily="34" charset="0"/>
+                <a:ea typeface="Calibri" pitchFamily="34" charset="-122"/>
+                <a:cs typeface="Calibri" pitchFamily="34" charset="-120"/>
+              </a:rPr>
+              <a:t>Východisko: </a:t>
+            </a:r>
+            <a:pPr indent="0" marL="0">
+              <a:lnSpc>
+                <a:spcPct val="105000"/>
+              </a:lnSpc>
+              <a:buNone/>
+            </a:pPr>
+            <a:r>
+              <a:rPr lang="en-US" sz="1200" dirty="0">
+                <a:solidFill>
+                  <a:srgbClr val="8DA2B2"/>
+                </a:solidFill>
+                <a:latin typeface="Calibri" pitchFamily="34" charset="0"/>
+                <a:ea typeface="Calibri" pitchFamily="34" charset="-122"/>
+                <a:cs typeface="Calibri" pitchFamily="34" charset="-120"/>
+              </a:rPr>
+              <a:t>kreátori a influenceri riešia príjmy z viacerých platforiem, faktúry, zmluvy a dane ručne. Fintech povaha nástroja znamená vysokú valuáciu — a zároveň najvyššiu náročnosť z celého radu.</a:t>
+            </a:r>
+            <a:endParaRPr lang="en-US" sz="1200" dirty="0"/>
           </a:p>
         </p:txBody>
       </p:sp>
-      <p:sp>
-        <p:nvSpPr>
-          <p:cNvPr id="7" name="Text 5"/>
+      <p:graphicFrame>
+        <p:nvGraphicFramePr>
+          <p:cNvPr id="10" name="Table 0"/>
+          <p:cNvGraphicFramePr>
+            <a:graphicFrameLocks noGrp="1"/>
+          </p:cNvGraphicFramePr>
+          <p:nvPr>
+            <p:extLst>
+              <p:ext uri="{D42A27DB-BD31-4B8C-83A1-F6EECF244321}">
+                <p14:modId xmlns:p14="http://schemas.microsoft.com/office/powerpoint/2010/main" val="1579011935"/>
+              </p:ext>
+            </p:extLst>
+          </p:nvPr>
+        </p:nvGraphicFramePr>
+        <p:xfrm>
+          <a:off x="566928" y="2487168"/>
+          <a:ext cx="11064240" cy="914400"/>
+        </p:xfrm>
+        <a:graphic>
+          <a:graphicData uri="http://schemas.openxmlformats.org/drawingml/2006/table">
+            <a:tbl>
+              <a:tblPr/>
+              <a:tblGrid>
+                <a:gridCol w="1371600"/>
+                <a:gridCol w="3200400"/>
+                <a:gridCol w="3200400"/>
+                <a:gridCol w="3291840"/>
+              </a:tblGrid>
+              <a:tr h="411480">
+                <a:tc>
+                  <a:txBody>
+                    <a:bodyPr/>
+                    <a:lstStyle/>
+                    <a:p>
+                      <a:pPr indent="0" marL="0">
+                        <a:buNone/>
+                      </a:pPr>
+                      <a:endParaRPr lang="en-US" sz="1000" dirty="0">
+                        <a:latin typeface="Calibri" charset="0"/>
+                        <a:ea typeface="Calibri" charset="0"/>
+                        <a:cs typeface="Calibri" charset="0"/>
+                      </a:endParaRPr>
+                    </a:p>
+                  </a:txBody>
+                  <a:tcPr marL="73152" marR="73152" marT="73152" marB="73152" anchor="ctr">
+                    <a:lnL w="9525" cap="flat" cmpd="sng" algn="ctr">
+                      <a:solidFill>
+                        <a:srgbClr val="22303C"/>
+                      </a:solidFill>
+                      <a:prstDash val="solid"/>
+                      <a:round/>
+                      <a:headEnd type="none" w="med" len="med"/>
+                      <a:tailEnd type="none" w="med" len="med"/>
+                    </a:lnL>
+                    <a:lnR w="9525" cap="flat" cmpd="sng" algn="ctr">
+                      <a:solidFill>
+                        <a:srgbClr val="22303C"/>
+                      </a:solidFill>
+                      <a:prstDash val="solid"/>
+                      <a:round/>
+                      <a:headEnd type="none" w="med" len="med"/>
+                      <a:tailEnd type="none" w="med" len="med"/>
+                    </a:lnR>
+                    <a:lnT w="9525" cap="flat" cmpd="sng" algn="ctr">
+                      <a:solidFill>
+                        <a:srgbClr val="22303C"/>
+                      </a:solidFill>
+                      <a:prstDash val="solid"/>
+                      <a:round/>
+                      <a:headEnd type="none" w="med" len="med"/>
+                      <a:tailEnd type="none" w="med" len="med"/>
+                    </a:lnT>
+                    <a:lnB w="9525" cap="flat" cmpd="sng" algn="ctr">
+                      <a:solidFill>
+                        <a:srgbClr val="22303C"/>
+                      </a:solidFill>
+                      <a:prstDash val="solid"/>
+                      <a:round/>
+                      <a:headEnd type="none" w="med" len="med"/>
+                      <a:tailEnd type="none" w="med" len="med"/>
+                    </a:lnB>
+                    <a:solidFill>
+                      <a:srgbClr val="16242F"/>
+                    </a:solidFill>
+                  </a:tcPr>
+                </a:tc>
+                <a:tc>
+                  <a:txBody>
+                    <a:bodyPr/>
+                    <a:lstStyle/>
+                    <a:p>
+                      <a:pPr indent="0" marL="0">
+                        <a:buNone/>
+                      </a:pPr>
+                      <a:r>
+                        <a:rPr lang="en-US" sz="1000" b="1" spc="150" kern="0" dirty="0">
+                          <a:solidFill>
+                            <a:srgbClr val="3FB6E8"/>
+                          </a:solidFill>
+                          <a:latin typeface="Calibri" pitchFamily="34" charset="0"/>
+                          <a:ea typeface="Calibri" pitchFamily="34" charset="-122"/>
+                          <a:cs typeface="Calibri" pitchFamily="34" charset="-120"/>
+                        </a:rPr>
+                        <a:t>TERAZ (0–8 TÝŽDŇOV)</a:t>
+                      </a:r>
+                      <a:endParaRPr lang="en-US" sz="1000" dirty="0">
+                        <a:latin typeface="Calibri" charset="0"/>
+                        <a:ea typeface="Calibri" charset="0"/>
+                        <a:cs typeface="Calibri" charset="0"/>
+                      </a:endParaRPr>
+                    </a:p>
+                  </a:txBody>
+                  <a:tcPr marL="73152" marR="73152" marT="73152" marB="73152" anchor="ctr">
+                    <a:lnL w="9525" cap="flat" cmpd="sng" algn="ctr">
+                      <a:solidFill>
+                        <a:srgbClr val="22303C"/>
+                      </a:solidFill>
+                      <a:prstDash val="solid"/>
+                      <a:round/>
+                      <a:headEnd type="none" w="med" len="med"/>
+                      <a:tailEnd type="none" w="med" len="med"/>
+                    </a:lnL>
+                    <a:lnR w="9525" cap="flat" cmpd="sng" algn="ctr">
+                      <a:solidFill>
+                        <a:srgbClr val="22303C"/>
+                      </a:solidFill>
+                      <a:prstDash val="solid"/>
+                      <a:round/>
+                      <a:headEnd type="none" w="med" len="med"/>
+                      <a:tailEnd type="none" w="med" len="med"/>
+                    </a:lnR>
+                    <a:lnT w="9525" cap="flat" cmpd="sng" algn="ctr">
+                      <a:solidFill>
+                        <a:srgbClr val="22303C"/>
+                      </a:solidFill>
+                      <a:prstDash val="solid"/>
+                      <a:round/>
+                      <a:headEnd type="none" w="med" len="med"/>
+                      <a:tailEnd type="none" w="med" len="med"/>
+                    </a:lnT>
+                    <a:lnB w="9525" cap="flat" cmpd="sng" algn="ctr">
+                      <a:solidFill>
+                        <a:srgbClr val="22303C"/>
+                      </a:solidFill>
+                      <a:prstDash val="solid"/>
+                      <a:round/>
+                      <a:headEnd type="none" w="med" len="med"/>
+                      <a:tailEnd type="none" w="med" len="med"/>
+                    </a:lnB>
+                    <a:solidFill>
+                      <a:srgbClr val="16242F"/>
+                    </a:solidFill>
+                  </a:tcPr>
+                </a:tc>
+                <a:tc>
+                  <a:txBody>
+                    <a:bodyPr/>
+                    <a:lstStyle/>
+                    <a:p>
+                      <a:pPr indent="0" marL="0">
+                        <a:buNone/>
+                      </a:pPr>
+                      <a:r>
+                        <a:rPr lang="en-US" sz="1000" b="1" spc="150" kern="0" dirty="0">
+                          <a:solidFill>
+                            <a:srgbClr val="3FB6E8"/>
+                          </a:solidFill>
+                          <a:latin typeface="Calibri" pitchFamily="34" charset="0"/>
+                          <a:ea typeface="Calibri" pitchFamily="34" charset="-122"/>
+                          <a:cs typeface="Calibri" pitchFamily="34" charset="-120"/>
+                        </a:rPr>
+                        <a:t>6 MESIACOV</a:t>
+                      </a:r>
+                      <a:endParaRPr lang="en-US" sz="1000" dirty="0">
+                        <a:latin typeface="Calibri" charset="0"/>
+                        <a:ea typeface="Calibri" charset="0"/>
+                        <a:cs typeface="Calibri" charset="0"/>
+                      </a:endParaRPr>
+                    </a:p>
+                  </a:txBody>
+                  <a:tcPr marL="73152" marR="73152" marT="73152" marB="73152" anchor="ctr">
+                    <a:lnL w="9525" cap="flat" cmpd="sng" algn="ctr">
+                      <a:solidFill>
+                        <a:srgbClr val="22303C"/>
+                      </a:solidFill>
+                      <a:prstDash val="solid"/>
+                      <a:round/>
+                      <a:headEnd type="none" w="med" len="med"/>
+                      <a:tailEnd type="none" w="med" len="med"/>
+                    </a:lnL>
+                    <a:lnR w="9525" cap="flat" cmpd="sng" algn="ctr">
+                      <a:solidFill>
+                        <a:srgbClr val="22303C"/>
+                      </a:solidFill>
+                      <a:prstDash val="solid"/>
+                      <a:round/>
+                      <a:headEnd type="none" w="med" len="med"/>
+                      <a:tailEnd type="none" w="med" len="med"/>
+                    </a:lnR>
+                    <a:lnT w="9525" cap="flat" cmpd="sng" algn="ctr">
+                      <a:solidFill>
+                        <a:srgbClr val="22303C"/>
+                      </a:solidFill>
+                      <a:prstDash val="solid"/>
+                      <a:round/>
+                      <a:headEnd type="none" w="med" len="med"/>
+                      <a:tailEnd type="none" w="med" len="med"/>
+                    </a:lnT>
+                    <a:lnB w="9525" cap="flat" cmpd="sng" algn="ctr">
+                      <a:solidFill>
+                        <a:srgbClr val="22303C"/>
+                      </a:solidFill>
+                      <a:prstDash val="solid"/>
+                      <a:round/>
+                      <a:headEnd type="none" w="med" len="med"/>
+                      <a:tailEnd type="none" w="med" len="med"/>
+                    </a:lnB>
+                    <a:solidFill>
+                      <a:srgbClr val="16242F"/>
+                    </a:solidFill>
+                  </a:tcPr>
+                </a:tc>
+                <a:tc>
+                  <a:txBody>
+                    <a:bodyPr/>
+                    <a:lstStyle/>
+                    <a:p>
+                      <a:pPr indent="0" marL="0">
+                        <a:buNone/>
+                      </a:pPr>
+                      <a:r>
+                        <a:rPr lang="en-US" sz="1000" b="1" spc="150" kern="0" dirty="0">
+                          <a:solidFill>
+                            <a:srgbClr val="3FB6E8"/>
+                          </a:solidFill>
+                          <a:latin typeface="Calibri" pitchFamily="34" charset="0"/>
+                          <a:ea typeface="Calibri" pitchFamily="34" charset="-122"/>
+                          <a:cs typeface="Calibri" pitchFamily="34" charset="-120"/>
+                        </a:rPr>
+                        <a:t>12 MESIACOV</a:t>
+                      </a:r>
+                      <a:endParaRPr lang="en-US" sz="1000" dirty="0">
+                        <a:latin typeface="Calibri" charset="0"/>
+                        <a:ea typeface="Calibri" charset="0"/>
+                        <a:cs typeface="Calibri" charset="0"/>
+                      </a:endParaRPr>
+                    </a:p>
+                  </a:txBody>
+                  <a:tcPr marL="73152" marR="73152" marT="73152" marB="73152" anchor="ctr">
+                    <a:lnL w="9525" cap="flat" cmpd="sng" algn="ctr">
+                      <a:solidFill>
+                        <a:srgbClr val="22303C"/>
+                      </a:solidFill>
+                      <a:prstDash val="solid"/>
+                      <a:round/>
+                      <a:headEnd type="none" w="med" len="med"/>
+                      <a:tailEnd type="none" w="med" len="med"/>
+                    </a:lnL>
+                    <a:lnR w="9525" cap="flat" cmpd="sng" algn="ctr">
+                      <a:solidFill>
+                        <a:srgbClr val="22303C"/>
+                      </a:solidFill>
+                      <a:prstDash val="solid"/>
+                      <a:round/>
+                      <a:headEnd type="none" w="med" len="med"/>
+                      <a:tailEnd type="none" w="med" len="med"/>
+                    </a:lnR>
+                    <a:lnT w="9525" cap="flat" cmpd="sng" algn="ctr">
+                      <a:solidFill>
+                        <a:srgbClr val="22303C"/>
+                      </a:solidFill>
+                      <a:prstDash val="solid"/>
+                      <a:round/>
+                      <a:headEnd type="none" w="med" len="med"/>
+                      <a:tailEnd type="none" w="med" len="med"/>
+                    </a:lnT>
+                    <a:lnB w="9525" cap="flat" cmpd="sng" algn="ctr">
+                      <a:solidFill>
+                        <a:srgbClr val="22303C"/>
+                      </a:solidFill>
+                      <a:prstDash val="solid"/>
+                      <a:round/>
+                      <a:headEnd type="none" w="med" len="med"/>
+                      <a:tailEnd type="none" w="med" len="med"/>
+                    </a:lnB>
+                    <a:solidFill>
+                      <a:srgbClr val="16242F"/>
+                    </a:solidFill>
+                  </a:tcPr>
+                </a:tc>
+              </a:tr>
+              <a:tr h="868680">
+                <a:tc>
+                  <a:txBody>
+                    <a:bodyPr/>
+                    <a:lstStyle/>
+                    <a:p>
+                      <a:pPr indent="0" marL="0">
+                        <a:buNone/>
+                      </a:pPr>
+                      <a:r>
+                        <a:rPr lang="en-US" sz="1050" b="1" dirty="0">
+                          <a:solidFill>
+                            <a:srgbClr val="F2F6F8"/>
+                          </a:solidFill>
+                          <a:latin typeface="Calibri" pitchFamily="34" charset="0"/>
+                          <a:ea typeface="Calibri" pitchFamily="34" charset="-122"/>
+                          <a:cs typeface="Calibri" pitchFamily="34" charset="-120"/>
+                        </a:rPr>
+                        <a:t>Tržby</a:t>
+                      </a:r>
+                      <a:endParaRPr lang="en-US" sz="1050" dirty="0">
+                        <a:latin typeface="Calibri" charset="0"/>
+                        <a:ea typeface="Calibri" charset="0"/>
+                        <a:cs typeface="Calibri" charset="0"/>
+                      </a:endParaRPr>
+                    </a:p>
+                  </a:txBody>
+                  <a:tcPr marL="73152" marR="73152" marT="73152" marB="73152" anchor="ctr">
+                    <a:lnL w="9525" cap="flat" cmpd="sng" algn="ctr">
+                      <a:solidFill>
+                        <a:srgbClr val="22303C"/>
+                      </a:solidFill>
+                      <a:prstDash val="solid"/>
+                      <a:round/>
+                      <a:headEnd type="none" w="med" len="med"/>
+                      <a:tailEnd type="none" w="med" len="med"/>
+                    </a:lnL>
+                    <a:lnR w="9525" cap="flat" cmpd="sng" algn="ctr">
+                      <a:solidFill>
+                        <a:srgbClr val="22303C"/>
+                      </a:solidFill>
+                      <a:prstDash val="solid"/>
+                      <a:round/>
+                      <a:headEnd type="none" w="med" len="med"/>
+                      <a:tailEnd type="none" w="med" len="med"/>
+                    </a:lnR>
+                    <a:lnT w="9525" cap="flat" cmpd="sng" algn="ctr">
+                      <a:solidFill>
+                        <a:srgbClr val="22303C"/>
+                      </a:solidFill>
+                      <a:prstDash val="solid"/>
+                      <a:round/>
+                      <a:headEnd type="none" w="med" len="med"/>
+                      <a:tailEnd type="none" w="med" len="med"/>
+                    </a:lnT>
+                    <a:lnB w="9525" cap="flat" cmpd="sng" algn="ctr">
+                      <a:solidFill>
+                        <a:srgbClr val="22303C"/>
+                      </a:solidFill>
+                      <a:prstDash val="solid"/>
+                      <a:round/>
+                      <a:headEnd type="none" w="med" len="med"/>
+                      <a:tailEnd type="none" w="med" len="med"/>
+                    </a:lnB>
+                    <a:solidFill>
+                      <a:srgbClr val="0F1822"/>
+                    </a:solidFill>
+                  </a:tcPr>
+                </a:tc>
+                <a:tc>
+                  <a:txBody>
+                    <a:bodyPr/>
+                    <a:lstStyle/>
+                    <a:p>
+                      <a:pPr indent="0" marL="0">
+                        <a:buNone/>
+                      </a:pPr>
+                      <a:r>
+                        <a:rPr lang="en-US" sz="1000" dirty="0">
+                          <a:solidFill>
+                            <a:srgbClr val="8DA2B2"/>
+                          </a:solidFill>
+                          <a:latin typeface="Calibri" pitchFamily="34" charset="0"/>
+                          <a:ea typeface="Calibri" pitchFamily="34" charset="-122"/>
+                          <a:cs typeface="Calibri" pitchFamily="34" charset="-120"/>
+                        </a:rPr>
+                        <a:t>0 € — prieskum, nie predaj</a:t>
+                      </a:r>
+                      <a:endParaRPr lang="en-US" sz="1000" dirty="0">
+                        <a:latin typeface="Calibri" charset="0"/>
+                        <a:ea typeface="Calibri" charset="0"/>
+                        <a:cs typeface="Calibri" charset="0"/>
+                      </a:endParaRPr>
+                    </a:p>
+                  </a:txBody>
+                  <a:tcPr marL="73152" marR="73152" marT="73152" marB="73152" anchor="ctr">
+                    <a:lnL w="9525" cap="flat" cmpd="sng" algn="ctr">
+                      <a:solidFill>
+                        <a:srgbClr val="22303C"/>
+                      </a:solidFill>
+                      <a:prstDash val="solid"/>
+                      <a:round/>
+                      <a:headEnd type="none" w="med" len="med"/>
+                      <a:tailEnd type="none" w="med" len="med"/>
+                    </a:lnL>
+                    <a:lnR w="9525" cap="flat" cmpd="sng" algn="ctr">
+                      <a:solidFill>
+                        <a:srgbClr val="22303C"/>
+                      </a:solidFill>
+                      <a:prstDash val="solid"/>
+                      <a:round/>
+                      <a:headEnd type="none" w="med" len="med"/>
+                      <a:tailEnd type="none" w="med" len="med"/>
+                    </a:lnR>
+                    <a:lnT w="9525" cap="flat" cmpd="sng" algn="ctr">
+                      <a:solidFill>
+                        <a:srgbClr val="22303C"/>
+                      </a:solidFill>
+                      <a:prstDash val="solid"/>
+                      <a:round/>
+                      <a:headEnd type="none" w="med" len="med"/>
+                      <a:tailEnd type="none" w="med" len="med"/>
+                    </a:lnT>
+                    <a:lnB w="9525" cap="flat" cmpd="sng" algn="ctr">
+                      <a:solidFill>
+                        <a:srgbClr val="22303C"/>
+                      </a:solidFill>
+                      <a:prstDash val="solid"/>
+                      <a:round/>
+                      <a:headEnd type="none" w="med" len="med"/>
+                      <a:tailEnd type="none" w="med" len="med"/>
+                    </a:lnB>
+                    <a:solidFill>
+                      <a:srgbClr val="0F1822"/>
+                    </a:solidFill>
+                  </a:tcPr>
+                </a:tc>
+                <a:tc>
+                  <a:txBody>
+                    <a:bodyPr/>
+                    <a:lstStyle/>
+                    <a:p>
+                      <a:pPr indent="0" marL="0">
+                        <a:buNone/>
+                      </a:pPr>
+                      <a:r>
+                        <a:rPr lang="en-US" sz="1000" dirty="0">
+                          <a:solidFill>
+                            <a:srgbClr val="F2F6F8"/>
+                          </a:solidFill>
+                          <a:latin typeface="Calibri" pitchFamily="34" charset="0"/>
+                          <a:ea typeface="Calibri" pitchFamily="34" charset="-122"/>
+                          <a:cs typeface="Calibri" pitchFamily="34" charset="-120"/>
+                        </a:rPr>
+                        <a:t>prví platiaci kreátori na MVP 1 (launch október?) — predplatné; číslo až z prieskumu ochoty platiť</a:t>
+                      </a:r>
+                      <a:endParaRPr lang="en-US" sz="1000" dirty="0">
+                        <a:latin typeface="Calibri" charset="0"/>
+                        <a:ea typeface="Calibri" charset="0"/>
+                        <a:cs typeface="Calibri" charset="0"/>
+                      </a:endParaRPr>
+                    </a:p>
+                  </a:txBody>
+                  <a:tcPr marL="73152" marR="73152" marT="73152" marB="73152" anchor="ctr">
+                    <a:lnL w="9525" cap="flat" cmpd="sng" algn="ctr">
+                      <a:solidFill>
+                        <a:srgbClr val="22303C"/>
+                      </a:solidFill>
+                      <a:prstDash val="solid"/>
+                      <a:round/>
+                      <a:headEnd type="none" w="med" len="med"/>
+                      <a:tailEnd type="none" w="med" len="med"/>
+                    </a:lnL>
+                    <a:lnR w="9525" cap="flat" cmpd="sng" algn="ctr">
+                      <a:solidFill>
+                        <a:srgbClr val="22303C"/>
+                      </a:solidFill>
+                      <a:prstDash val="solid"/>
+                      <a:round/>
+                      <a:headEnd type="none" w="med" len="med"/>
+                      <a:tailEnd type="none" w="med" len="med"/>
+                    </a:lnR>
+                    <a:lnT w="9525" cap="flat" cmpd="sng" algn="ctr">
+                      <a:solidFill>
+                        <a:srgbClr val="22303C"/>
+                      </a:solidFill>
+                      <a:prstDash val="solid"/>
+                      <a:round/>
+                      <a:headEnd type="none" w="med" len="med"/>
+                      <a:tailEnd type="none" w="med" len="med"/>
+                    </a:lnT>
+                    <a:lnB w="9525" cap="flat" cmpd="sng" algn="ctr">
+                      <a:solidFill>
+                        <a:srgbClr val="22303C"/>
+                      </a:solidFill>
+                      <a:prstDash val="solid"/>
+                      <a:round/>
+                      <a:headEnd type="none" w="med" len="med"/>
+                      <a:tailEnd type="none" w="med" len="med"/>
+                    </a:lnB>
+                    <a:solidFill>
+                      <a:srgbClr val="0F1822"/>
+                    </a:solidFill>
+                  </a:tcPr>
+                </a:tc>
+                <a:tc>
+                  <a:txBody>
+                    <a:bodyPr/>
+                    <a:lstStyle/>
+                    <a:p>
+                      <a:pPr indent="0" marL="0">
+                        <a:buNone/>
+                      </a:pPr>
+                      <a:r>
+                        <a:rPr lang="en-US" sz="1000" dirty="0">
+                          <a:solidFill>
+                            <a:srgbClr val="F2F6F8"/>
+                          </a:solidFill>
+                          <a:latin typeface="Calibri" pitchFamily="34" charset="0"/>
+                          <a:ea typeface="Calibri" pitchFamily="34" charset="-122"/>
+                          <a:cs typeface="Calibri" pitchFamily="34" charset="-120"/>
+                        </a:rPr>
+                        <a:t>trajektória k potenciálu až 0,5 M € ARR pri plnom rozsahu — fintech násobok pri exite</a:t>
+                      </a:r>
+                      <a:endParaRPr lang="en-US" sz="1000" dirty="0">
+                        <a:latin typeface="Calibri" charset="0"/>
+                        <a:ea typeface="Calibri" charset="0"/>
+                        <a:cs typeface="Calibri" charset="0"/>
+                      </a:endParaRPr>
+                    </a:p>
+                  </a:txBody>
+                  <a:tcPr marL="73152" marR="73152" marT="73152" marB="73152" anchor="ctr">
+                    <a:lnL w="9525" cap="flat" cmpd="sng" algn="ctr">
+                      <a:solidFill>
+                        <a:srgbClr val="22303C"/>
+                      </a:solidFill>
+                      <a:prstDash val="solid"/>
+                      <a:round/>
+                      <a:headEnd type="none" w="med" len="med"/>
+                      <a:tailEnd type="none" w="med" len="med"/>
+                    </a:lnL>
+                    <a:lnR w="9525" cap="flat" cmpd="sng" algn="ctr">
+                      <a:solidFill>
+                        <a:srgbClr val="22303C"/>
+                      </a:solidFill>
+                      <a:prstDash val="solid"/>
+                      <a:round/>
+                      <a:headEnd type="none" w="med" len="med"/>
+                      <a:tailEnd type="none" w="med" len="med"/>
+                    </a:lnR>
+                    <a:lnT w="9525" cap="flat" cmpd="sng" algn="ctr">
+                      <a:solidFill>
+                        <a:srgbClr val="22303C"/>
+                      </a:solidFill>
+                      <a:prstDash val="solid"/>
+                      <a:round/>
+                      <a:headEnd type="none" w="med" len="med"/>
+                      <a:tailEnd type="none" w="med" len="med"/>
+                    </a:lnT>
+                    <a:lnB w="9525" cap="flat" cmpd="sng" algn="ctr">
+                      <a:solidFill>
+                        <a:srgbClr val="22303C"/>
+                      </a:solidFill>
+                      <a:prstDash val="solid"/>
+                      <a:round/>
+                      <a:headEnd type="none" w="med" len="med"/>
+                      <a:tailEnd type="none" w="med" len="med"/>
+                    </a:lnB>
+                    <a:solidFill>
+                      <a:srgbClr val="0F1822"/>
+                    </a:solidFill>
+                  </a:tcPr>
+                </a:tc>
+              </a:tr>
+              <a:tr h="822960">
+                <a:tc>
+                  <a:txBody>
+                    <a:bodyPr/>
+                    <a:lstStyle/>
+                    <a:p>
+                      <a:pPr indent="0" marL="0">
+                        <a:buNone/>
+                      </a:pPr>
+                      <a:r>
+                        <a:rPr lang="en-US" sz="1050" b="1" dirty="0">
+                          <a:solidFill>
+                            <a:srgbClr val="F2F6F8"/>
+                          </a:solidFill>
+                          <a:latin typeface="Calibri" pitchFamily="34" charset="0"/>
+                          <a:ea typeface="Calibri" pitchFamily="34" charset="-122"/>
+                          <a:cs typeface="Calibri" pitchFamily="34" charset="-120"/>
+                        </a:rPr>
+                        <a:t>Náklad</a:t>
+                      </a:r>
+                      <a:endParaRPr lang="en-US" sz="1050" dirty="0">
+                        <a:latin typeface="Calibri" charset="0"/>
+                        <a:ea typeface="Calibri" charset="0"/>
+                        <a:cs typeface="Calibri" charset="0"/>
+                      </a:endParaRPr>
+                    </a:p>
+                  </a:txBody>
+                  <a:tcPr marL="73152" marR="73152" marT="73152" marB="73152" anchor="ctr">
+                    <a:lnL w="9525" cap="flat" cmpd="sng" algn="ctr">
+                      <a:solidFill>
+                        <a:srgbClr val="22303C"/>
+                      </a:solidFill>
+                      <a:prstDash val="solid"/>
+                      <a:round/>
+                      <a:headEnd type="none" w="med" len="med"/>
+                      <a:tailEnd type="none" w="med" len="med"/>
+                    </a:lnL>
+                    <a:lnR w="9525" cap="flat" cmpd="sng" algn="ctr">
+                      <a:solidFill>
+                        <a:srgbClr val="22303C"/>
+                      </a:solidFill>
+                      <a:prstDash val="solid"/>
+                      <a:round/>
+                      <a:headEnd type="none" w="med" len="med"/>
+                      <a:tailEnd type="none" w="med" len="med"/>
+                    </a:lnR>
+                    <a:lnT w="9525" cap="flat" cmpd="sng" algn="ctr">
+                      <a:solidFill>
+                        <a:srgbClr val="22303C"/>
+                      </a:solidFill>
+                      <a:prstDash val="solid"/>
+                      <a:round/>
+                      <a:headEnd type="none" w="med" len="med"/>
+                      <a:tailEnd type="none" w="med" len="med"/>
+                    </a:lnT>
+                    <a:lnB w="9525" cap="flat" cmpd="sng" algn="ctr">
+                      <a:solidFill>
+                        <a:srgbClr val="22303C"/>
+                      </a:solidFill>
+                      <a:prstDash val="solid"/>
+                      <a:round/>
+                      <a:headEnd type="none" w="med" len="med"/>
+                      <a:tailEnd type="none" w="med" len="med"/>
+                    </a:lnB>
+                    <a:solidFill>
+                      <a:srgbClr val="0F1822"/>
+                    </a:solidFill>
+                  </a:tcPr>
+                </a:tc>
+                <a:tc>
+                  <a:txBody>
+                    <a:bodyPr/>
+                    <a:lstStyle/>
+                    <a:p>
+                      <a:pPr indent="0" marL="0">
+                        <a:buNone/>
+                      </a:pPr>
+                      <a:r>
+                        <a:rPr lang="en-US" sz="1000" dirty="0">
+                          <a:solidFill>
+                            <a:srgbClr val="F2F6F8"/>
+                          </a:solidFill>
+                          <a:latin typeface="Calibri" pitchFamily="34" charset="0"/>
+                          <a:ea typeface="Calibri" pitchFamily="34" charset="-122"/>
+                          <a:cs typeface="Calibri" pitchFamily="34" charset="-120"/>
+                        </a:rPr>
+                        <a:t>môj čas + prieskum medzi influencermi s Mirkou Paník</a:t>
+                      </a:r>
+                      <a:endParaRPr lang="en-US" sz="1000" dirty="0">
+                        <a:latin typeface="Calibri" charset="0"/>
+                        <a:ea typeface="Calibri" charset="0"/>
+                        <a:cs typeface="Calibri" charset="0"/>
+                      </a:endParaRPr>
+                    </a:p>
+                  </a:txBody>
+                  <a:tcPr marL="73152" marR="73152" marT="73152" marB="73152" anchor="ctr">
+                    <a:lnL w="9525" cap="flat" cmpd="sng" algn="ctr">
+                      <a:solidFill>
+                        <a:srgbClr val="22303C"/>
+                      </a:solidFill>
+                      <a:prstDash val="solid"/>
+                      <a:round/>
+                      <a:headEnd type="none" w="med" len="med"/>
+                      <a:tailEnd type="none" w="med" len="med"/>
+                    </a:lnL>
+                    <a:lnR w="9525" cap="flat" cmpd="sng" algn="ctr">
+                      <a:solidFill>
+                        <a:srgbClr val="22303C"/>
+                      </a:solidFill>
+                      <a:prstDash val="solid"/>
+                      <a:round/>
+                      <a:headEnd type="none" w="med" len="med"/>
+                      <a:tailEnd type="none" w="med" len="med"/>
+                    </a:lnR>
+                    <a:lnT w="9525" cap="flat" cmpd="sng" algn="ctr">
+                      <a:solidFill>
+                        <a:srgbClr val="22303C"/>
+                      </a:solidFill>
+                      <a:prstDash val="solid"/>
+                      <a:round/>
+                      <a:headEnd type="none" w="med" len="med"/>
+                      <a:tailEnd type="none" w="med" len="med"/>
+                    </a:lnT>
+                    <a:lnB w="9525" cap="flat" cmpd="sng" algn="ctr">
+                      <a:solidFill>
+                        <a:srgbClr val="22303C"/>
+                      </a:solidFill>
+                      <a:prstDash val="solid"/>
+                      <a:round/>
+                      <a:headEnd type="none" w="med" len="med"/>
+                      <a:tailEnd type="none" w="med" len="med"/>
+                    </a:lnB>
+                    <a:solidFill>
+                      <a:srgbClr val="0F1822"/>
+                    </a:solidFill>
+                  </a:tcPr>
+                </a:tc>
+                <a:tc>
+                  <a:txBody>
+                    <a:bodyPr/>
+                    <a:lstStyle/>
+                    <a:p>
+                      <a:pPr indent="0" marL="0">
+                        <a:buNone/>
+                      </a:pPr>
+                      <a:r>
+                        <a:rPr lang="en-US" sz="1000" dirty="0">
+                          <a:solidFill>
+                            <a:srgbClr val="F2F6F8"/>
+                          </a:solidFill>
+                          <a:latin typeface="Calibri" pitchFamily="34" charset="0"/>
+                          <a:ea typeface="Calibri" pitchFamily="34" charset="-122"/>
+                          <a:cs typeface="Calibri" pitchFamily="34" charset="-120"/>
+                        </a:rPr>
+                        <a:t>MVP (realizovateľnosť 3) + prípadný part-time vývojár — najskôr tu a v Peritore</a:t>
+                      </a:r>
+                      <a:endParaRPr lang="en-US" sz="1000" dirty="0">
+                        <a:latin typeface="Calibri" charset="0"/>
+                        <a:ea typeface="Calibri" charset="0"/>
+                        <a:cs typeface="Calibri" charset="0"/>
+                      </a:endParaRPr>
+                    </a:p>
+                  </a:txBody>
+                  <a:tcPr marL="73152" marR="73152" marT="73152" marB="73152" anchor="ctr">
+                    <a:lnL w="9525" cap="flat" cmpd="sng" algn="ctr">
+                      <a:solidFill>
+                        <a:srgbClr val="22303C"/>
+                      </a:solidFill>
+                      <a:prstDash val="solid"/>
+                      <a:round/>
+                      <a:headEnd type="none" w="med" len="med"/>
+                      <a:tailEnd type="none" w="med" len="med"/>
+                    </a:lnL>
+                    <a:lnR w="9525" cap="flat" cmpd="sng" algn="ctr">
+                      <a:solidFill>
+                        <a:srgbClr val="22303C"/>
+                      </a:solidFill>
+                      <a:prstDash val="solid"/>
+                      <a:round/>
+                      <a:headEnd type="none" w="med" len="med"/>
+                      <a:tailEnd type="none" w="med" len="med"/>
+                    </a:lnR>
+                    <a:lnT w="9525" cap="flat" cmpd="sng" algn="ctr">
+                      <a:solidFill>
+                        <a:srgbClr val="22303C"/>
+                      </a:solidFill>
+                      <a:prstDash val="solid"/>
+                      <a:round/>
+                      <a:headEnd type="none" w="med" len="med"/>
+                      <a:tailEnd type="none" w="med" len="med"/>
+                    </a:lnT>
+                    <a:lnB w="9525" cap="flat" cmpd="sng" algn="ctr">
+                      <a:solidFill>
+                        <a:srgbClr val="22303C"/>
+                      </a:solidFill>
+                      <a:prstDash val="solid"/>
+                      <a:round/>
+                      <a:headEnd type="none" w="med" len="med"/>
+                      <a:tailEnd type="none" w="med" len="med"/>
+                    </a:lnB>
+                    <a:solidFill>
+                      <a:srgbClr val="0F1822"/>
+                    </a:solidFill>
+                  </a:tcPr>
+                </a:tc>
+                <a:tc>
+                  <a:txBody>
+                    <a:bodyPr/>
+                    <a:lstStyle/>
+                    <a:p>
+                      <a:pPr indent="0" marL="0">
+                        <a:buNone/>
+                      </a:pPr>
+                      <a:r>
+                        <a:rPr lang="en-US" sz="1000" dirty="0">
+                          <a:solidFill>
+                            <a:srgbClr val="F2F6F8"/>
+                          </a:solidFill>
+                          <a:latin typeface="Calibri" pitchFamily="34" charset="0"/>
+                          <a:ea typeface="Calibri" pitchFamily="34" charset="-122"/>
+                          <a:cs typeface="Calibri" pitchFamily="34" charset="-120"/>
+                        </a:rPr>
+                        <a:t>plný rozsah (realizovateľnosť 1) len ak metriky sedia — jediný projekt radu, kde by rástol tím</a:t>
+                      </a:r>
+                      <a:endParaRPr lang="en-US" sz="1000" dirty="0">
+                        <a:latin typeface="Calibri" charset="0"/>
+                        <a:ea typeface="Calibri" charset="0"/>
+                        <a:cs typeface="Calibri" charset="0"/>
+                      </a:endParaRPr>
+                    </a:p>
+                  </a:txBody>
+                  <a:tcPr marL="73152" marR="73152" marT="73152" marB="73152" anchor="ctr">
+                    <a:lnL w="9525" cap="flat" cmpd="sng" algn="ctr">
+                      <a:solidFill>
+                        <a:srgbClr val="22303C"/>
+                      </a:solidFill>
+                      <a:prstDash val="solid"/>
+                      <a:round/>
+                      <a:headEnd type="none" w="med" len="med"/>
+                      <a:tailEnd type="none" w="med" len="med"/>
+                    </a:lnL>
+                    <a:lnR w="9525" cap="flat" cmpd="sng" algn="ctr">
+                      <a:solidFill>
+                        <a:srgbClr val="22303C"/>
+                      </a:solidFill>
+                      <a:prstDash val="solid"/>
+                      <a:round/>
+                      <a:headEnd type="none" w="med" len="med"/>
+                      <a:tailEnd type="none" w="med" len="med"/>
+                    </a:lnR>
+                    <a:lnT w="9525" cap="flat" cmpd="sng" algn="ctr">
+                      <a:solidFill>
+                        <a:srgbClr val="22303C"/>
+                      </a:solidFill>
+                      <a:prstDash val="solid"/>
+                      <a:round/>
+                      <a:headEnd type="none" w="med" len="med"/>
+                      <a:tailEnd type="none" w="med" len="med"/>
+                    </a:lnT>
+                    <a:lnB w="9525" cap="flat" cmpd="sng" algn="ctr">
+                      <a:solidFill>
+                        <a:srgbClr val="22303C"/>
+                      </a:solidFill>
+                      <a:prstDash val="solid"/>
+                      <a:round/>
+                      <a:headEnd type="none" w="med" len="med"/>
+                      <a:tailEnd type="none" w="med" len="med"/>
+                    </a:lnB>
+                    <a:solidFill>
+                      <a:srgbClr val="0F1822"/>
+                    </a:solidFill>
+                  </a:tcPr>
+                </a:tc>
+              </a:tr>
+              <a:tr h="822960">
+                <a:tc>
+                  <a:txBody>
+                    <a:bodyPr/>
+                    <a:lstStyle/>
+                    <a:p>
+                      <a:pPr indent="0" marL="0">
+                        <a:buNone/>
+                      </a:pPr>
+                      <a:r>
+                        <a:rPr lang="en-US" sz="1050" b="1" dirty="0">
+                          <a:solidFill>
+                            <a:srgbClr val="F2F6F8"/>
+                          </a:solidFill>
+                          <a:latin typeface="Calibri" pitchFamily="34" charset="0"/>
+                          <a:ea typeface="Calibri" pitchFamily="34" charset="-122"/>
+                          <a:cs typeface="Calibri" pitchFamily="34" charset="-120"/>
+                        </a:rPr>
+                        <a:t>Nefinančný prínos</a:t>
+                      </a:r>
+                      <a:endParaRPr lang="en-US" sz="1050" dirty="0">
+                        <a:latin typeface="Calibri" charset="0"/>
+                        <a:ea typeface="Calibri" charset="0"/>
+                        <a:cs typeface="Calibri" charset="0"/>
+                      </a:endParaRPr>
+                    </a:p>
+                  </a:txBody>
+                  <a:tcPr marL="73152" marR="73152" marT="73152" marB="73152" anchor="ctr">
+                    <a:lnL w="9525" cap="flat" cmpd="sng" algn="ctr">
+                      <a:solidFill>
+                        <a:srgbClr val="22303C"/>
+                      </a:solidFill>
+                      <a:prstDash val="solid"/>
+                      <a:round/>
+                      <a:headEnd type="none" w="med" len="med"/>
+                      <a:tailEnd type="none" w="med" len="med"/>
+                    </a:lnL>
+                    <a:lnR w="9525" cap="flat" cmpd="sng" algn="ctr">
+                      <a:solidFill>
+                        <a:srgbClr val="22303C"/>
+                      </a:solidFill>
+                      <a:prstDash val="solid"/>
+                      <a:round/>
+                      <a:headEnd type="none" w="med" len="med"/>
+                      <a:tailEnd type="none" w="med" len="med"/>
+                    </a:lnR>
+                    <a:lnT w="9525" cap="flat" cmpd="sng" algn="ctr">
+                      <a:solidFill>
+                        <a:srgbClr val="22303C"/>
+                      </a:solidFill>
+                      <a:prstDash val="solid"/>
+                      <a:round/>
+                      <a:headEnd type="none" w="med" len="med"/>
+                      <a:tailEnd type="none" w="med" len="med"/>
+                    </a:lnT>
+                    <a:lnB w="9525" cap="flat" cmpd="sng" algn="ctr">
+                      <a:solidFill>
+                        <a:srgbClr val="22303C"/>
+                      </a:solidFill>
+                      <a:prstDash val="solid"/>
+                      <a:round/>
+                      <a:headEnd type="none" w="med" len="med"/>
+                      <a:tailEnd type="none" w="med" len="med"/>
+                    </a:lnB>
+                    <a:solidFill>
+                      <a:srgbClr val="0F1822"/>
+                    </a:solidFill>
+                  </a:tcPr>
+                </a:tc>
+                <a:tc>
+                  <a:txBody>
+                    <a:bodyPr/>
+                    <a:lstStyle/>
+                    <a:p>
+                      <a:pPr indent="0" marL="0">
+                        <a:buNone/>
+                      </a:pPr>
+                      <a:r>
+                        <a:rPr lang="en-US" sz="1000" dirty="0">
+                          <a:solidFill>
+                            <a:srgbClr val="F2F6F8"/>
+                          </a:solidFill>
+                          <a:latin typeface="Calibri" pitchFamily="34" charset="0"/>
+                          <a:ea typeface="Calibri" pitchFamily="34" charset="-122"/>
+                          <a:cs typeface="Calibri" pitchFamily="34" charset="-120"/>
+                        </a:rPr>
+                        <a:t>dáta o potrebách kreátorskej ekonomiky, ktorú Forbes už pokrýva obsahovo</a:t>
+                      </a:r>
+                      <a:endParaRPr lang="en-US" sz="1000" dirty="0">
+                        <a:latin typeface="Calibri" charset="0"/>
+                        <a:ea typeface="Calibri" charset="0"/>
+                        <a:cs typeface="Calibri" charset="0"/>
+                      </a:endParaRPr>
+                    </a:p>
+                  </a:txBody>
+                  <a:tcPr marL="73152" marR="73152" marT="73152" marB="73152" anchor="ctr">
+                    <a:lnL w="9525" cap="flat" cmpd="sng" algn="ctr">
+                      <a:solidFill>
+                        <a:srgbClr val="22303C"/>
+                      </a:solidFill>
+                      <a:prstDash val="solid"/>
+                      <a:round/>
+                      <a:headEnd type="none" w="med" len="med"/>
+                      <a:tailEnd type="none" w="med" len="med"/>
+                    </a:lnL>
+                    <a:lnR w="9525" cap="flat" cmpd="sng" algn="ctr">
+                      <a:solidFill>
+                        <a:srgbClr val="22303C"/>
+                      </a:solidFill>
+                      <a:prstDash val="solid"/>
+                      <a:round/>
+                      <a:headEnd type="none" w="med" len="med"/>
+                      <a:tailEnd type="none" w="med" len="med"/>
+                    </a:lnR>
+                    <a:lnT w="9525" cap="flat" cmpd="sng" algn="ctr">
+                      <a:solidFill>
+                        <a:srgbClr val="22303C"/>
+                      </a:solidFill>
+                      <a:prstDash val="solid"/>
+                      <a:round/>
+                      <a:headEnd type="none" w="med" len="med"/>
+                      <a:tailEnd type="none" w="med" len="med"/>
+                    </a:lnT>
+                    <a:lnB w="9525" cap="flat" cmpd="sng" algn="ctr">
+                      <a:solidFill>
+                        <a:srgbClr val="22303C"/>
+                      </a:solidFill>
+                      <a:prstDash val="solid"/>
+                      <a:round/>
+                      <a:headEnd type="none" w="med" len="med"/>
+                      <a:tailEnd type="none" w="med" len="med"/>
+                    </a:lnB>
+                    <a:solidFill>
+                      <a:srgbClr val="0F1822"/>
+                    </a:solidFill>
+                  </a:tcPr>
+                </a:tc>
+                <a:tc>
+                  <a:txBody>
+                    <a:bodyPr/>
+                    <a:lstStyle/>
+                    <a:p>
+                      <a:pPr indent="0" marL="0">
+                        <a:buNone/>
+                      </a:pPr>
+                      <a:r>
+                        <a:rPr lang="en-US" sz="1000" dirty="0">
+                          <a:solidFill>
+                            <a:srgbClr val="F2F6F8"/>
+                          </a:solidFill>
+                          <a:latin typeface="Calibri" pitchFamily="34" charset="0"/>
+                          <a:ea typeface="Calibri" pitchFamily="34" charset="-122"/>
+                          <a:cs typeface="Calibri" pitchFamily="34" charset="-120"/>
+                        </a:rPr>
+                        <a:t>databáza kreátorov + vzťahy — distribučné aktívum</a:t>
+                      </a:r>
+                      <a:endParaRPr lang="en-US" sz="1000" dirty="0">
+                        <a:latin typeface="Calibri" charset="0"/>
+                        <a:ea typeface="Calibri" charset="0"/>
+                        <a:cs typeface="Calibri" charset="0"/>
+                      </a:endParaRPr>
+                    </a:p>
+                  </a:txBody>
+                  <a:tcPr marL="73152" marR="73152" marT="73152" marB="73152" anchor="ctr">
+                    <a:lnL w="9525" cap="flat" cmpd="sng" algn="ctr">
+                      <a:solidFill>
+                        <a:srgbClr val="22303C"/>
+                      </a:solidFill>
+                      <a:prstDash val="solid"/>
+                      <a:round/>
+                      <a:headEnd type="none" w="med" len="med"/>
+                      <a:tailEnd type="none" w="med" len="med"/>
+                    </a:lnL>
+                    <a:lnR w="9525" cap="flat" cmpd="sng" algn="ctr">
+                      <a:solidFill>
+                        <a:srgbClr val="22303C"/>
+                      </a:solidFill>
+                      <a:prstDash val="solid"/>
+                      <a:round/>
+                      <a:headEnd type="none" w="med" len="med"/>
+                      <a:tailEnd type="none" w="med" len="med"/>
+                    </a:lnR>
+                    <a:lnT w="9525" cap="flat" cmpd="sng" algn="ctr">
+                      <a:solidFill>
+                        <a:srgbClr val="22303C"/>
+                      </a:solidFill>
+                      <a:prstDash val="solid"/>
+                      <a:round/>
+                      <a:headEnd type="none" w="med" len="med"/>
+                      <a:tailEnd type="none" w="med" len="med"/>
+                    </a:lnT>
+                    <a:lnB w="9525" cap="flat" cmpd="sng" algn="ctr">
+                      <a:solidFill>
+                        <a:srgbClr val="22303C"/>
+                      </a:solidFill>
+                      <a:prstDash val="solid"/>
+                      <a:round/>
+                      <a:headEnd type="none" w="med" len="med"/>
+                      <a:tailEnd type="none" w="med" len="med"/>
+                    </a:lnB>
+                    <a:solidFill>
+                      <a:srgbClr val="0F1822"/>
+                    </a:solidFill>
+                  </a:tcPr>
+                </a:tc>
+                <a:tc>
+                  <a:txBody>
+                    <a:bodyPr/>
+                    <a:lstStyle/>
+                    <a:p>
+                      <a:pPr indent="0" marL="0">
+                        <a:buNone/>
+                      </a:pPr>
+                      <a:r>
+                        <a:rPr lang="en-US" sz="1000" dirty="0">
+                          <a:solidFill>
+                            <a:srgbClr val="F2F6F8"/>
+                          </a:solidFill>
+                          <a:latin typeface="Calibri" pitchFamily="34" charset="0"/>
+                          <a:ea typeface="Calibri" pitchFamily="34" charset="-122"/>
+                          <a:cs typeface="Calibri" pitchFamily="34" charset="-120"/>
+                        </a:rPr>
+                        <a:t>pozícia vo fintech segmente s vlastnou skupinou kupcov</a:t>
+                      </a:r>
+                      <a:endParaRPr lang="en-US" sz="1000" dirty="0">
+                        <a:latin typeface="Calibri" charset="0"/>
+                        <a:ea typeface="Calibri" charset="0"/>
+                        <a:cs typeface="Calibri" charset="0"/>
+                      </a:endParaRPr>
+                    </a:p>
+                  </a:txBody>
+                  <a:tcPr marL="73152" marR="73152" marT="73152" marB="73152" anchor="ctr">
+                    <a:lnL w="9525" cap="flat" cmpd="sng" algn="ctr">
+                      <a:solidFill>
+                        <a:srgbClr val="22303C"/>
+                      </a:solidFill>
+                      <a:prstDash val="solid"/>
+                      <a:round/>
+                      <a:headEnd type="none" w="med" len="med"/>
+                      <a:tailEnd type="none" w="med" len="med"/>
+                    </a:lnL>
+                    <a:lnR w="9525" cap="flat" cmpd="sng" algn="ctr">
+                      <a:solidFill>
+                        <a:srgbClr val="22303C"/>
+                      </a:solidFill>
+                      <a:prstDash val="solid"/>
+                      <a:round/>
+                      <a:headEnd type="none" w="med" len="med"/>
+                      <a:tailEnd type="none" w="med" len="med"/>
+                    </a:lnR>
+                    <a:lnT w="9525" cap="flat" cmpd="sng" algn="ctr">
+                      <a:solidFill>
+                        <a:srgbClr val="22303C"/>
+                      </a:solidFill>
+                      <a:prstDash val="solid"/>
+                      <a:round/>
+                      <a:headEnd type="none" w="med" len="med"/>
+                      <a:tailEnd type="none" w="med" len="med"/>
+                    </a:lnT>
+                    <a:lnB w="9525" cap="flat" cmpd="sng" algn="ctr">
+                      <a:solidFill>
+                        <a:srgbClr val="22303C"/>
+                      </a:solidFill>
+                      <a:prstDash val="solid"/>
+                      <a:round/>
+                      <a:headEnd type="none" w="med" len="med"/>
+                      <a:tailEnd type="none" w="med" len="med"/>
+                    </a:lnB>
+                    <a:solidFill>
+                      <a:srgbClr val="0F1822"/>
+                    </a:solidFill>
+                  </a:tcPr>
+                </a:tc>
+              </a:tr>
+              <a:tr h="822960">
+                <a:tc>
+                  <a:txBody>
+                    <a:bodyPr/>
+                    <a:lstStyle/>
+                    <a:p>
+                      <a:pPr indent="0" marL="0">
+                        <a:buNone/>
+                      </a:pPr>
+                      <a:r>
+                        <a:rPr lang="en-US" sz="1050" b="1" dirty="0">
+                          <a:solidFill>
+                            <a:srgbClr val="F2F6F8"/>
+                          </a:solidFill>
+                          <a:latin typeface="Calibri" pitchFamily="34" charset="0"/>
+                          <a:ea typeface="Calibri" pitchFamily="34" charset="-122"/>
+                          <a:cs typeface="Calibri" pitchFamily="34" charset="-120"/>
+                        </a:rPr>
+                        <a:t>Rozhodovací bod</a:t>
+                      </a:r>
+                      <a:endParaRPr lang="en-US" sz="1050" dirty="0">
+                        <a:latin typeface="Calibri" charset="0"/>
+                        <a:ea typeface="Calibri" charset="0"/>
+                        <a:cs typeface="Calibri" charset="0"/>
+                      </a:endParaRPr>
+                    </a:p>
+                  </a:txBody>
+                  <a:tcPr marL="73152" marR="73152" marT="73152" marB="73152" anchor="ctr">
+                    <a:lnL w="9525" cap="flat" cmpd="sng" algn="ctr">
+                      <a:solidFill>
+                        <a:srgbClr val="22303C"/>
+                      </a:solidFill>
+                      <a:prstDash val="solid"/>
+                      <a:round/>
+                      <a:headEnd type="none" w="med" len="med"/>
+                      <a:tailEnd type="none" w="med" len="med"/>
+                    </a:lnL>
+                    <a:lnR w="9525" cap="flat" cmpd="sng" algn="ctr">
+                      <a:solidFill>
+                        <a:srgbClr val="22303C"/>
+                      </a:solidFill>
+                      <a:prstDash val="solid"/>
+                      <a:round/>
+                      <a:headEnd type="none" w="med" len="med"/>
+                      <a:tailEnd type="none" w="med" len="med"/>
+                    </a:lnR>
+                    <a:lnT w="9525" cap="flat" cmpd="sng" algn="ctr">
+                      <a:solidFill>
+                        <a:srgbClr val="22303C"/>
+                      </a:solidFill>
+                      <a:prstDash val="solid"/>
+                      <a:round/>
+                      <a:headEnd type="none" w="med" len="med"/>
+                      <a:tailEnd type="none" w="med" len="med"/>
+                    </a:lnT>
+                    <a:lnB w="9525" cap="flat" cmpd="sng" algn="ctr">
+                      <a:solidFill>
+                        <a:srgbClr val="22303C"/>
+                      </a:solidFill>
+                      <a:prstDash val="solid"/>
+                      <a:round/>
+                      <a:headEnd type="none" w="med" len="med"/>
+                      <a:tailEnd type="none" w="med" len="med"/>
+                    </a:lnB>
+                    <a:solidFill>
+                      <a:srgbClr val="0F1822"/>
+                    </a:solidFill>
+                  </a:tcPr>
+                </a:tc>
+                <a:tc>
+                  <a:txBody>
+                    <a:bodyPr/>
+                    <a:lstStyle/>
+                    <a:p>
+                      <a:pPr indent="0" marL="0">
+                        <a:buNone/>
+                      </a:pPr>
+                      <a:r>
+                        <a:rPr lang="en-US" sz="1000" dirty="0">
+                          <a:solidFill>
+                            <a:srgbClr val="39D98A"/>
+                          </a:solidFill>
+                          <a:latin typeface="Calibri" pitchFamily="34" charset="0"/>
+                          <a:ea typeface="Calibri" pitchFamily="34" charset="-122"/>
+                          <a:cs typeface="Calibri" pitchFamily="34" charset="-120"/>
+                        </a:rPr>
+                        <a:t>potvrdí prieskum ochotu platiť? Ak nie, MVP nestaviame.</a:t>
+                      </a:r>
+                      <a:endParaRPr lang="en-US" sz="1000" dirty="0">
+                        <a:latin typeface="Calibri" charset="0"/>
+                        <a:ea typeface="Calibri" charset="0"/>
+                        <a:cs typeface="Calibri" charset="0"/>
+                      </a:endParaRPr>
+                    </a:p>
+                  </a:txBody>
+                  <a:tcPr marL="73152" marR="73152" marT="73152" marB="73152" anchor="ctr">
+                    <a:lnL w="9525" cap="flat" cmpd="sng" algn="ctr">
+                      <a:solidFill>
+                        <a:srgbClr val="22303C"/>
+                      </a:solidFill>
+                      <a:prstDash val="solid"/>
+                      <a:round/>
+                      <a:headEnd type="none" w="med" len="med"/>
+                      <a:tailEnd type="none" w="med" len="med"/>
+                    </a:lnL>
+                    <a:lnR w="9525" cap="flat" cmpd="sng" algn="ctr">
+                      <a:solidFill>
+                        <a:srgbClr val="22303C"/>
+                      </a:solidFill>
+                      <a:prstDash val="solid"/>
+                      <a:round/>
+                      <a:headEnd type="none" w="med" len="med"/>
+                      <a:tailEnd type="none" w="med" len="med"/>
+                    </a:lnR>
+                    <a:lnT w="9525" cap="flat" cmpd="sng" algn="ctr">
+                      <a:solidFill>
+                        <a:srgbClr val="22303C"/>
+                      </a:solidFill>
+                      <a:prstDash val="solid"/>
+                      <a:round/>
+                      <a:headEnd type="none" w="med" len="med"/>
+                      <a:tailEnd type="none" w="med" len="med"/>
+                    </a:lnT>
+                    <a:lnB w="9525" cap="flat" cmpd="sng" algn="ctr">
+                      <a:solidFill>
+                        <a:srgbClr val="22303C"/>
+                      </a:solidFill>
+                      <a:prstDash val="solid"/>
+                      <a:round/>
+                      <a:headEnd type="none" w="med" len="med"/>
+                      <a:tailEnd type="none" w="med" len="med"/>
+                    </a:lnB>
+                    <a:solidFill>
+                      <a:srgbClr val="0F1822"/>
+                    </a:solidFill>
+                  </a:tcPr>
+                </a:tc>
+                <a:tc>
+                  <a:txBody>
+                    <a:bodyPr/>
+                    <a:lstStyle/>
+                    <a:p>
+                      <a:pPr indent="0" marL="0">
+                        <a:buNone/>
+                      </a:pPr>
+                      <a:r>
+                        <a:rPr lang="en-US" sz="1000" dirty="0">
+                          <a:solidFill>
+                            <a:srgbClr val="39D98A"/>
+                          </a:solidFill>
+                          <a:latin typeface="Calibri" pitchFamily="34" charset="0"/>
+                          <a:ea typeface="Calibri" pitchFamily="34" charset="-122"/>
+                          <a:cs typeface="Calibri" pitchFamily="34" charset="-120"/>
+                        </a:rPr>
+                        <a:t>platia kreátori predplatné aj po prvom mesiaci?</a:t>
+                      </a:r>
+                      <a:endParaRPr lang="en-US" sz="1000" dirty="0">
+                        <a:latin typeface="Calibri" charset="0"/>
+                        <a:ea typeface="Calibri" charset="0"/>
+                        <a:cs typeface="Calibri" charset="0"/>
+                      </a:endParaRPr>
+                    </a:p>
+                  </a:txBody>
+                  <a:tcPr marL="73152" marR="73152" marT="73152" marB="73152" anchor="ctr">
+                    <a:lnL w="9525" cap="flat" cmpd="sng" algn="ctr">
+                      <a:solidFill>
+                        <a:srgbClr val="22303C"/>
+                      </a:solidFill>
+                      <a:prstDash val="solid"/>
+                      <a:round/>
+                      <a:headEnd type="none" w="med" len="med"/>
+                      <a:tailEnd type="none" w="med" len="med"/>
+                    </a:lnL>
+                    <a:lnR w="9525" cap="flat" cmpd="sng" algn="ctr">
+                      <a:solidFill>
+                        <a:srgbClr val="22303C"/>
+                      </a:solidFill>
+                      <a:prstDash val="solid"/>
+                      <a:round/>
+                      <a:headEnd type="none" w="med" len="med"/>
+                      <a:tailEnd type="none" w="med" len="med"/>
+                    </a:lnR>
+                    <a:lnT w="9525" cap="flat" cmpd="sng" algn="ctr">
+                      <a:solidFill>
+                        <a:srgbClr val="22303C"/>
+                      </a:solidFill>
+                      <a:prstDash val="solid"/>
+                      <a:round/>
+                      <a:headEnd type="none" w="med" len="med"/>
+                      <a:tailEnd type="none" w="med" len="med"/>
+                    </a:lnT>
+                    <a:lnB w="9525" cap="flat" cmpd="sng" algn="ctr">
+                      <a:solidFill>
+                        <a:srgbClr val="22303C"/>
+                      </a:solidFill>
+                      <a:prstDash val="solid"/>
+                      <a:round/>
+                      <a:headEnd type="none" w="med" len="med"/>
+                      <a:tailEnd type="none" w="med" len="med"/>
+                    </a:lnB>
+                    <a:solidFill>
+                      <a:srgbClr val="0F1822"/>
+                    </a:solidFill>
+                  </a:tcPr>
+                </a:tc>
+                <a:tc>
+                  <a:txBody>
+                    <a:bodyPr/>
+                    <a:lstStyle/>
+                    <a:p>
+                      <a:pPr indent="0" marL="0">
+                        <a:buNone/>
+                      </a:pPr>
+                      <a:r>
+                        <a:rPr lang="en-US" sz="1000" dirty="0">
+                          <a:solidFill>
+                            <a:srgbClr val="39D98A"/>
+                          </a:solidFill>
+                          <a:latin typeface="Calibri" pitchFamily="34" charset="0"/>
+                          <a:ea typeface="Calibri" pitchFamily="34" charset="-122"/>
+                          <a:cs typeface="Calibri" pitchFamily="34" charset="-120"/>
+                        </a:rPr>
+                        <a:t>rastie ARR — investovať do plného rozsahu, alebo držať MVP?</a:t>
+                      </a:r>
+                      <a:endParaRPr lang="en-US" sz="1000" dirty="0">
+                        <a:latin typeface="Calibri" charset="0"/>
+                        <a:ea typeface="Calibri" charset="0"/>
+                        <a:cs typeface="Calibri" charset="0"/>
+                      </a:endParaRPr>
+                    </a:p>
+                  </a:txBody>
+                  <a:tcPr marL="73152" marR="73152" marT="73152" marB="73152" anchor="ctr">
+                    <a:lnL w="9525" cap="flat" cmpd="sng" algn="ctr">
+                      <a:solidFill>
+                        <a:srgbClr val="22303C"/>
+                      </a:solidFill>
+                      <a:prstDash val="solid"/>
+                      <a:round/>
+                      <a:headEnd type="none" w="med" len="med"/>
+                      <a:tailEnd type="none" w="med" len="med"/>
+                    </a:lnL>
+                    <a:lnR w="9525" cap="flat" cmpd="sng" algn="ctr">
+                      <a:solidFill>
+                        <a:srgbClr val="22303C"/>
+                      </a:solidFill>
+                      <a:prstDash val="solid"/>
+                      <a:round/>
+                      <a:headEnd type="none" w="med" len="med"/>
+                      <a:tailEnd type="none" w="med" len="med"/>
+                    </a:lnR>
+                    <a:lnT w="9525" cap="flat" cmpd="sng" algn="ctr">
+                      <a:solidFill>
+                        <a:srgbClr val="22303C"/>
+                      </a:solidFill>
+                      <a:prstDash val="solid"/>
+                      <a:round/>
+                      <a:headEnd type="none" w="med" len="med"/>
+                      <a:tailEnd type="none" w="med" len="med"/>
+                    </a:lnT>
+                    <a:lnB w="9525" cap="flat" cmpd="sng" algn="ctr">
+                      <a:solidFill>
+                        <a:srgbClr val="22303C"/>
+                      </a:solidFill>
+                      <a:prstDash val="solid"/>
+                      <a:round/>
+                      <a:headEnd type="none" w="med" len="med"/>
+                      <a:tailEnd type="none" w="med" len="med"/>
+                    </a:lnB>
+                    <a:solidFill>
+                      <a:srgbClr val="0F1822"/>
+                    </a:solidFill>
+                  </a:tcPr>
+                </a:tc>
+              </a:tr>
+            </a:tbl>
+          </a:graphicData>
+        </a:graphic>
+      </p:graphicFrame>
+      <p:sp>
+        <p:nvSpPr>
+          <p:cNvPr id="7" name="Text 4"/>
           <p:cNvSpPr txBox="1"/>
           <p:nvPr/>
         </p:nvSpPr>
         <p:spPr>
           <a:xfrm>
-            <a:off x="795528" y="2651760"/>
-            <a:ext cx="2194560" cy="320040"/>
+            <a:off x="566928" y="6355080"/>
+            <a:ext cx="11064240" cy="320040"/>
           </a:xfrm>
           <a:prstGeom prst="rect">
             <a:avLst/>
@@ -14067,601 +19874,17 @@
               <a:buNone/>
             </a:pPr>
             <a:r>
-              <a:rPr lang="en-US" sz="1350" b="1" spc="200" kern="0" dirty="0">
-                <a:solidFill>
-                  <a:srgbClr val="3FB6E8"/>
+              <a:rPr lang="en-US" sz="1100" i="1" dirty="0">
+                <a:solidFill>
+                  <a:srgbClr val="8DA2B2"/>
                 </a:solidFill>
                 <a:latin typeface="Calibri" pitchFamily="34" charset="0"/>
                 <a:ea typeface="Calibri" pitchFamily="34" charset="-122"/>
                 <a:cs typeface="Calibri" pitchFamily="34" charset="-120"/>
               </a:rPr>
-              <a:t>SKÚŠAŤ</a:t>
-            </a:r>
-            <a:endParaRPr lang="en-US" sz="1350" dirty="0"/>
-          </a:p>
-        </p:txBody>
-      </p:sp>
-      <p:sp>
-        <p:nvSpPr>
-          <p:cNvPr id="8" name="Text 6"/>
-          <p:cNvSpPr txBox="1"/>
-          <p:nvPr/>
-        </p:nvSpPr>
-        <p:spPr>
-          <a:xfrm>
-            <a:off x="795528" y="3017520"/>
-            <a:ext cx="2194560" cy="914400"/>
-          </a:xfrm>
-          <a:prstGeom prst="rect">
-            <a:avLst/>
-          </a:prstGeom>
-          <a:noFill/>
-          <a:ln/>
-        </p:spPr>
-        <p:txBody>
-          <a:bodyPr wrap="square" lIns="0" tIns="0" rIns="0" bIns="0" rtlCol="0" anchor="ctr"/>
-          <a:lstStyle/>
-          <a:p>
-            <a:pPr indent="0" marL="0">
-              <a:lnSpc>
-                <a:spcPct val="110000"/>
-              </a:lnSpc>
-              <a:buNone/>
-            </a:pPr>
-            <a:r>
-              <a:rPr lang="en-US" sz="1050" dirty="0">
-                <a:solidFill>
-                  <a:srgbClr val="8DA2B2"/>
-                </a:solidFill>
-                <a:latin typeface="Calibri" pitchFamily="34" charset="0"/>
-                <a:ea typeface="Calibri" pitchFamily="34" charset="-122"/>
-                <a:cs typeface="Calibri" pitchFamily="34" charset="-120"/>
-              </a:rPr>
-              <a:t>pilot za týždne, nie mesiace — s vopred dohodnutou metrikou</a:t>
-            </a:r>
-            <a:endParaRPr lang="en-US" sz="1050" dirty="0"/>
-          </a:p>
-        </p:txBody>
-      </p:sp>
-      <p:sp>
-        <p:nvSpPr>
-          <p:cNvPr id="9" name="Shape 7"/>
-          <p:cNvSpPr/>
-          <p:nvPr/>
-        </p:nvSpPr>
-        <p:spPr>
-          <a:xfrm>
-            <a:off x="3378708" y="2103120"/>
-            <a:ext cx="2624328" cy="1920240"/>
-          </a:xfrm>
-          <a:prstGeom prst="roundRect">
-            <a:avLst>
-              <a:gd name="adj" fmla="val 3333"/>
-            </a:avLst>
-          </a:prstGeom>
-          <a:solidFill>
-            <a:srgbClr val="111C26"/>
-          </a:solidFill>
-          <a:ln w="12700">
-            <a:solidFill>
-              <a:srgbClr val="263A4C"/>
-            </a:solidFill>
-            <a:prstDash val="solid"/>
-          </a:ln>
-        </p:spPr>
-      </p:sp>
-      <p:sp>
-        <p:nvSpPr>
-          <p:cNvPr id="10" name="Text 8"/>
-          <p:cNvSpPr txBox="1"/>
-          <p:nvPr/>
-        </p:nvSpPr>
-        <p:spPr>
-          <a:xfrm>
-            <a:off x="3607308" y="2286000"/>
-            <a:ext cx="548640" cy="365760"/>
-          </a:xfrm>
-          <a:prstGeom prst="rect">
-            <a:avLst/>
-          </a:prstGeom>
-          <a:noFill/>
-          <a:ln/>
-        </p:spPr>
-        <p:txBody>
-          <a:bodyPr wrap="square" lIns="0" tIns="0" rIns="0" bIns="0" rtlCol="0" anchor="ctr"/>
-          <a:lstStyle/>
-          <a:p>
-            <a:pPr indent="0" marL="0">
-              <a:buNone/>
-            </a:pPr>
-            <a:r>
-              <a:rPr lang="en-US" sz="1700" b="1" dirty="0">
-                <a:solidFill>
-                  <a:srgbClr val="5C7183"/>
-                </a:solidFill>
-                <a:latin typeface="Cambria" pitchFamily="34" charset="0"/>
-                <a:ea typeface="Cambria" pitchFamily="34" charset="-122"/>
-                <a:cs typeface="Cambria" pitchFamily="34" charset="-120"/>
-              </a:rPr>
-              <a:t>2</a:t>
-            </a:r>
-            <a:endParaRPr lang="en-US" sz="1700" dirty="0"/>
-          </a:p>
-        </p:txBody>
-      </p:sp>
-      <p:sp>
-        <p:nvSpPr>
-          <p:cNvPr id="11" name="Text 9"/>
-          <p:cNvSpPr txBox="1"/>
-          <p:nvPr/>
-        </p:nvSpPr>
-        <p:spPr>
-          <a:xfrm>
-            <a:off x="3607308" y="2651760"/>
-            <a:ext cx="2194560" cy="320040"/>
-          </a:xfrm>
-          <a:prstGeom prst="rect">
-            <a:avLst/>
-          </a:prstGeom>
-          <a:noFill/>
-          <a:ln/>
-        </p:spPr>
-        <p:txBody>
-          <a:bodyPr wrap="square" lIns="0" tIns="0" rIns="0" bIns="0" rtlCol="0" anchor="ctr"/>
-          <a:lstStyle/>
-          <a:p>
-            <a:pPr indent="0" marL="0">
-              <a:buNone/>
-            </a:pPr>
-            <a:r>
-              <a:rPr lang="en-US" sz="1350" b="1" spc="200" kern="0" dirty="0">
-                <a:solidFill>
-                  <a:srgbClr val="3FB6E8"/>
-                </a:solidFill>
-                <a:latin typeface="Calibri" pitchFamily="34" charset="0"/>
-                <a:ea typeface="Calibri" pitchFamily="34" charset="-122"/>
-                <a:cs typeface="Calibri" pitchFamily="34" charset="-120"/>
-              </a:rPr>
-              <a:t>ITEROVAŤ</a:t>
-            </a:r>
-            <a:endParaRPr lang="en-US" sz="1350" dirty="0"/>
-          </a:p>
-        </p:txBody>
-      </p:sp>
-      <p:sp>
-        <p:nvSpPr>
-          <p:cNvPr id="12" name="Text 10"/>
-          <p:cNvSpPr txBox="1"/>
-          <p:nvPr/>
-        </p:nvSpPr>
-        <p:spPr>
-          <a:xfrm>
-            <a:off x="3607308" y="3017520"/>
-            <a:ext cx="2194560" cy="914400"/>
-          </a:xfrm>
-          <a:prstGeom prst="rect">
-            <a:avLst/>
-          </a:prstGeom>
-          <a:noFill/>
-          <a:ln/>
-        </p:spPr>
-        <p:txBody>
-          <a:bodyPr wrap="square" lIns="0" tIns="0" rIns="0" bIns="0" rtlCol="0" anchor="ctr"/>
-          <a:lstStyle/>
-          <a:p>
-            <a:pPr indent="0" marL="0">
-              <a:lnSpc>
-                <a:spcPct val="110000"/>
-              </a:lnSpc>
-              <a:buNone/>
-            </a:pPr>
-            <a:r>
-              <a:rPr lang="en-US" sz="1050" dirty="0">
-                <a:solidFill>
-                  <a:srgbClr val="8DA2B2"/>
-                </a:solidFill>
-                <a:latin typeface="Calibri" pitchFamily="34" charset="0"/>
-                <a:ea typeface="Calibri" pitchFamily="34" charset="-122"/>
-                <a:cs typeface="Calibri" pitchFamily="34" charset="-120"/>
-              </a:rPr>
-              <a:t>ak metrika žije, ladíme produkt aj cenu na reálnych používateľoch</a:t>
-            </a:r>
-            <a:endParaRPr lang="en-US" sz="1050" dirty="0"/>
-          </a:p>
-        </p:txBody>
-      </p:sp>
-      <p:sp>
-        <p:nvSpPr>
-          <p:cNvPr id="13" name="Shape 11"/>
-          <p:cNvSpPr/>
-          <p:nvPr/>
-        </p:nvSpPr>
-        <p:spPr>
-          <a:xfrm>
-            <a:off x="6190488" y="2103120"/>
-            <a:ext cx="2624328" cy="1920240"/>
-          </a:xfrm>
-          <a:prstGeom prst="roundRect">
-            <a:avLst>
-              <a:gd name="adj" fmla="val 3333"/>
-            </a:avLst>
-          </a:prstGeom>
-          <a:solidFill>
-            <a:srgbClr val="111C26"/>
-          </a:solidFill>
-          <a:ln w="12700">
-            <a:solidFill>
-              <a:srgbClr val="263A4C"/>
-            </a:solidFill>
-            <a:prstDash val="solid"/>
-          </a:ln>
-        </p:spPr>
-      </p:sp>
-      <p:sp>
-        <p:nvSpPr>
-          <p:cNvPr id="14" name="Text 12"/>
-          <p:cNvSpPr txBox="1"/>
-          <p:nvPr/>
-        </p:nvSpPr>
-        <p:spPr>
-          <a:xfrm>
-            <a:off x="6419088" y="2286000"/>
-            <a:ext cx="548640" cy="365760"/>
-          </a:xfrm>
-          <a:prstGeom prst="rect">
-            <a:avLst/>
-          </a:prstGeom>
-          <a:noFill/>
-          <a:ln/>
-        </p:spPr>
-        <p:txBody>
-          <a:bodyPr wrap="square" lIns="0" tIns="0" rIns="0" bIns="0" rtlCol="0" anchor="ctr"/>
-          <a:lstStyle/>
-          <a:p>
-            <a:pPr indent="0" marL="0">
-              <a:buNone/>
-            </a:pPr>
-            <a:r>
-              <a:rPr lang="en-US" sz="1700" b="1" dirty="0">
-                <a:solidFill>
-                  <a:srgbClr val="5C7183"/>
-                </a:solidFill>
-                <a:latin typeface="Cambria" pitchFamily="34" charset="0"/>
-                <a:ea typeface="Cambria" pitchFamily="34" charset="-122"/>
-                <a:cs typeface="Cambria" pitchFamily="34" charset="-120"/>
-              </a:rPr>
-              <a:t>3</a:t>
-            </a:r>
-            <a:endParaRPr lang="en-US" sz="1700" dirty="0"/>
-          </a:p>
-        </p:txBody>
-      </p:sp>
-      <p:sp>
-        <p:nvSpPr>
-          <p:cNvPr id="15" name="Text 13"/>
-          <p:cNvSpPr txBox="1"/>
-          <p:nvPr/>
-        </p:nvSpPr>
-        <p:spPr>
-          <a:xfrm>
-            <a:off x="6419088" y="2651760"/>
-            <a:ext cx="2194560" cy="320040"/>
-          </a:xfrm>
-          <a:prstGeom prst="rect">
-            <a:avLst/>
-          </a:prstGeom>
-          <a:noFill/>
-          <a:ln/>
-        </p:spPr>
-        <p:txBody>
-          <a:bodyPr wrap="square" lIns="0" tIns="0" rIns="0" bIns="0" rtlCol="0" anchor="ctr"/>
-          <a:lstStyle/>
-          <a:p>
-            <a:pPr indent="0" marL="0">
-              <a:buNone/>
-            </a:pPr>
-            <a:r>
-              <a:rPr lang="en-US" sz="1350" b="1" spc="200" kern="0" dirty="0">
-                <a:solidFill>
-                  <a:srgbClr val="39D98A"/>
-                </a:solidFill>
-                <a:latin typeface="Calibri" pitchFamily="34" charset="0"/>
-                <a:ea typeface="Calibri" pitchFamily="34" charset="-122"/>
-                <a:cs typeface="Calibri" pitchFamily="34" charset="-120"/>
-              </a:rPr>
-              <a:t>ŠKÁLOVAŤ</a:t>
-            </a:r>
-            <a:endParaRPr lang="en-US" sz="1350" dirty="0"/>
-          </a:p>
-        </p:txBody>
-      </p:sp>
-      <p:sp>
-        <p:nvSpPr>
-          <p:cNvPr id="16" name="Text 14"/>
-          <p:cNvSpPr txBox="1"/>
-          <p:nvPr/>
-        </p:nvSpPr>
-        <p:spPr>
-          <a:xfrm>
-            <a:off x="6419088" y="3017520"/>
-            <a:ext cx="2194560" cy="914400"/>
-          </a:xfrm>
-          <a:prstGeom prst="rect">
-            <a:avLst/>
-          </a:prstGeom>
-          <a:noFill/>
-          <a:ln/>
-        </p:spPr>
-        <p:txBody>
-          <a:bodyPr wrap="square" lIns="0" tIns="0" rIns="0" bIns="0" rtlCol="0" anchor="ctr"/>
-          <a:lstStyle/>
-          <a:p>
-            <a:pPr indent="0" marL="0">
-              <a:lnSpc>
-                <a:spcPct val="110000"/>
-              </a:lnSpc>
-              <a:buNone/>
-            </a:pPr>
-            <a:r>
-              <a:rPr lang="en-US" sz="1050" dirty="0">
-                <a:solidFill>
-                  <a:srgbClr val="8DA2B2"/>
-                </a:solidFill>
-                <a:latin typeface="Calibri" pitchFamily="34" charset="0"/>
-                <a:ea typeface="Calibri" pitchFamily="34" charset="-122"/>
-                <a:cs typeface="Calibri" pitchFamily="34" charset="-120"/>
-              </a:rPr>
-              <a:t>čo funguje, dostane vývojára a distribúciu — CZ/HU cez sieť Forbes</a:t>
-            </a:r>
-            <a:endParaRPr lang="en-US" sz="1050" dirty="0"/>
-          </a:p>
-        </p:txBody>
-      </p:sp>
-      <p:sp>
-        <p:nvSpPr>
-          <p:cNvPr id="17" name="Shape 15"/>
-          <p:cNvSpPr/>
-          <p:nvPr/>
-        </p:nvSpPr>
-        <p:spPr>
-          <a:xfrm>
-            <a:off x="9002268" y="2103120"/>
-            <a:ext cx="2624328" cy="1920240"/>
-          </a:xfrm>
-          <a:prstGeom prst="roundRect">
-            <a:avLst>
-              <a:gd name="adj" fmla="val 3333"/>
-            </a:avLst>
-          </a:prstGeom>
-          <a:solidFill>
-            <a:srgbClr val="111C26"/>
-          </a:solidFill>
-          <a:ln w="12700">
-            <a:solidFill>
-              <a:srgbClr val="263A4C"/>
-            </a:solidFill>
-            <a:prstDash val="solid"/>
-          </a:ln>
-        </p:spPr>
-      </p:sp>
-      <p:sp>
-        <p:nvSpPr>
-          <p:cNvPr id="18" name="Text 16"/>
-          <p:cNvSpPr txBox="1"/>
-          <p:nvPr/>
-        </p:nvSpPr>
-        <p:spPr>
-          <a:xfrm>
-            <a:off x="9230868" y="2286000"/>
-            <a:ext cx="548640" cy="365760"/>
-          </a:xfrm>
-          <a:prstGeom prst="rect">
-            <a:avLst/>
-          </a:prstGeom>
-          <a:noFill/>
-          <a:ln/>
-        </p:spPr>
-        <p:txBody>
-          <a:bodyPr wrap="square" lIns="0" tIns="0" rIns="0" bIns="0" rtlCol="0" anchor="ctr"/>
-          <a:lstStyle/>
-          <a:p>
-            <a:pPr indent="0" marL="0">
-              <a:buNone/>
-            </a:pPr>
-            <a:r>
-              <a:rPr lang="en-US" sz="1700" b="1" dirty="0">
-                <a:solidFill>
-                  <a:srgbClr val="5C7183"/>
-                </a:solidFill>
-                <a:latin typeface="Cambria" pitchFamily="34" charset="0"/>
-                <a:ea typeface="Cambria" pitchFamily="34" charset="-122"/>
-                <a:cs typeface="Cambria" pitchFamily="34" charset="-120"/>
-              </a:rPr>
-              <a:t>4</a:t>
-            </a:r>
-            <a:endParaRPr lang="en-US" sz="1700" dirty="0"/>
-          </a:p>
-        </p:txBody>
-      </p:sp>
-      <p:sp>
-        <p:nvSpPr>
-          <p:cNvPr id="19" name="Text 17"/>
-          <p:cNvSpPr txBox="1"/>
-          <p:nvPr/>
-        </p:nvSpPr>
-        <p:spPr>
-          <a:xfrm>
-            <a:off x="9230868" y="2651760"/>
-            <a:ext cx="2194560" cy="320040"/>
-          </a:xfrm>
-          <a:prstGeom prst="rect">
-            <a:avLst/>
-          </a:prstGeom>
-          <a:noFill/>
-          <a:ln/>
-        </p:spPr>
-        <p:txBody>
-          <a:bodyPr wrap="square" lIns="0" tIns="0" rIns="0" bIns="0" rtlCol="0" anchor="ctr"/>
-          <a:lstStyle/>
-          <a:p>
-            <a:pPr indent="0" marL="0">
-              <a:buNone/>
-            </a:pPr>
-            <a:r>
-              <a:rPr lang="en-US" sz="1350" b="1" spc="200" kern="0" dirty="0">
-                <a:solidFill>
-                  <a:srgbClr val="F2B33D"/>
-                </a:solidFill>
-                <a:latin typeface="Calibri" pitchFamily="34" charset="0"/>
-                <a:ea typeface="Calibri" pitchFamily="34" charset="-122"/>
-                <a:cs typeface="Calibri" pitchFamily="34" charset="-120"/>
-              </a:rPr>
-              <a:t>ZAHODIŤ</a:t>
-            </a:r>
-            <a:endParaRPr lang="en-US" sz="1350" dirty="0"/>
-          </a:p>
-        </p:txBody>
-      </p:sp>
-      <p:sp>
-        <p:nvSpPr>
-          <p:cNvPr id="20" name="Text 18"/>
-          <p:cNvSpPr txBox="1"/>
-          <p:nvPr/>
-        </p:nvSpPr>
-        <p:spPr>
-          <a:xfrm>
-            <a:off x="9230868" y="3017520"/>
-            <a:ext cx="2194560" cy="914400"/>
-          </a:xfrm>
-          <a:prstGeom prst="rect">
-            <a:avLst/>
-          </a:prstGeom>
-          <a:noFill/>
-          <a:ln/>
-        </p:spPr>
-        <p:txBody>
-          <a:bodyPr wrap="square" lIns="0" tIns="0" rIns="0" bIns="0" rtlCol="0" anchor="ctr"/>
-          <a:lstStyle/>
-          <a:p>
-            <a:pPr indent="0" marL="0">
-              <a:lnSpc>
-                <a:spcPct val="110000"/>
-              </a:lnSpc>
-              <a:buNone/>
-            </a:pPr>
-            <a:r>
-              <a:rPr lang="en-US" sz="1050" dirty="0">
-                <a:solidFill>
-                  <a:srgbClr val="8DA2B2"/>
-                </a:solidFill>
-                <a:latin typeface="Calibri" pitchFamily="34" charset="0"/>
-                <a:ea typeface="Calibri" pitchFamily="34" charset="-122"/>
-                <a:cs typeface="Calibri" pitchFamily="34" charset="-120"/>
-              </a:rPr>
-              <a:t>ak metrika na pilote nesedí, projekt končí — bez sentimentu</a:t>
-            </a:r>
-            <a:endParaRPr lang="en-US" sz="1050" dirty="0"/>
-          </a:p>
-        </p:txBody>
-      </p:sp>
-      <p:sp>
-        <p:nvSpPr>
-          <p:cNvPr id="21" name="Text 19"/>
-          <p:cNvSpPr txBox="1"/>
-          <p:nvPr/>
-        </p:nvSpPr>
-        <p:spPr>
-          <a:xfrm>
-            <a:off x="566928" y="4343400"/>
-            <a:ext cx="11064240" cy="868680"/>
-          </a:xfrm>
-          <a:prstGeom prst="rect">
-            <a:avLst/>
-          </a:prstGeom>
-          <a:noFill/>
-          <a:ln/>
-        </p:spPr>
-        <p:txBody>
-          <a:bodyPr wrap="square" lIns="0" tIns="0" rIns="0" bIns="0" rtlCol="0" anchor="ctr"/>
-          <a:lstStyle/>
-          <a:p>
-            <a:pPr indent="0" marL="0">
-              <a:lnSpc>
-                <a:spcPct val="115000"/>
-              </a:lnSpc>
-              <a:buNone/>
-            </a:pPr>
-            <a:r>
-              <a:rPr lang="en-US" sz="1350" b="1" dirty="0">
-                <a:solidFill>
-                  <a:srgbClr val="F2F6F8"/>
-                </a:solidFill>
-                <a:latin typeface="Calibri" pitchFamily="34" charset="0"/>
-                <a:ea typeface="Calibri" pitchFamily="34" charset="-122"/>
-                <a:cs typeface="Calibri" pitchFamily="34" charset="-120"/>
-              </a:rPr>
-              <a:t>Hodnota nie je v tom, že vyjde každý pokus. </a:t>
-            </a:r>
-            <a:pPr indent="0" marL="0">
-              <a:lnSpc>
-                <a:spcPct val="115000"/>
-              </a:lnSpc>
-              <a:buNone/>
-            </a:pPr>
-            <a:r>
-              <a:rPr lang="en-US" sz="1350" dirty="0">
-                <a:solidFill>
-                  <a:srgbClr val="8DA2B2"/>
-                </a:solidFill>
-                <a:latin typeface="Calibri" pitchFamily="34" charset="0"/>
-                <a:ea typeface="Calibri" pitchFamily="34" charset="-122"/>
-                <a:cs typeface="Calibri" pitchFamily="34" charset="-120"/>
-              </a:rPr>
-              <a:t>Je v tom, že cena jedného pokusu je nízka — a každý ďalší je lacnejší než predchádzajúci, lebo stack, metodika aj distribučná cesta už stoja. AI MoneyMastermind je dôkaz, že gate funguje: pokus stál 4 týždne a poznatok máme.</a:t>
-            </a:r>
-            <a:endParaRPr lang="en-US" sz="1350" dirty="0"/>
-          </a:p>
-        </p:txBody>
-      </p:sp>
-      <p:sp>
-        <p:nvSpPr>
-          <p:cNvPr id="22" name="Text 20"/>
-          <p:cNvSpPr txBox="1"/>
-          <p:nvPr/>
-        </p:nvSpPr>
-        <p:spPr>
-          <a:xfrm>
-            <a:off x="566928" y="5394960"/>
-            <a:ext cx="11064240" cy="822960"/>
-          </a:xfrm>
-          <a:prstGeom prst="rect">
-            <a:avLst/>
-          </a:prstGeom>
-          <a:noFill/>
-          <a:ln/>
-        </p:spPr>
-        <p:txBody>
-          <a:bodyPr wrap="square" lIns="0" tIns="0" rIns="0" bIns="0" rtlCol="0" anchor="ctr"/>
-          <a:lstStyle/>
-          <a:p>
-            <a:pPr algn="ctr" indent="0" marL="0">
-              <a:lnSpc>
-                <a:spcPct val="115000"/>
-              </a:lnSpc>
-              <a:buNone/>
-            </a:pPr>
-            <a:r>
-              <a:rPr lang="en-US" sz="1600" i="1" dirty="0">
-                <a:solidFill>
-                  <a:srgbClr val="F2F6F8"/>
-                </a:solidFill>
-                <a:latin typeface="Cambria" pitchFamily="34" charset="0"/>
-                <a:ea typeface="Cambria" pitchFamily="34" charset="-122"/>
-                <a:cs typeface="Cambria" pitchFamily="34" charset="-120"/>
-              </a:rPr>
-              <a:t>Ak nebudeme inovovať, nebudeme sa zlepšovať. Toto je najlacnejší spôsob, ako si udržať náskok — skúšať veľa vecí za málo peňazí a rýchlo zahadzovať to, čo nefunguje.</a:t>
-            </a:r>
-            <a:endParaRPr lang="en-US" sz="1600" dirty="0"/>
+              <a:t>Champion: zatiaľ otvorené · prieskum s Mirkou Paník · realizovateľnosť 3 (MVP) / 1 (plný rozsah)</a:t>
+            </a:r>
+            <a:endParaRPr lang="en-US" sz="1100" dirty="0"/>
           </a:p>
         </p:txBody>
       </p:sp>

--- a/prezentacie/AI_projekty_Forbes_SK_diskusia.pptx
+++ b/prezentacie/AI_projekty_Forbes_SK_diskusia.pptx
@@ -18,9 +18,10 @@
     <p:sldId id="266" r:id="rId12"/>
     <p:sldId id="267" r:id="rId13"/>
     <p:sldId id="268" r:id="rId14"/>
+    <p:sldId id="269" r:id="rId15"/>
   </p:sldIdLst>
   <p:notesMasterIdLst>
-    <p:notesMasterId r:id="rId15"/>
+    <p:notesMasterId r:id="rId16"/>
   </p:notesMasterIdLst>
   <p:sldSz cx="12192000" cy="6858000"/>
   <p:notesSz cx="6858000" cy="12192000"/>
@@ -890,6 +891,94 @@
             <a:fld id="{F7021451-1387-4CA6-816F-3879F97B5CBC}" type="slidenum">
               <a:rPr lang="en-US"/>
               <a:t>13</a:t>
+            </a:fld>
+            <a:endParaRPr lang="en-US"/>
+          </a:p>
+        </p:txBody>
+      </p:sp>
+    </p:spTree>
+    <p:extLst>
+      <p:ext uri="{BB962C8B-B14F-4D97-AF65-F5344CB8AC3E}">
+        <p14:creationId xmlns:p14="http://schemas.microsoft.com/office/powerpoint/2010/main" val="1024086991"/>
+      </p:ext>
+    </p:extLst>
+  </p:cSld>
+  <p:clrMapOvr>
+    <a:masterClrMapping/>
+  </p:clrMapOvr>
+</p:notes>
+</file>
+
+<file path=ppt/notesSlides/notesSlide14.xml><?xml version="1.0" encoding="utf-8"?>
+<p:notes xmlns:a="http://schemas.openxmlformats.org/drawingml/2006/main" xmlns:r="http://schemas.openxmlformats.org/officeDocument/2006/relationships" xmlns:p="http://schemas.openxmlformats.org/presentationml/2006/main">
+  <p:cSld>
+    <p:spTree>
+      <p:nvGrpSpPr>
+        <p:cNvPr id="1" name=""/>
+        <p:cNvGrpSpPr/>
+        <p:nvPr/>
+      </p:nvGrpSpPr>
+      <p:grpSpPr>
+        <a:xfrm>
+          <a:off x="0" y="0"/>
+          <a:ext cx="0" cy="0"/>
+          <a:chOff x="0" y="0"/>
+          <a:chExt cx="0" cy="0"/>
+        </a:xfrm>
+      </p:grpSpPr>
+      <p:sp>
+        <p:nvSpPr>
+          <p:cNvPr id="2" name="Slide Image Placeholder 1"/>
+          <p:cNvSpPr>
+            <a:spLocks noGrp="1" noRot="1" noChangeAspect="1"/>
+          </p:cNvSpPr>
+          <p:nvPr>
+            <p:ph type="sldImg"/>
+          </p:nvPr>
+        </p:nvSpPr>
+        <p:spPr/>
+      </p:sp>
+      <p:sp>
+        <p:nvSpPr>
+          <p:cNvPr id="3" name="Notes Placeholder 2"/>
+          <p:cNvSpPr>
+            <a:spLocks noGrp="1"/>
+          </p:cNvSpPr>
+          <p:nvPr>
+            <p:ph type="body" idx="1"/>
+          </p:nvPr>
+        </p:nvSpPr>
+        <p:spPr/>
+        <p:txBody>
+          <a:bodyPr/>
+          <a:lstStyle/>
+          <a:p>
+            <a:r>
+              <a:rPr lang="en-US" dirty="0"/>
+              <a:t/>
+            </a:r>
+            <a:endParaRPr lang="en-US" dirty="0"/>
+          </a:p>
+        </p:txBody>
+      </p:sp>
+      <p:sp>
+        <p:nvSpPr>
+          <p:cNvPr id="4" name="Slide Number Placeholder 3"/>
+          <p:cNvSpPr>
+            <a:spLocks noGrp="1"/>
+          </p:cNvSpPr>
+          <p:nvPr>
+            <p:ph type="sldNum" sz="quarter" idx="10"/>
+          </p:nvPr>
+        </p:nvSpPr>
+        <p:spPr/>
+        <p:txBody>
+          <a:bodyPr/>
+          <a:lstStyle/>
+          <a:p>
+            <a:fld id="{F7021451-1387-4CA6-816F-3879F97B5CBC}" type="slidenum">
+              <a:rPr lang="en-US"/>
+              <a:t>14</a:t>
             </a:fld>
             <a:endParaRPr lang="en-US"/>
           </a:p>
@@ -2207,7 +2296,7 @@
         <p:spPr>
           <a:xfrm>
             <a:off x="7452360" y="1417320"/>
-            <a:ext cx="4160520" cy="4480560"/>
+            <a:ext cx="4160520" cy="4892040"/>
           </a:xfrm>
           <a:prstGeom prst="roundRect">
             <a:avLst>
@@ -2379,7 +2468,7 @@
         </p:nvSpPr>
         <p:spPr>
           <a:xfrm>
-            <a:off x="7772400" y="2734056"/>
+            <a:off x="7772400" y="2697480"/>
             <a:ext cx="320040" cy="274320"/>
           </a:xfrm>
           <a:prstGeom prst="rect">
@@ -2418,7 +2507,7 @@
         </p:nvSpPr>
         <p:spPr>
           <a:xfrm>
-            <a:off x="8183880" y="2715768"/>
+            <a:off x="8183880" y="2679192"/>
             <a:ext cx="3246120" cy="566928"/>
           </a:xfrm>
           <a:prstGeom prst="rect">
@@ -2486,7 +2575,7 @@
         </p:nvSpPr>
         <p:spPr>
           <a:xfrm>
-            <a:off x="7772400" y="3346704"/>
+            <a:off x="7772400" y="3273552"/>
             <a:ext cx="320040" cy="274320"/>
           </a:xfrm>
           <a:prstGeom prst="rect">
@@ -2525,7 +2614,7 @@
         </p:nvSpPr>
         <p:spPr>
           <a:xfrm>
-            <a:off x="8183880" y="3328416"/>
+            <a:off x="8183880" y="3255264"/>
             <a:ext cx="3246120" cy="566928"/>
           </a:xfrm>
           <a:prstGeom prst="rect">
@@ -2593,7 +2682,7 @@
         </p:nvSpPr>
         <p:spPr>
           <a:xfrm>
-            <a:off x="7772400" y="3959352"/>
+            <a:off x="7772400" y="3849624"/>
             <a:ext cx="320040" cy="274320"/>
           </a:xfrm>
           <a:prstGeom prst="rect">
@@ -2632,7 +2721,7 @@
         </p:nvSpPr>
         <p:spPr>
           <a:xfrm>
-            <a:off x="8183880" y="3941064"/>
+            <a:off x="8183880" y="3831336"/>
             <a:ext cx="3246120" cy="566928"/>
           </a:xfrm>
           <a:prstGeom prst="rect">
@@ -2700,7 +2789,7 @@
         </p:nvSpPr>
         <p:spPr>
           <a:xfrm>
-            <a:off x="7772400" y="4572000"/>
+            <a:off x="7772400" y="4425696"/>
             <a:ext cx="320040" cy="274320"/>
           </a:xfrm>
           <a:prstGeom prst="rect">
@@ -2739,7 +2828,7 @@
         </p:nvSpPr>
         <p:spPr>
           <a:xfrm>
-            <a:off x="8183880" y="4553712"/>
+            <a:off x="8183880" y="4407408"/>
             <a:ext cx="3246120" cy="566928"/>
           </a:xfrm>
           <a:prstGeom prst="rect">
@@ -2807,7 +2896,7 @@
         </p:nvSpPr>
         <p:spPr>
           <a:xfrm>
-            <a:off x="7772400" y="5184648"/>
+            <a:off x="7772400" y="5001768"/>
             <a:ext cx="320040" cy="274320"/>
           </a:xfrm>
           <a:prstGeom prst="rect">
@@ -2846,7 +2935,114 @@
         </p:nvSpPr>
         <p:spPr>
           <a:xfrm>
-            <a:off x="8183880" y="5166360"/>
+            <a:off x="8183880" y="4983480"/>
+            <a:ext cx="3246120" cy="566928"/>
+          </a:xfrm>
+          <a:prstGeom prst="rect">
+            <a:avLst/>
+          </a:prstGeom>
+          <a:noFill/>
+          <a:ln/>
+        </p:spPr>
+        <p:txBody>
+          <a:bodyPr wrap="square" lIns="0" tIns="0" rIns="0" bIns="0" rtlCol="0" anchor="ctr"/>
+          <a:lstStyle/>
+          <a:p>
+            <a:pPr algn="l" indent="0" marL="0">
+              <a:lnSpc>
+                <a:spcPct val="105000"/>
+              </a:lnSpc>
+              <a:buNone/>
+            </a:pPr>
+            <a:r>
+              <a:rPr lang="en-US" sz="1250" b="1" dirty="0">
+                <a:solidFill>
+                  <a:srgbClr val="F2F6F8"/>
+                </a:solidFill>
+                <a:latin typeface="Calibri" pitchFamily="34" charset="0"/>
+                <a:ea typeface="Calibri" pitchFamily="34" charset="-122"/>
+                <a:cs typeface="Calibri" pitchFamily="34" charset="-120"/>
+              </a:rPr>
+              <a:t>Forma spolupráce</a:t>
+            </a:r>
+            <a:pPr algn="l" indent="0" marL="0">
+              <a:lnSpc>
+                <a:spcPct val="105000"/>
+              </a:lnSpc>
+              <a:buNone/>
+            </a:pPr>
+            <a:endParaRPr lang="en-US" sz="1250" dirty="0"/>
+          </a:p>
+          <a:p>
+            <a:pPr algn="l" indent="0" marL="0">
+              <a:lnSpc>
+                <a:spcPct val="105000"/>
+              </a:lnSpc>
+              <a:buNone/>
+            </a:pPr>
+            <a:r>
+              <a:rPr lang="en-US" sz="1050" dirty="0">
+                <a:solidFill>
+                  <a:srgbClr val="8DA2B2"/>
+                </a:solidFill>
+                <a:latin typeface="Calibri" pitchFamily="34" charset="0"/>
+                <a:ea typeface="Calibri" pitchFamily="34" charset="-122"/>
+                <a:cs typeface="Calibri" pitchFamily="34" charset="-120"/>
+              </a:rPr>
+              <a:t>od prvého gateu: s.r.o., 51 / 49</a:t>
+            </a:r>
+            <a:endParaRPr lang="en-US" sz="1250" dirty="0"/>
+          </a:p>
+        </p:txBody>
+      </p:sp>
+      <p:sp>
+        <p:nvSpPr>
+          <p:cNvPr id="21" name="Text 19"/>
+          <p:cNvSpPr txBox="1"/>
+          <p:nvPr/>
+        </p:nvSpPr>
+        <p:spPr>
+          <a:xfrm>
+            <a:off x="7772400" y="5577840"/>
+            <a:ext cx="320040" cy="274320"/>
+          </a:xfrm>
+          <a:prstGeom prst="rect">
+            <a:avLst/>
+          </a:prstGeom>
+          <a:noFill/>
+          <a:ln/>
+        </p:spPr>
+        <p:txBody>
+          <a:bodyPr wrap="square" lIns="0" tIns="0" rIns="0" bIns="0" rtlCol="0" anchor="ctr"/>
+          <a:lstStyle/>
+          <a:p>
+            <a:pPr algn="l" indent="0" marL="0">
+              <a:buNone/>
+            </a:pPr>
+            <a:r>
+              <a:rPr lang="en-US" sz="1300" b="1" dirty="0">
+                <a:solidFill>
+                  <a:srgbClr val="3FB6E8"/>
+                </a:solidFill>
+                <a:latin typeface="Cambria" pitchFamily="34" charset="0"/>
+                <a:ea typeface="Cambria" pitchFamily="34" charset="-122"/>
+                <a:cs typeface="Cambria" pitchFamily="34" charset="-120"/>
+              </a:rPr>
+              <a:t>7</a:t>
+            </a:r>
+            <a:endParaRPr lang="en-US" sz="1300" dirty="0"/>
+          </a:p>
+        </p:txBody>
+      </p:sp>
+      <p:sp>
+        <p:nvSpPr>
+          <p:cNvPr id="22" name="Text 20"/>
+          <p:cNvSpPr txBox="1"/>
+          <p:nvPr/>
+        </p:nvSpPr>
+        <p:spPr>
+          <a:xfrm>
+            <a:off x="8183880" y="5559552"/>
             <a:ext cx="3246120" cy="566928"/>
           </a:xfrm>
           <a:prstGeom prst="rect">
@@ -6006,6 +6202,697 @@
 <file path=ppt/slides/slide13.xml><?xml version="1.0" encoding="utf-8"?>
 <p:sld xmlns:a="http://schemas.openxmlformats.org/drawingml/2006/main" xmlns:r="http://schemas.openxmlformats.org/officeDocument/2006/relationships" xmlns:p="http://schemas.openxmlformats.org/presentationml/2006/main">
   <p:cSld name="Slide 13">
+    <p:bg>
+      <p:bgPr>
+        <a:solidFill>
+          <a:srgbClr val="0B0F14"/>
+        </a:solidFill>
+      </p:bgPr>
+    </p:bg>
+    <p:spTree>
+      <p:nvGrpSpPr>
+        <p:cNvPr id="1" name=""/>
+        <p:cNvGrpSpPr/>
+        <p:nvPr/>
+      </p:nvGrpSpPr>
+      <p:grpSpPr>
+        <a:xfrm>
+          <a:off x="0" y="0"/>
+          <a:ext cx="0" cy="0"/>
+          <a:chOff x="0" y="0"/>
+          <a:chExt cx="0" cy="0"/>
+        </a:xfrm>
+      </p:grpSpPr>
+      <p:sp>
+        <p:nvSpPr>
+          <p:cNvPr id="2" name="Text 0"/>
+          <p:cNvSpPr txBox="1"/>
+          <p:nvPr/>
+        </p:nvSpPr>
+        <p:spPr>
+          <a:xfrm>
+            <a:off x="566928" y="292608"/>
+            <a:ext cx="2743200" cy="365760"/>
+          </a:xfrm>
+          <a:prstGeom prst="rect">
+            <a:avLst/>
+          </a:prstGeom>
+          <a:noFill/>
+          <a:ln/>
+        </p:spPr>
+        <p:txBody>
+          <a:bodyPr wrap="square" lIns="0" tIns="0" rIns="0" bIns="0" rtlCol="0" anchor="ctr"/>
+          <a:lstStyle/>
+          <a:p>
+            <a:pPr algn="l" indent="0" marL="0">
+              <a:buNone/>
+            </a:pPr>
+            <a:r>
+              <a:rPr lang="en-US" sz="1300" b="1" dirty="0">
+                <a:solidFill>
+                  <a:srgbClr val="F2F6F8"/>
+                </a:solidFill>
+                <a:latin typeface="Calibri" pitchFamily="34" charset="0"/>
+                <a:ea typeface="Calibri" pitchFamily="34" charset="-122"/>
+                <a:cs typeface="Calibri" pitchFamily="34" charset="-120"/>
+              </a:rPr>
+              <a:t>Monetize</a:t>
+            </a:r>
+            <a:pPr algn="l" indent="0" marL="0">
+              <a:buNone/>
+            </a:pPr>
+            <a:r>
+              <a:rPr lang="en-US" sz="1300" b="1" dirty="0">
+                <a:solidFill>
+                  <a:srgbClr val="3FB6E8"/>
+                </a:solidFill>
+                <a:latin typeface="Calibri" pitchFamily="34" charset="0"/>
+                <a:ea typeface="Calibri" pitchFamily="34" charset="-122"/>
+                <a:cs typeface="Calibri" pitchFamily="34" charset="-120"/>
+              </a:rPr>
+              <a:t>.CX</a:t>
+            </a:r>
+            <a:endParaRPr lang="en-US" sz="1300" dirty="0"/>
+          </a:p>
+        </p:txBody>
+      </p:sp>
+      <p:sp>
+        <p:nvSpPr>
+          <p:cNvPr id="3" name="Text 1"/>
+          <p:cNvSpPr txBox="1"/>
+          <p:nvPr/>
+        </p:nvSpPr>
+        <p:spPr>
+          <a:xfrm>
+            <a:off x="585216" y="868680"/>
+            <a:ext cx="10972800" cy="292608"/>
+          </a:xfrm>
+          <a:prstGeom prst="rect">
+            <a:avLst/>
+          </a:prstGeom>
+          <a:noFill/>
+          <a:ln/>
+        </p:spPr>
+        <p:txBody>
+          <a:bodyPr wrap="square" lIns="0" tIns="0" rIns="0" bIns="0" rtlCol="0" anchor="ctr"/>
+          <a:lstStyle/>
+          <a:p>
+            <a:pPr algn="l" indent="0" marL="0">
+              <a:buNone/>
+            </a:pPr>
+            <a:r>
+              <a:rPr lang="en-US" sz="1050" b="1" spc="300" kern="0" dirty="0">
+                <a:solidFill>
+                  <a:srgbClr val="3FB6E8"/>
+                </a:solidFill>
+                <a:latin typeface="Calibri" pitchFamily="34" charset="0"/>
+                <a:ea typeface="Calibri" pitchFamily="34" charset="-122"/>
+                <a:cs typeface="Calibri" pitchFamily="34" charset="-120"/>
+              </a:rPr>
+              <a:t>FORMA SPOLUPRÁCE  ·  LEN PRI RASTOVÝCH PRODUKTOCH</a:t>
+            </a:r>
+            <a:endParaRPr lang="en-US" sz="1050" dirty="0"/>
+          </a:p>
+        </p:txBody>
+      </p:sp>
+      <p:sp>
+        <p:nvSpPr>
+          <p:cNvPr id="4" name="Text 2"/>
+          <p:cNvSpPr txBox="1"/>
+          <p:nvPr/>
+        </p:nvSpPr>
+        <p:spPr>
+          <a:xfrm>
+            <a:off x="566928" y="1207008"/>
+            <a:ext cx="11064240" cy="685800"/>
+          </a:xfrm>
+          <a:prstGeom prst="rect">
+            <a:avLst/>
+          </a:prstGeom>
+          <a:noFill/>
+          <a:ln/>
+        </p:spPr>
+        <p:txBody>
+          <a:bodyPr wrap="square" lIns="0" tIns="0" rIns="0" bIns="0" rtlCol="0" anchor="ctr"/>
+          <a:lstStyle/>
+          <a:p>
+            <a:pPr algn="l" indent="0" marL="0">
+              <a:buNone/>
+            </a:pPr>
+            <a:r>
+              <a:rPr lang="en-US" sz="2600" b="1" dirty="0">
+                <a:solidFill>
+                  <a:srgbClr val="F2F6F8"/>
+                </a:solidFill>
+                <a:latin typeface="Cambria" pitchFamily="34" charset="0"/>
+                <a:ea typeface="Cambria" pitchFamily="34" charset="-122"/>
+                <a:cs typeface="Cambria" pitchFamily="34" charset="-120"/>
+              </a:rPr>
+              <a:t>Najprv pokus. Forma spolupráce až od prvého gateu.</a:t>
+            </a:r>
+            <a:endParaRPr lang="en-US" sz="2600" dirty="0"/>
+          </a:p>
+        </p:txBody>
+      </p:sp>
+      <p:sp>
+        <p:nvSpPr>
+          <p:cNvPr id="5" name="Text 3"/>
+          <p:cNvSpPr txBox="1"/>
+          <p:nvPr/>
+        </p:nvSpPr>
+        <p:spPr>
+          <a:xfrm>
+            <a:off x="566928" y="1828800"/>
+            <a:ext cx="11064240" cy="594360"/>
+          </a:xfrm>
+          <a:prstGeom prst="rect">
+            <a:avLst/>
+          </a:prstGeom>
+          <a:noFill/>
+          <a:ln/>
+        </p:spPr>
+        <p:txBody>
+          <a:bodyPr wrap="square" lIns="0" tIns="0" rIns="0" bIns="0" rtlCol="0" anchor="ctr"/>
+          <a:lstStyle/>
+          <a:p>
+            <a:pPr indent="0" marL="0">
+              <a:lnSpc>
+                <a:spcPct val="110000"/>
+              </a:lnSpc>
+              <a:buNone/>
+            </a:pPr>
+            <a:r>
+              <a:rPr lang="en-US" sz="1250" dirty="0">
+                <a:solidFill>
+                  <a:srgbClr val="8DA2B2"/>
+                </a:solidFill>
+                <a:latin typeface="Calibri" pitchFamily="34" charset="0"/>
+                <a:ea typeface="Calibri" pitchFamily="34" charset="-122"/>
+                <a:cs typeface="Calibri" pitchFamily="34" charset="-120"/>
+              </a:rPr>
+              <a:t>Do momentu, keď prvý pilot prejde gateom, sa nič nezakladá a nič nepodpisuje — presne preto je dnešné rozhodnutie o priestore na pokus, nie o investícii. Až keď metrika sedí, má zmysel baviť sa o štruktúre.</a:t>
+            </a:r>
+            <a:endParaRPr lang="en-US" sz="1250" dirty="0"/>
+          </a:p>
+        </p:txBody>
+      </p:sp>
+      <p:sp>
+        <p:nvSpPr>
+          <p:cNvPr id="6" name="Shape 4"/>
+          <p:cNvSpPr/>
+          <p:nvPr/>
+        </p:nvSpPr>
+        <p:spPr>
+          <a:xfrm>
+            <a:off x="566928" y="2606040"/>
+            <a:ext cx="5440680" cy="3246120"/>
+          </a:xfrm>
+          <a:prstGeom prst="roundRect">
+            <a:avLst>
+              <a:gd name="adj" fmla="val 1972"/>
+            </a:avLst>
+          </a:prstGeom>
+          <a:solidFill>
+            <a:srgbClr val="111C26"/>
+          </a:solidFill>
+          <a:ln w="12700">
+            <a:solidFill>
+              <a:srgbClr val="263A4C"/>
+            </a:solidFill>
+            <a:prstDash val="solid"/>
+          </a:ln>
+        </p:spPr>
+      </p:sp>
+      <p:sp>
+        <p:nvSpPr>
+          <p:cNvPr id="7" name="Text 5"/>
+          <p:cNvSpPr txBox="1"/>
+          <p:nvPr/>
+        </p:nvSpPr>
+        <p:spPr>
+          <a:xfrm>
+            <a:off x="896112" y="2880360"/>
+            <a:ext cx="4754880" cy="256032"/>
+          </a:xfrm>
+          <a:prstGeom prst="rect">
+            <a:avLst/>
+          </a:prstGeom>
+          <a:noFill/>
+          <a:ln/>
+        </p:spPr>
+        <p:txBody>
+          <a:bodyPr wrap="square" lIns="0" tIns="0" rIns="0" bIns="0" rtlCol="0" anchor="ctr"/>
+          <a:lstStyle/>
+          <a:p>
+            <a:pPr algn="l" indent="0" marL="0">
+              <a:buNone/>
+            </a:pPr>
+            <a:r>
+              <a:rPr lang="en-US" sz="950" b="1" spc="250" kern="0" dirty="0">
+                <a:solidFill>
+                  <a:srgbClr val="3FB6E8"/>
+                </a:solidFill>
+                <a:latin typeface="Calibri" pitchFamily="34" charset="0"/>
+                <a:ea typeface="Calibri" pitchFamily="34" charset="-122"/>
+                <a:cs typeface="Calibri" pitchFamily="34" charset="-120"/>
+              </a:rPr>
+              <a:t>KEDY</a:t>
+            </a:r>
+            <a:endParaRPr lang="en-US" sz="950" dirty="0"/>
+          </a:p>
+        </p:txBody>
+      </p:sp>
+      <p:sp>
+        <p:nvSpPr>
+          <p:cNvPr id="8" name="Text 6"/>
+          <p:cNvSpPr txBox="1"/>
+          <p:nvPr/>
+        </p:nvSpPr>
+        <p:spPr>
+          <a:xfrm>
+            <a:off x="896112" y="3246120"/>
+            <a:ext cx="4800600" cy="777240"/>
+          </a:xfrm>
+          <a:prstGeom prst="rect">
+            <a:avLst/>
+          </a:prstGeom>
+          <a:noFill/>
+          <a:ln/>
+        </p:spPr>
+        <p:txBody>
+          <a:bodyPr wrap="square" lIns="0" tIns="0" rIns="0" bIns="0" rtlCol="0" anchor="ctr"/>
+          <a:lstStyle/>
+          <a:p>
+            <a:pPr indent="0" marL="0">
+              <a:lnSpc>
+                <a:spcPct val="105000"/>
+              </a:lnSpc>
+              <a:buNone/>
+            </a:pPr>
+            <a:r>
+              <a:rPr lang="en-US" sz="1250" b="1" dirty="0">
+                <a:solidFill>
+                  <a:srgbClr val="F2F6F8"/>
+                </a:solidFill>
+                <a:latin typeface="Calibri" pitchFamily="34" charset="0"/>
+                <a:ea typeface="Calibri" pitchFamily="34" charset="-122"/>
+                <a:cs typeface="Calibri" pitchFamily="34" charset="-120"/>
+              </a:rPr>
+              <a:t>Teraz</a:t>
+            </a:r>
+            <a:endParaRPr lang="en-US" sz="1250" dirty="0"/>
+          </a:p>
+          <a:p>
+            <a:pPr indent="0" marL="0">
+              <a:lnSpc>
+                <a:spcPct val="105000"/>
+              </a:lnSpc>
+              <a:buNone/>
+            </a:pPr>
+            <a:r>
+              <a:rPr lang="en-US" sz="1100" dirty="0">
+                <a:solidFill>
+                  <a:srgbClr val="8DA2B2"/>
+                </a:solidFill>
+                <a:latin typeface="Calibri" pitchFamily="34" charset="0"/>
+                <a:ea typeface="Calibri" pitchFamily="34" charset="-122"/>
+                <a:cs typeface="Calibri" pitchFamily="34" charset="-120"/>
+              </a:rPr>
+              <a:t>žiadna zmluva, žiadny vklad — piloty bežia na mojej strane, riziko firmy je nulové</a:t>
+            </a:r>
+            <a:endParaRPr lang="en-US" sz="1250" dirty="0"/>
+          </a:p>
+        </p:txBody>
+      </p:sp>
+      <p:sp>
+        <p:nvSpPr>
+          <p:cNvPr id="9" name="Text 7"/>
+          <p:cNvSpPr txBox="1"/>
+          <p:nvPr/>
+        </p:nvSpPr>
+        <p:spPr>
+          <a:xfrm>
+            <a:off x="896112" y="4114800"/>
+            <a:ext cx="4800600" cy="777240"/>
+          </a:xfrm>
+          <a:prstGeom prst="rect">
+            <a:avLst/>
+          </a:prstGeom>
+          <a:noFill/>
+          <a:ln/>
+        </p:spPr>
+        <p:txBody>
+          <a:bodyPr wrap="square" lIns="0" tIns="0" rIns="0" bIns="0" rtlCol="0" anchor="ctr"/>
+          <a:lstStyle/>
+          <a:p>
+            <a:pPr indent="0" marL="0">
+              <a:lnSpc>
+                <a:spcPct val="105000"/>
+              </a:lnSpc>
+              <a:buNone/>
+            </a:pPr>
+            <a:r>
+              <a:rPr lang="en-US" sz="1250" b="1" dirty="0">
+                <a:solidFill>
+                  <a:srgbClr val="39D98A"/>
+                </a:solidFill>
+                <a:latin typeface="Calibri" pitchFamily="34" charset="0"/>
+                <a:ea typeface="Calibri" pitchFamily="34" charset="-122"/>
+                <a:cs typeface="Calibri" pitchFamily="34" charset="-120"/>
+              </a:rPr>
+              <a:t>Pilot prejde gateom</a:t>
+            </a:r>
+            <a:endParaRPr lang="en-US" sz="1250" dirty="0"/>
+          </a:p>
+          <a:p>
+            <a:pPr indent="0" marL="0">
+              <a:lnSpc>
+                <a:spcPct val="105000"/>
+              </a:lnSpc>
+              <a:buNone/>
+            </a:pPr>
+            <a:r>
+              <a:rPr lang="en-US" sz="1100" dirty="0">
+                <a:solidFill>
+                  <a:srgbClr val="8DA2B2"/>
+                </a:solidFill>
+                <a:latin typeface="Calibri" pitchFamily="34" charset="0"/>
+                <a:ea typeface="Calibri" pitchFamily="34" charset="-122"/>
+                <a:cs typeface="Calibri" pitchFamily="34" charset="-120"/>
+              </a:rPr>
+              <a:t>dohodneme formu spolupráce — najskôr Peritora, potom Splato</a:t>
+            </a:r>
+            <a:endParaRPr lang="en-US" sz="1250" dirty="0"/>
+          </a:p>
+        </p:txBody>
+      </p:sp>
+      <p:sp>
+        <p:nvSpPr>
+          <p:cNvPr id="10" name="Text 8"/>
+          <p:cNvSpPr txBox="1"/>
+          <p:nvPr/>
+        </p:nvSpPr>
+        <p:spPr>
+          <a:xfrm>
+            <a:off x="896112" y="4983480"/>
+            <a:ext cx="4800600" cy="777240"/>
+          </a:xfrm>
+          <a:prstGeom prst="rect">
+            <a:avLst/>
+          </a:prstGeom>
+          <a:noFill/>
+          <a:ln/>
+        </p:spPr>
+        <p:txBody>
+          <a:bodyPr wrap="square" lIns="0" tIns="0" rIns="0" bIns="0" rtlCol="0" anchor="ctr"/>
+          <a:lstStyle/>
+          <a:p>
+            <a:pPr indent="0" marL="0">
+              <a:lnSpc>
+                <a:spcPct val="105000"/>
+              </a:lnSpc>
+              <a:buNone/>
+            </a:pPr>
+            <a:r>
+              <a:rPr lang="en-US" sz="1250" b="1" dirty="0">
+                <a:solidFill>
+                  <a:srgbClr val="F2F6F8"/>
+                </a:solidFill>
+                <a:latin typeface="Calibri" pitchFamily="34" charset="0"/>
+                <a:ea typeface="Calibri" pitchFamily="34" charset="-122"/>
+                <a:cs typeface="Calibri" pitchFamily="34" charset="-120"/>
+              </a:rPr>
+              <a:t>Od založenia</a:t>
+            </a:r>
+            <a:endParaRPr lang="en-US" sz="1250" dirty="0"/>
+          </a:p>
+          <a:p>
+            <a:pPr indent="0" marL="0">
+              <a:lnSpc>
+                <a:spcPct val="105000"/>
+              </a:lnSpc>
+              <a:buNone/>
+            </a:pPr>
+            <a:r>
+              <a:rPr lang="en-US" sz="1100" dirty="0">
+                <a:solidFill>
+                  <a:srgbClr val="8DA2B2"/>
+                </a:solidFill>
+                <a:latin typeface="Calibri" pitchFamily="34" charset="0"/>
+                <a:ea typeface="Calibri" pitchFamily="34" charset="-122"/>
+                <a:cs typeface="Calibri" pitchFamily="34" charset="-120"/>
+              </a:rPr>
+              <a:t>vlastný P&amp;L a vlastná databáza od prvého eura — podmienka oddeliteľnosti a exitu</a:t>
+            </a:r>
+            <a:endParaRPr lang="en-US" sz="1250" dirty="0"/>
+          </a:p>
+        </p:txBody>
+      </p:sp>
+      <p:sp>
+        <p:nvSpPr>
+          <p:cNvPr id="11" name="Shape 9"/>
+          <p:cNvSpPr/>
+          <p:nvPr/>
+        </p:nvSpPr>
+        <p:spPr>
+          <a:xfrm>
+            <a:off x="6190488" y="2606040"/>
+            <a:ext cx="5440680" cy="3246120"/>
+          </a:xfrm>
+          <a:prstGeom prst="roundRect">
+            <a:avLst>
+              <a:gd name="adj" fmla="val 1972"/>
+            </a:avLst>
+          </a:prstGeom>
+          <a:solidFill>
+            <a:srgbClr val="111C26"/>
+          </a:solidFill>
+          <a:ln w="12700">
+            <a:solidFill>
+              <a:srgbClr val="263A4C"/>
+            </a:solidFill>
+            <a:prstDash val="solid"/>
+          </a:ln>
+        </p:spPr>
+      </p:sp>
+      <p:sp>
+        <p:nvSpPr>
+          <p:cNvPr id="12" name="Text 10"/>
+          <p:cNvSpPr txBox="1"/>
+          <p:nvPr/>
+        </p:nvSpPr>
+        <p:spPr>
+          <a:xfrm>
+            <a:off x="6519672" y="2880360"/>
+            <a:ext cx="4754880" cy="256032"/>
+          </a:xfrm>
+          <a:prstGeom prst="rect">
+            <a:avLst/>
+          </a:prstGeom>
+          <a:noFill/>
+          <a:ln/>
+        </p:spPr>
+        <p:txBody>
+          <a:bodyPr wrap="square" lIns="0" tIns="0" rIns="0" bIns="0" rtlCol="0" anchor="ctr"/>
+          <a:lstStyle/>
+          <a:p>
+            <a:pPr algn="l" indent="0" marL="0">
+              <a:buNone/>
+            </a:pPr>
+            <a:r>
+              <a:rPr lang="en-US" sz="950" b="1" spc="250" kern="0" dirty="0">
+                <a:solidFill>
+                  <a:srgbClr val="3FB6E8"/>
+                </a:solidFill>
+                <a:latin typeface="Calibri" pitchFamily="34" charset="0"/>
+                <a:ea typeface="Calibri" pitchFamily="34" charset="-122"/>
+                <a:cs typeface="Calibri" pitchFamily="34" charset="-120"/>
+              </a:rPr>
+              <a:t>AKO — NÁVRH NA DISKUSIU</a:t>
+            </a:r>
+            <a:endParaRPr lang="en-US" sz="950" dirty="0"/>
+          </a:p>
+        </p:txBody>
+      </p:sp>
+      <p:sp>
+        <p:nvSpPr>
+          <p:cNvPr id="13" name="Text 11"/>
+          <p:cNvSpPr txBox="1"/>
+          <p:nvPr/>
+        </p:nvSpPr>
+        <p:spPr>
+          <a:xfrm>
+            <a:off x="6519672" y="3246120"/>
+            <a:ext cx="4892040" cy="2377440"/>
+          </a:xfrm>
+          <a:prstGeom prst="rect">
+            <a:avLst/>
+          </a:prstGeom>
+          <a:noFill/>
+          <a:ln/>
+        </p:spPr>
+        <p:txBody>
+          <a:bodyPr wrap="square" lIns="0" tIns="0" rIns="0" bIns="0" rtlCol="0" anchor="ctr"/>
+          <a:lstStyle/>
+          <a:p>
+            <a:pPr indent="0" marL="0">
+              <a:lnSpc>
+                <a:spcPct val="105000"/>
+              </a:lnSpc>
+              <a:spcAft>
+                <a:spcPts val="600"/>
+              </a:spcAft>
+              <a:buNone/>
+            </a:pPr>
+            <a:r>
+              <a:rPr lang="en-US" sz="1400" b="1" dirty="0">
+                <a:solidFill>
+                  <a:srgbClr val="F2F6F8"/>
+                </a:solidFill>
+                <a:latin typeface="Calibri" pitchFamily="34" charset="0"/>
+                <a:ea typeface="Calibri" pitchFamily="34" charset="-122"/>
+                <a:cs typeface="Calibri" pitchFamily="34" charset="-120"/>
+              </a:rPr>
+              <a:t>Nová s.r.o. pre produkt, 51 % Forbes / 49 % Monetize.CX</a:t>
+            </a:r>
+            <a:endParaRPr lang="en-US" sz="1150" dirty="0"/>
+          </a:p>
+          <a:p>
+            <a:pPr indent="0" marL="0">
+              <a:lnSpc>
+                <a:spcPct val="105000"/>
+              </a:lnSpc>
+              <a:spcAft>
+                <a:spcPts val="600"/>
+              </a:spcAft>
+              <a:buNone/>
+            </a:pPr>
+            <a:endParaRPr lang="en-US" sz="1150" dirty="0"/>
+          </a:p>
+          <a:p>
+            <a:pPr marL="342900" indent="-342900">
+              <a:lnSpc>
+                <a:spcPct val="105000"/>
+              </a:lnSpc>
+              <a:spcAft>
+                <a:spcPts val="600"/>
+              </a:spcAft>
+              <a:buSzPct val="100000"/>
+              <a:buChar char="–"/>
+            </a:pPr>
+            <a:r>
+              <a:rPr lang="en-US" sz="1150" dirty="0">
+                <a:solidFill>
+                  <a:srgbClr val="8DA2B2"/>
+                </a:solidFill>
+                <a:latin typeface="Calibri" pitchFamily="34" charset="0"/>
+                <a:ea typeface="Calibri" pitchFamily="34" charset="-122"/>
+                <a:cs typeface="Calibri" pitchFamily="34" charset="-120"/>
+              </a:rPr>
+              <a:t>Forbes má kontrolu aj väčšinu upside-u; ja mám skin in the game.</a:t>
+            </a:r>
+            <a:endParaRPr lang="en-US" sz="1150" dirty="0"/>
+          </a:p>
+          <a:p>
+            <a:pPr marL="342900" indent="-342900">
+              <a:lnSpc>
+                <a:spcPct val="105000"/>
+              </a:lnSpc>
+              <a:spcAft>
+                <a:spcPts val="600"/>
+              </a:spcAft>
+              <a:buSzPct val="100000"/>
+              <a:buChar char="–"/>
+            </a:pPr>
+            <a:r>
+              <a:rPr lang="en-US" sz="1150" dirty="0">
+                <a:solidFill>
+                  <a:srgbClr val="8DA2B2"/>
+                </a:solidFill>
+                <a:latin typeface="Calibri" pitchFamily="34" charset="0"/>
+                <a:ea typeface="Calibri" pitchFamily="34" charset="-122"/>
+                <a:cs typeface="Calibri" pitchFamily="34" charset="-120"/>
+              </a:rPr>
+              <a:t>Vklad Forbesu: značka a distribúcia. Môj vklad: produkt, metodika, prevádzka.</a:t>
+            </a:r>
+            <a:endParaRPr lang="en-US" sz="1150" dirty="0"/>
+          </a:p>
+          <a:p>
+            <a:pPr marL="342900" indent="-342900">
+              <a:lnSpc>
+                <a:spcPct val="105000"/>
+              </a:lnSpc>
+              <a:spcAft>
+                <a:spcPts val="600"/>
+              </a:spcAft>
+              <a:buSzPct val="100000"/>
+              <a:buChar char="–"/>
+            </a:pPr>
+            <a:r>
+              <a:rPr lang="en-US" sz="1150" dirty="0">
+                <a:solidFill>
+                  <a:srgbClr val="8DA2B2"/>
+                </a:solidFill>
+                <a:latin typeface="Calibri" pitchFamily="34" charset="0"/>
+                <a:ea typeface="Calibri" pitchFamily="34" charset="-122"/>
+                <a:cs typeface="Calibri" pitchFamily="34" charset="-120"/>
+              </a:rPr>
+              <a:t>Pri exite sa predáva s.r.o. — preto tri produkty znamenajú tri nezávislé exity.</a:t>
+            </a:r>
+            <a:endParaRPr lang="en-US" sz="1150" dirty="0"/>
+          </a:p>
+        </p:txBody>
+      </p:sp>
+      <p:sp>
+        <p:nvSpPr>
+          <p:cNvPr id="14" name="Text 12"/>
+          <p:cNvSpPr txBox="1"/>
+          <p:nvPr/>
+        </p:nvSpPr>
+        <p:spPr>
+          <a:xfrm>
+            <a:off x="566928" y="6172200"/>
+            <a:ext cx="11064240" cy="365760"/>
+          </a:xfrm>
+          <a:prstGeom prst="rect">
+            <a:avLst/>
+          </a:prstGeom>
+          <a:noFill/>
+          <a:ln/>
+        </p:spPr>
+        <p:txBody>
+          <a:bodyPr wrap="square" lIns="0" tIns="0" rIns="0" bIns="0" rtlCol="0" anchor="ctr"/>
+          <a:lstStyle/>
+          <a:p>
+            <a:pPr algn="ctr" indent="0" marL="0">
+              <a:buNone/>
+            </a:pPr>
+            <a:r>
+              <a:rPr lang="en-US" sz="1400" i="1" dirty="0">
+                <a:solidFill>
+                  <a:srgbClr val="F2F6F8"/>
+                </a:solidFill>
+                <a:latin typeface="Cambria" pitchFamily="34" charset="0"/>
+                <a:ea typeface="Cambria" pitchFamily="34" charset="-122"/>
+                <a:cs typeface="Cambria" pitchFamily="34" charset="-120"/>
+              </a:rPr>
+              <a:t>Pomer 51 / 49 a presné podmienky = bod na diskusiu 4. 9. — návrh, nie podmienka.</a:t>
+            </a:r>
+            <a:endParaRPr lang="en-US" sz="1400" dirty="0"/>
+          </a:p>
+        </p:txBody>
+      </p:sp>
+    </p:spTree>
+  </p:cSld>
+  <p:clrMapOvr>
+    <a:masterClrMapping/>
+  </p:clrMapOvr>
+</p:sld>
+</file>
+
+<file path=ppt/slides/slide14.xml><?xml version="1.0" encoding="utf-8"?>
+<p:sld xmlns:a="http://schemas.openxmlformats.org/drawingml/2006/main" xmlns:r="http://schemas.openxmlformats.org/officeDocument/2006/relationships" xmlns:p="http://schemas.openxmlformats.org/presentationml/2006/main">
+  <p:cSld name="Slide 14">
     <p:bg>
       <p:bgPr>
         <a:solidFill>
